--- a/presentation/OpenGov_Data_Platform_CaseStudy.pptx
+++ b/presentation/OpenGov_Data_Platform_CaseStudy.pptx
@@ -529,7 +529,7 @@
           <a:lstStyle/>
           <a:p>
             <a:r>
-              <a:t>Open with the thesis: I build the factory — the governed foundation that lets every domain team ship analytics and AI on top, safely and fast. Today I'll walk foundation -&gt; pipelines -&gt; self-service -&gt; trust &amp; governance, then close with a forward-looking bet on making the platform AI-ready.</a:t>
+              <a:t>Open with the thesis: I build the factory, the governed foundation that lets every domain team ship analytics and AI on top, safely and fast. Today I'll walk foundation -&gt; pipelines -&gt; self-service -&gt; trust &amp; governance, then close with a forward-looking bet on making the platform AI-ready.</a:t>
             </a:r>
           </a:p>
         </p:txBody>
@@ -599,7 +599,7 @@
           <a:lstStyle/>
           <a:p>
             <a:r>
-              <a:t>Snowflake's recommended two-tier model: access roles hold object privileges; functional roles (job-based) inherit access roles; users get functional roles. Why it scales: access roles are reusable primitives, so a 10th domain is a generated set of roles — no bespoke grant spaghetti. Service accounts get their own functional roles (dbt vs human analyst). Row-access policies enforce tenant/region isolation on shared tables. This exact model is what I build in Part 2.</a:t>
+              <a:t>Snowflake's recommended two-tier model: access roles hold object privileges; functional roles (job-based) inherit access roles; users get functional roles. Why it scales: access roles are reusable primitives, so a 10th domain is a generated set of roles, no bespoke grant spaghetti. Service accounts get their own functional roles (dbt vs human analyst). Row-access policies enforce tenant/region isolation on shared tables. This exact model is what I build in Part 2.</a:t>
             </a:r>
           </a:p>
         </p:txBody>
@@ -739,7 +739,7 @@
           <a:lstStyle/>
           <a:p>
             <a:r>
-              <a:t>This is my point of view. The trap everyone is walking into: pointing LLMs at raw warehouses. Without a semantic layer, the model guesses join logic and metric definitions — confidently wrong. Solution: a governed metrics/semantic layer as the single interface for humans AND AI, plus data contracts enforced in CI so definitions can't silently drift. Crucially, Snowflake's masking/row policies apply to the LLM's service account — governance isn't bypassed by AI. This is how OpenGov gets trustworthy AI, not just more AI.</a:t>
+              <a:t>This is my point of view. The trap everyone is walking into: pointing LLMs at raw warehouses. Without a semantic layer, the model guesses join logic and metric definitions, confidently wrong. Solution: a governed metrics/semantic layer as the single interface for humans AND AI, plus data contracts enforced in CI so definitions can't silently drift. Crucially, Snowflake's masking/row policies apply to the LLM's service account, governance isn't bypassed by AI. This is how OpenGov gets trustworthy AI, not just more AI.</a:t>
             </a:r>
           </a:p>
         </p:txBody>
@@ -809,7 +809,7 @@
           <a:lstStyle/>
           <a:p>
             <a:r>
-              <a:t>Orient the panel: this is the same architecture, now real. Each bullet is a deliverable I can open live. Emphasize config-driven + CI-deployed — no click-ops.</a:t>
+              <a:t>Orient the panel: this is the same architecture, now real. Each bullet is a deliverable I can open live. Emphasize config-driven + CI-deployed, no click-ops.</a:t>
             </a:r>
           </a:p>
         </p:txBody>
@@ -879,7 +879,7 @@
           <a:lstStyle/>
           <a:p>
             <a:r>
-              <a:t>Walk each layer: ingestion roles are scoped to exactly their landing schema (Fivetran owns its DDL; the ADLS loader is DML-only against a platform-owned contract). Shared STAGING/MARTS are written ONLY by REVOPS_DEVELOPER through the dbt CI job — no human holds that role. Readers read all; analysts read marts; a domain analyst is scoped to that domain's marts (FINANCE_ANALYST in the appendix).</a:t>
+              <a:t>Walk each layer: ingestion roles are scoped to exactly their landing schema (Fivetran owns its DDL; the ADLS loader is DML-only against a platform-owned contract). Shared STAGING/MARTS are written ONLY by REVOPS_DEVELOPER through the dbt CI job, no human holds that role. Readers read all; analysts read marts; a domain analyst is scoped to that domain's marts (FINANCE_ANALYST in the appendix).</a:t>
             </a:r>
           </a:p>
         </p:txBody>
@@ -1019,7 +1019,7 @@
           <a:lstStyle/>
           <a:p>
             <a:r>
-              <a:t>This is the brief's ingestion task, 1:1 — only S3 became ADLS (owner decision, boto3 pattern ported to the Azure Blob SDK). The null-user_id record from the sample payload is exactly what the quarantine catches. Partial-batch: good rows commit, bad rows quarantine, never fail the whole file. Lambda-on-arrival and a second event type (config-driven) are the extension answers.</a:t>
+              <a:t>This is the brief's ingestion task, 1:1, only S3 became ADLS (owner decision, boto3 pattern ported to the Azure Blob SDK). The null-user_id record from the sample payload is exactly what the quarantine catches. Partial-batch: good rows commit, bad rows quarantine, never fail the whole file. Lambda-on-arrival and a second event type (config-driven) are the extension answers.</a:t>
             </a:r>
           </a:p>
         </p:txBody>
@@ -1089,7 +1089,7 @@
           <a:lstStyle/>
           <a:p>
             <a:r>
-              <a:t>Native dbt on Snowflake: the repo runs as a DBT PROJECT object, executed in-account as REVOPS_DEVELOPER — the CI runner never builds models. Incremental vs full-refresh is the volume decision (appendix). mart_revops__pipeline is the mesh public model.</a:t>
+              <a:t>Native dbt on Snowflake: the repo runs as a DBT PROJECT object, executed in-account as REVOPS_DEVELOPER, the CI runner never builds models. Incremental vs full-refresh is the volume decision (appendix). mart_revops__pipeline is the mesh public model.</a:t>
             </a:r>
           </a:p>
         </p:txBody>
@@ -1229,7 +1229,7 @@
           <a:lstStyle/>
           <a:p>
             <a:r>
-              <a:t>This is the 'paved path' for a person. The composite role is the key design: read everything, write only your sandbox, one role active — no secondary-role ambiguity. Onboarding is a two-line PR (demonstrated live with AKASHPAHILWAN, SOURABH_SHINDE, ANUJKUMAR).</a:t>
+              <a:t>This is the 'paved path' for a person. The composite role is the key design: read everything, write only your sandbox, one role active, no secondary-role ambiguity. Onboarding is a two-line PR (demonstrated live with AKASHPAHILWAN, SOURABH_SHINDE, ANUJKUMAR).</a:t>
             </a:r>
           </a:p>
         </p:txBody>
@@ -1299,7 +1299,7 @@
           <a:lstStyle/>
           <a:p>
             <a:r>
-              <a:t>Frame the role: a platform engineer's customer is other engineers/analysts. The job is to make the right thing the easy thing. Stress federation with guardrails — central team owns the paved path, domains own their data products. These four principles recur on every later slide.</a:t>
+              <a:t>Frame the role: a platform engineer's customer is other engineers/analysts. The job is to make the right thing the easy thing. Stress federation with guardrails, central team owns the paved path, domains own their data products. These four principles recur on every later slide.</a:t>
             </a:r>
           </a:p>
         </p:txBody>
@@ -1369,7 +1369,7 @@
           <a:lstStyle/>
           <a:p>
             <a:r>
-              <a:t>Land the thesis: platform-as-product, governed by default, self-service, running end-to-end. Invite deep-dive questions — the appendix has the internals.</a:t>
+              <a:t>Land the thesis: platform-as-product, governed by default, self-service, running end-to-end. Invite deep-dive questions, the appendix has the internals.</a:t>
             </a:r>
           </a:p>
         </p:txBody>
@@ -1439,7 +1439,7 @@
           <a:lstStyle/>
           <a:p>
             <a:r>
-              <a:t>Direct answer to 'how does this scale to 10 domains + how do you handle service vs human + audit'. The FINANCE_ANALYST demo is the concrete proof of domain-scoped least privilege — built and verified live.</a:t>
+              <a:t>Direct answer to 'how does this scale to 10 domains + how do you handle service vs human + audit'. The FINANCE_ANALYST demo is the concrete proof of domain-scoped least privilege, built and verified live.</a:t>
             </a:r>
           </a:p>
         </p:txBody>
@@ -1649,7 +1649,7 @@
           <a:lstStyle/>
           <a:p>
             <a:r>
-              <a:t>BONUS / HIDDEN — pull up only if the panel digs into VARIANT performance. Key message: VARIANT is not a JSON string column. On write, Snowflake examines paths that occur consistently across rows in a micro-partition and stores each as its own typed, compressed sub-column with min/max metadata — so path projection and partition pruning behave like native columns. It degrades only when keys are wildly inconsistent row-to-row; the fix is promoting hot keys (event_id) to real columns, which we do anyway for dedup. Drift behavior: missing key reads as NULL (never an error), new keys are invisible until a PR selects them, and TRY_CAST + dbt tests turn type drift into a quarantine signal instead of a failed job. 16 MB/value limit is ~4 orders of magnitude above a telemetry event. One-breath close: 'stable RAW DDL, columnarized paths, type once in incremental staging — downstream never touches JSON.'</a:t>
+              <a:t>BONUS / HIDDEN, pull up only if the panel digs into VARIANT performance. Key message: VARIANT is not a JSON string column. On write, Snowflake examines paths that occur consistently across rows in a micro-partition and stores each as its own typed, compressed sub-column with min/max metadata, so path projection and partition pruning behave like native columns. It degrades only when keys are wildly inconsistent row-to-row; the fix is promoting hot keys (event_id) to real columns, which we do anyway for dedup. Drift behavior: missing key reads as NULL (never an error), new keys are invisible until a PR selects them, and TRY_CAST + dbt tests turn type drift into a quarantine signal instead of a failed job. 16 MB/value limit is ~4 orders of magnitude above a telemetry event. One-breath close: 'stable RAW DDL, columnarized paths, type once in incremental staging, downstream never touches JSON.'</a:t>
             </a:r>
           </a:p>
         </p:txBody>
@@ -1719,7 +1719,7 @@
           <a:lstStyle/>
           <a:p>
             <a:r>
-              <a:t>BONUS / HIDDEN — pull up if asked about bucket layout, hourly cadence, or 'why not Snowpipe'. Hive-style dt=/hr= prefixes sort lexicographically by time, so the watermark is just the last processed prefix; re-scan a trailing 24-48h window so late-arriving files in an old hour still load (COPY's file history dedups the overlap for free). Append-only stance: never 'replace with latest' — RAW keeps every loaded row; dedup and current-state are computed in staging (QUALIFY on event_id). Snowpipe question: for the case-study deliverable I keep a scheduled Python job + COPY, because the assessed logic — schema validation, quarantine, _LOAD_LOG summary — lives in that code, and hourly batch on an XS warehouse is cheap. In production, with files landing continuously, I'd flip to Snowpipe: S3 event notification -&gt; per-file auto-ingest, exactly-once per file, ~1-minute latency, no scheduler or watermark logic at all; validation then moves to a post-load stream/task. Same table, same append-only contract — only the trigger changes. 64-day detail: COPY's per-file load history EXPIRES after 64 days. A backfill touching older files is silently SKIPPED by default (status unknown -&gt; skip, no error — a silent gap, not duplicates). Deliberate old backfill: set LOAD_UNCERTAIN_FILES=TRUE (staging's event_id dedup absorbs any repeats) or FORCE=TRUE into a fresh table + SWAP. This expiry is exactly why the design has three layers — COPY history expires, a watermark can miss late files, so event_id dedup in staging is the backstop that never expires.</a:t>
+              <a:t>BONUS / HIDDEN, pull up if asked about bucket layout, hourly cadence, or 'why not Snowpipe'. Hive-style dt=/hr= prefixes sort lexicographically by time, so the watermark is just the last processed prefix; re-scan a trailing 24-48h window so late-arriving files in an old hour still load (COPY's file history dedups the overlap for free). Append-only stance: never 'replace with latest', RAW keeps every loaded row; dedup and current-state are computed in staging (QUALIFY on event_id). Snowpipe question: for the case-study deliverable I keep a scheduled Python job + COPY, because the assessed logic, schema validation, quarantine, _LOAD_LOG summary, lives in that code, and hourly batch on an XS warehouse is cheap. In production, with files landing continuously, I'd flip to Snowpipe: S3 event notification -&gt; per-file auto-ingest, exactly-once per file, ~1-minute latency, no scheduler or watermark logic at all; validation then moves to a post-load stream/task. Same table, same append-only contract, only the trigger changes. 64-day detail: COPY's per-file load history EXPIRES after 64 days. A backfill touching older files is silently SKIPPED by default (status unknown -&gt; skip, no error, a silent gap, not duplicates). Deliberate old backfill: set LOAD_UNCERTAIN_FILES=TRUE (staging's event_id dedup absorbs any repeats) or FORCE=TRUE into a fresh table + SWAP. This expiry is exactly why the design has three layers, COPY history expires, a watermark can miss late files, so event_id dedup in staging is the backstop that never expires.</a:t>
             </a:r>
           </a:p>
         </p:txBody>
@@ -1789,7 +1789,7 @@
           <a:lstStyle/>
           <a:p>
             <a:r>
-              <a:t>BONUS / HIDDEN — pull up for 'can we see what COPY loaded?' or the 64-day follow-up. Three observable layers: (1) COPY INTO itself returns a result set — one row per file with status, rows_parsed, rows_loaded, errors_seen, first_error — and the Part 2 Python job captures exactly this into _LOAD_LOG, which is the brief's load-summary requirement and lives forever. (2) COPY_HISTORY / LOAD_HISTORY: INFORMATION_SCHEMA table functions keep 14 days per table; SNOWFLAKE.ACCOUNT_USAGE views keep 365 days account-wide with up to ~90 min latency — these are audit/observability surfaces. (3) Distinct from both: the internal per-file dedup metadata COPY consults to skip already-loaded files — 64-day lifetime, not directly queryable. Beyond 64 days the load status is 'unknown' and COPY silently SKIPS the file by default (gap, not duplicates); deliberate backfills set LOAD_UNCERTAIN_FILES=TRUE and let staging's event_id dedup absorb repeats, or rebuild with FORCE=TRUE + SWAP. Close with the three-layer line: history expires, watermarks miss late files, staging dedup never expires.</a:t>
+              <a:t>BONUS / HIDDEN, pull up for 'can we see what COPY loaded?' or the 64-day follow-up. Three observable layers: (1) COPY INTO itself returns a result set, one row per file with status, rows_parsed, rows_loaded, errors_seen, first_error, and the Part 2 Python job captures exactly this into _LOAD_LOG, which is the brief's load-summary requirement and lives forever. (2) COPY_HISTORY / LOAD_HISTORY: INFORMATION_SCHEMA table functions keep 14 days per table; SNOWFLAKE.ACCOUNT_USAGE views keep 365 days account-wide with up to ~90 min latency, these are audit/observability surfaces. (3) Distinct from both: the internal per-file dedup metadata COPY consults to skip already-loaded files, 64-day lifetime, not directly queryable. Beyond 64 days the load status is 'unknown' and COPY silently SKIPS the file by default (gap, not duplicates); deliberate backfills set LOAD_UNCERTAIN_FILES=TRUE and let staging's event_id dedup absorb repeats, or rebuild with FORCE=TRUE + SWAP. Close with the three-layer line: history expires, watermarks miss late files, staging dedup never expires.</a:t>
             </a:r>
           </a:p>
         </p:txBody>
@@ -1859,7 +1859,7 @@
           <a:lstStyle/>
           <a:p>
             <a:r>
-              <a:t>This is the anchor diagram — walk it left to right. Sources land via Fivetran (connectorized SaaS) or a custom Python path on AWS (S3 + Lambda) for telemetry and bespoke APIs. Everything lands in Snowflake RAW, then dbt promotes RAW→STAGING→MARTS, with SANDBOX for exploration. Consumers are BI, AI/ML + LLM/RAG, and reverse ETL. The navy band is the cross-cutting foundation that every layer sits on: IaC, RBAC+masking, observability, CI/CD. Invite the 'why Fivetran here, Lambda there' question — next slide answers it.</a:t>
+              <a:t>This is the anchor diagram, walk it left to right. Sources land via Fivetran (connectorized SaaS) or a custom Python path on AWS (S3 + Lambda) for telemetry and bespoke APIs. Everything lands in Snowflake RAW, then dbt promotes RAW→STAGING→MARTS, with SANDBOX for exploration. Consumers are BI, AI/ML + LLM/RAG, and reverse ETL. The navy band is the cross-cutting foundation that every layer sits on: IaC, RBAC+masking, observability, CI/CD. Invite the 'why Fivetran here, Lambda there' question, next slide answers it.</a:t>
             </a:r>
           </a:p>
         </p:txBody>
@@ -1929,7 +1929,7 @@
           <a:lstStyle/>
           <a:p>
             <a:r>
-              <a:t>The decision rule: buy vs build on control, cost curve, and whether a reliable connector exists. Fivetran wins for SaaS — someone else maintains the connector and absorbs API changes. Telemetry is the opposite: huge volume, simple shape, cost at Fivetran's per-row pricing would be brutal, and we want near-real-time via S3 events → Lambda. So we own that path. Be ready to defend the cost math.</a:t>
+              <a:t>The decision rule: buy vs build on control, cost curve, and whether a reliable connector exists. Fivetran wins for SaaS, someone else maintains the connector and absorbs API changes. Telemetry is the opposite: huge volume, simple shape, cost at Fivetran's per-row pricing would be brutal, and we want near-real-time via S3 events → Lambda. So we own that path. Be ready to defend the cost math.</a:t>
             </a:r>
           </a:p>
         </p:txBody>
@@ -1999,7 +1999,7 @@
           <a:lstStyle/>
           <a:p>
             <a:r>
-              <a:t>This directly answers 'we deploy objects via CI/CD — how does drift fit?'. Separate the two schemas. The SOURCE shape is uncontrolled and can change any time; OUR objects are code and change only via a reviewed, tested PR. RAW uses a VARIANT column so upstream additions need no DDL and never break a load — CI/CD does not run on every upstream change. Drift is detected against a contract and surfaced (additive) or quarantined + alerted (breaking), but never auto-alters a deployed table. To make a new field real, an engineer adds one typed column in dbt via a PR; contracts + tests run in CI as the tripwire. Fivetran is the contrast: it is schema-on-WRITE — it types columns and ALTERs its own RAW tables when the source drifts — so the read-time boundary moves one layer down: dbt sources select only the columns we depend on, and the source contract + tests fail CI before bad data flows downstream. Crisp framing if pushed: schema-on-read is a property of the RAW layer. In the custom path we own RAW, so we land VARIANT and type late; in the Fivetran path Fivetran owns and evolves RAW, so our read-time contract is the dbt source. Either way, a new field enters the deployed model only through a reviewed PR. Use CREATE OR ALTER / additive, idempotent migrations so redeploys are safe on half-failures.</a:t>
+              <a:t>This directly answers 'we deploy objects via CI/CD, how does drift fit?'. Separate the two schemas. The SOURCE shape is uncontrolled and can change any time; OUR objects are code and change only via a reviewed, tested PR. RAW uses a VARIANT column so upstream additions need no DDL and never break a load, CI/CD does not run on every upstream change. Drift is detected against a contract and surfaced (additive) or quarantined + alerted (breaking), but never auto-alters a deployed table. To make a new field real, an engineer adds one typed column in dbt via a PR; contracts + tests run in CI as the tripwire. Fivetran is the contrast: it is schema-on-WRITE, it types columns and ALTERs its own RAW tables when the source drifts, so the read-time boundary moves one layer down: dbt sources select only the columns we depend on, and the source contract + tests fail CI before bad data flows downstream. Crisp framing if pushed: schema-on-read is a property of the RAW layer. In the custom path we own RAW, so we land VARIANT and type late; in the Fivetran path Fivetran owns and evolves RAW, so our read-time contract is the dbt source. Either way, a new field enters the deployed model only through a reviewed PR. Use CREATE OR ALTER / additive, idempotent migrations so redeploys are safe on half-failures.</a:t>
             </a:r>
           </a:p>
         </p:txBody>
@@ -2069,7 +2069,7 @@
           <a:lstStyle/>
           <a:p>
             <a:r>
-              <a:t>RAW is the system of record — never mutate it. Partition for replay and cheap pruning. The quarantine + load-log pattern gives operability: you can always answer 'did the 09:00 file land, and how many rows did we reject?' This maps one-to-one to the PAGE_VIEWS ingestion I build in Part 2, including the intentional null user_id record that gets quarantined.</a:t>
+              <a:t>RAW is the system of record, never mutate it. Partition for replay and cheap pruning. The quarantine + load-log pattern gives operability: you can always answer 'did the 09:00 file land, and how many rows did we reject?' This maps one-to-one to the PAGE_VIEWS ingestion I build in Part 2, including the intentional null user_id record that gets quarantined.</a:t>
             </a:r>
           </a:p>
         </p:txBody>
@@ -2209,7 +2209,7 @@
           <a:lstStyle/>
           <a:p>
             <a:r>
-              <a:t>The 1-to-10-domains question lives here. Answer: don't grow one monolith — split by domain with clear ownership, and use dbt Mesh contracts as the interface between domains. Public models are the API; internals can refactor freely. Incremental vs full-refresh is a volume/cost decision. Mention mart_revops__pipeline (Part 2) would be exposed as a PUBLIC contracted model.</a:t>
+              <a:t>The 1-to-10-domains question lives here. Answer: don't grow one monolith, split by domain with clear ownership, and use dbt Mesh contracts as the interface between domains. Public models are the API; internals can refactor freely. Incremental vs full-refresh is a volume/cost decision. Mention mart_revops__pipeline (Part 2) would be exposed as a PUBLIC contracted model.</a:t>
             </a:r>
           </a:p>
         </p:txBody>
@@ -2279,7 +2279,7 @@
           <a:lstStyle/>
           <a:p>
             <a:r>
-              <a:t>This is the 'factory' payoff and a differentiator vs teams that hand-craft each domain. A single opinionated Terraform module encodes all standards, so every new domain is born compliant. Teams self-serve via PR; the platform team reviews the module, not every request. This is how RBAC actually scales to 10 domains — it's generated, not hand-written.</a:t>
+              <a:t>This is the 'factory' payoff and a differentiator vs teams that hand-craft each domain. A single opinionated Terraform module encodes all standards, so every new domain is born compliant. Teams self-serve via PR; the platform team reviews the module, not every request. This is how RBAC actually scales to 10 domains, it's generated, not hand-written.</a:t>
             </a:r>
           </a:p>
         </p:txBody>
@@ -5422,7 +5422,7 @@
                 </a:solidFill>
                 <a:latin typeface="Segoe UI"/>
               </a:rPr>
-              <a:t>Case Study — Viewpoint</a:t>
+              <a:t>Case Study Presentation</a:t>
             </a:r>
           </a:p>
           <a:p>
@@ -6800,7 +6800,7 @@
                 </a:solidFill>
                 <a:latin typeface="Segoe UI"/>
               </a:rPr>
-              <a:t>Access roles are reused building blocks; add a domain = generate a new set — grants never sprawl.  Row-access policies handle multi-tenant isolation.</a:t>
+              <a:t>Access roles are reused building blocks; add a domain = generate a new set, grants never sprawl.  Row-access policies handle multi-tenant isolation.</a:t>
             </a:r>
           </a:p>
         </p:txBody>
@@ -6834,7 +6834,7 @@
                 </a:solidFill>
                 <a:latin typeface="Segoe UI"/>
               </a:rPr>
-              <a:t>OpenGov Data Platform  ·  Case Study — Viewpoint  ·  Akash Pahilwan</a:t>
+              <a:t>OpenGov Data Platform  ·  Case Study  ·  Akash Pahilwan</a:t>
             </a:r>
           </a:p>
         </p:txBody>
@@ -7033,7 +7033,7 @@
                 </a:solidFill>
                 <a:latin typeface="Segoe UI"/>
               </a:rPr>
-              <a:t>Observability — what we built</a:t>
+              <a:t>Observability, what we built</a:t>
             </a:r>
           </a:p>
         </p:txBody>
@@ -7108,7 +7108,7 @@
                 </a:solidFill>
                 <a:latin typeface="Segoe UI"/>
               </a:rPr>
-              <a:t>Load observability — PAGE_VIEWS_LOAD_LOG:   </a:t>
+              <a:t>Load observability, PAGE_VIEWS_LOAD_LOG:   </a:t>
             </a:r>
             <a:r>
               <a:rPr sz="1600">
@@ -7117,7 +7117,7 @@
                 </a:solidFill>
                 <a:latin typeface="Segoe UI"/>
               </a:rPr>
-              <a:t>one row per ingestion run (file, records loaded, quarantined, timestamp) — an audit trail that outlives COPY's 64-day history.</a:t>
+              <a:t>One row per ingestion run (file, records loaded, quarantined, timestamp), an audit trail that outlives COPY's 64-day history.</a:t>
             </a:r>
           </a:p>
           <a:p>
@@ -7154,7 +7154,7 @@
                 </a:solidFill>
                 <a:latin typeface="Segoe UI"/>
               </a:rPr>
-              <a:t>bad rows land in PAGE_VIEWS_QUARANTINE, countable per run (PROD: 9 loaded / 5 quarantined) — a reject-rate you can alert on.</a:t>
+              <a:t>Bad rows land in PAGE_VIEWS_QUARANTINE, countable per run (PROD: 9 loaded / 5 quarantined), a reject-rate you can alert on.</a:t>
             </a:r>
           </a:p>
           <a:p>
@@ -7191,7 +7191,7 @@
                 </a:solidFill>
                 <a:latin typeface="Segoe UI"/>
               </a:rPr>
-              <a:t>dbt not_null / unique / accepted_values / relationships run on every preprod &amp; prod build — a red test blocks the deploy.</a:t>
+              <a:t>dbt not_null / unique / accepted_values / relationships run on every preprod &amp; prod build, a red test blocks the deploy.</a:t>
             </a:r>
           </a:p>
           <a:p>
@@ -7265,7 +7265,7 @@
                 </a:solidFill>
                 <a:latin typeface="Segoe UI"/>
               </a:rPr>
-              <a:t>per-role warehouses (OG_&lt;ENV&gt;_&lt;ROLE&gt;_WH) + auto-suspend — spend is attributable to reader / analyst / dbt / ingestion, not one shared blob.</a:t>
+              <a:t>Per-role warehouses (OG_&lt;ENV&gt;_&lt;ROLE&gt;_WH) + auto-suspend, spend is attributable to reader / analyst / dbt / ingestion, not one shared blob.</a:t>
             </a:r>
           </a:p>
           <a:p>
@@ -7433,7 +7433,7 @@
                 </a:solidFill>
                 <a:latin typeface="Segoe UI"/>
               </a:rPr>
-              <a:t>We built the observable primitives — a per-file load log, a quarantine table, CI-gated tests, and native audit views — so 'did the load run and was it clean?' is a query, not a guess.</a:t>
+              <a:t>We built the observable primitives, a per-file load log, a quarantine table, CI-gated tests, and native audit views, so 'did the load run and was it clean?' is a query, not a guess.</a:t>
             </a:r>
           </a:p>
         </p:txBody>
@@ -7467,7 +7467,7 @@
                 </a:solidFill>
                 <a:latin typeface="Segoe UI"/>
               </a:rPr>
-              <a:t>OpenGov Data Platform  ·  Case Study — Viewpoint  ·  Akash Pahilwan</a:t>
+              <a:t>OpenGov Data Platform  ·  Case Study  ·  Akash Pahilwan</a:t>
             </a:r>
           </a:p>
         </p:txBody>
@@ -7787,7 +7787,7 @@
                 </a:solidFill>
                 <a:latin typeface="Segoe UI"/>
               </a:rPr>
-              <a:t>define metrics once (revenue, pipeline, churn) → one source of truth for BI, notebooks, and LLMs.</a:t>
+              <a:t>Define metrics once (revenue, pipeline, churn) → one source of truth for BI, notebooks, and LLMs.</a:t>
             </a:r>
           </a:p>
           <a:p>
@@ -7824,7 +7824,7 @@
                 </a:solidFill>
                 <a:latin typeface="Segoe UI"/>
               </a:rPr>
-              <a:t>producers commit to schema + semantics; breaking changes are blocked in CI — trust shifts left.</a:t>
+              <a:t>Producers commit to schema + semantics; breaking changes are blocked in CI, trust shifts left.</a:t>
             </a:r>
           </a:p>
           <a:p>
@@ -7861,7 +7861,7 @@
                 </a:solidFill>
                 <a:latin typeface="Segoe UI"/>
               </a:rPr>
-              <a:t>RAG and agents read documented, contracted marts + the semantic layer — never RAW.</a:t>
+              <a:t>RAG and agents read documented, contracted marts + the semantic layer, never RAW.</a:t>
             </a:r>
           </a:p>
           <a:p>
@@ -7889,7 +7889,7 @@
                 </a:solidFill>
                 <a:latin typeface="Segoe UI"/>
               </a:rPr>
-              <a:t>Governance already travels — true in this build:   </a:t>
+              <a:t>Governance already travels, true in this build:   </a:t>
             </a:r>
             <a:r>
               <a:rPr sz="1700">
@@ -7898,7 +7898,7 @@
                 </a:solidFill>
                 <a:latin typeface="Segoe UI"/>
               </a:rPr>
-              <a:t>our tag-masking + RBAC bind to the SESSION, not the tool. An LLM service account holding REVOPS_READER gets NULL for ARR today, exactly like a human reader — there is no AI bypass to build.</a:t>
+              <a:t>Our tag-masking + RBAC bind to the SESSION, not the tool. An LLM service account holding REVOPS_READER gets NULL for ARR today, exactly like a human reader, there is no AI bypass to build.</a:t>
             </a:r>
           </a:p>
         </p:txBody>
@@ -8029,7 +8029,7 @@
                 </a:solidFill>
                 <a:latin typeface="Segoe UI"/>
               </a:rPr>
-              <a:t>Trustworthy AI and trustworthy analytics come from the same governed foundation — the semantic layer is the interface.</a:t>
+              <a:t>Trustworthy AI and trustworthy analytics come from the same governed foundation, the semantic layer is the interface.</a:t>
             </a:r>
           </a:p>
         </p:txBody>
@@ -8063,7 +8063,7 @@
                 </a:solidFill>
                 <a:latin typeface="Segoe UI"/>
               </a:rPr>
-              <a:t>OpenGov Data Platform  ·  Case Study — Viewpoint  ·  Akash Pahilwan</a:t>
+              <a:t>OpenGov Data Platform  ·  Case Study  ·  Akash Pahilwan</a:t>
             </a:r>
           </a:p>
         </p:txBody>
@@ -8226,7 +8226,7 @@
                 </a:solidFill>
                 <a:latin typeface="Segoe UI"/>
               </a:rPr>
-              <a:t>Part 2 — Hands-On Build: RevOps, built &amp; running</a:t>
+              <a:t>Part 2: Hands-On Build</a:t>
             </a:r>
           </a:p>
           <a:p>
@@ -8242,7 +8242,7 @@
                 </a:solidFill>
                 <a:latin typeface="Segoe UI"/>
               </a:rPr>
-              <a:t>The paved path, made real: RBAC + masking · ADLS ingestion · dbt marts · CI/CD — all live in Snowflake.</a:t>
+              <a:t>RevOps, built and running. RBAC and masking, ADLS ingestion, dbt marts, and CI/CD, all live in Snowflake.</a:t>
             </a:r>
           </a:p>
         </p:txBody>
@@ -8406,7 +8406,7 @@
                 </a:solidFill>
                 <a:latin typeface="Segoe UI"/>
               </a:rPr>
-              <a:t>RevOps onboarded — the four deliverables, live</a:t>
+              <a:t>RevOps onboarded, the four deliverables, live</a:t>
             </a:r>
           </a:p>
         </p:txBody>
@@ -8490,7 +8490,7 @@
                 </a:solidFill>
                 <a:latin typeface="Segoe UI"/>
               </a:rPr>
-              <a:t>6 functional + per-schema access roles, per-developer composite roles, tag-based ARR/amount masking — Terraform, config-driven.</a:t>
+              <a:t>6 Functional + per-schema access roles, per-developer composite roles, tag-based ARR/amount masking, Terraform, config-driven.</a:t>
             </a:r>
           </a:p>
           <a:p>
@@ -8527,7 +8527,7 @@
                 </a:solidFill>
                 <a:latin typeface="Segoe UI"/>
               </a:rPr>
-              <a:t>ingest_page_views.py — ADLS → RAW with validate / quarantine / load-log / idempotency / backfill (the intentional null user_id is quarantined).</a:t>
+              <a:t>ingest_page_views.py, ADLS → RAW with validate / quarantine / load-log / idempotency / backfill (the intentional null user_id is quarantined).</a:t>
             </a:r>
           </a:p>
           <a:p>
@@ -8564,7 +8564,7 @@
                 </a:solidFill>
                 <a:latin typeface="Segoe UI"/>
               </a:rPr>
-              <a:t>incremental+deduped staging → RevOps pipeline mart; tests, clean_string macro, mesh public model — native dbt on Snowflake.</a:t>
+              <a:t>Incremental+deduped staging → RevOps pipeline mart; tests, clean_string macro, mesh public model, native dbt on Snowflake.</a:t>
             </a:r>
           </a:p>
           <a:p>
@@ -8601,7 +8601,7 @@
                 </a:solidFill>
                 <a:latin typeface="Segoe UI"/>
               </a:rPr>
-              <a:t>infra (Terraform, remote state) and dbt both deploy through GitHub Actions to DEV &amp; PROD — nothing applied by hand.</a:t>
+              <a:t>Infra (Terraform, remote state) and dbt both deploy through GitHub Actions to DEV &amp; PROD, nothing applied by hand.</a:t>
             </a:r>
           </a:p>
           <a:p>
@@ -8638,7 +8638,7 @@
                 </a:solidFill>
                 <a:latin typeface="Segoe UI"/>
               </a:rPr>
-              <a:t>OG_DEV_DB (dev sandboxes + preprod) and OG_PROD_DB — both seeded, governed, and built end-to-end.</a:t>
+              <a:t>OG_DEV_DB (dev sandboxes + preprod) and OG_PROD_DB, both seeded, governed, and built end-to-end.</a:t>
             </a:r>
           </a:p>
         </p:txBody>
@@ -8769,7 +8769,7 @@
                 </a:solidFill>
                 <a:latin typeface="Segoe UI"/>
               </a:rPr>
-              <a:t>Everything in Part 1's architecture is running in the demo account — provisioned and promoted entirely through code.</a:t>
+              <a:t>Everything in Part 1's architecture is running in the demo account, provisioned and promoted entirely through code.</a:t>
             </a:r>
           </a:p>
         </p:txBody>
@@ -8803,7 +8803,7 @@
                 </a:solidFill>
                 <a:latin typeface="Segoe UI"/>
               </a:rPr>
-              <a:t>OpenGov Data Platform  ·  Case Study — Viewpoint  ·  Akash Pahilwan</a:t>
+              <a:t>OpenGov Data Platform  ·  Case Study  ·  Akash Pahilwan</a:t>
             </a:r>
           </a:p>
         </p:txBody>
@@ -9002,7 +9002,7 @@
                 </a:solidFill>
                 <a:latin typeface="Segoe UI"/>
               </a:rPr>
-              <a:t>RBAC as built — who can touch each layer</a:t>
+              <a:t>RBAC as built, who can touch each layer</a:t>
             </a:r>
           </a:p>
         </p:txBody>
@@ -9467,7 +9467,7 @@
                 </a:solidFill>
                 <a:latin typeface="Segoe UI"/>
               </a:rPr>
-              <a:t>REVOPS_INGESTION_ADLS  (DML only — contract is deployer-owned)</a:t>
+              <a:t>REVOPS_INGESTION_ADLS  (DML only, contract is deployer-owned)</a:t>
             </a:r>
           </a:p>
         </p:txBody>
@@ -10057,7 +10057,7 @@
                 </a:solidFill>
                 <a:latin typeface="Segoe UI"/>
               </a:rPr>
-              <a:t>Access roles hold object grants; functional roles compose them; humans hold a composite/functional role — writes to shared+PROD happen only via the dbt CI service role.</a:t>
+              <a:t>Access roles hold object grants; functional roles compose them; humans hold a composite/functional role, writes to shared+PROD happen only via the dbt CI service role.</a:t>
             </a:r>
           </a:p>
         </p:txBody>
@@ -10091,7 +10091,7 @@
                 </a:solidFill>
                 <a:latin typeface="Segoe UI"/>
               </a:rPr>
-              <a:t>OpenGov Data Platform  ·  Case Study — Viewpoint  ·  Akash Pahilwan</a:t>
+              <a:t>OpenGov Data Platform  ·  Case Study  ·  Akash Pahilwan</a:t>
             </a:r>
           </a:p>
         </p:txBody>
@@ -10290,7 +10290,7 @@
                 </a:solidFill>
                 <a:latin typeface="Segoe UI"/>
               </a:rPr>
-              <a:t>ARR / amount masking — who sees what</a:t>
+              <a:t>ARR / amount masking, who sees what</a:t>
             </a:r>
           </a:p>
         </p:txBody>
@@ -10411,7 +10411,7 @@
                 </a:solidFill>
                 <a:latin typeface="Segoe UI"/>
               </a:rPr>
-              <a:t>REVOPS_ADMIN, REVOPS_DEVELOPER, REVOPS_ANALYST — NOT REVOPS_READER.</a:t>
+              <a:t>REVOPS_ADMIN, REVOPS_DEVELOPER, REVOPS_ANALYST, NOT REVOPS_READER.</a:t>
             </a:r>
           </a:p>
           <a:p>
@@ -10458,7 +10458,7 @@
                 </a:solidFill>
                 <a:latin typeface="Segoe UI"/>
               </a:rPr>
-              <a:t>        –  </a:t>
+              <a:t>        ·  </a:t>
             </a:r>
             <a:r>
               <a:rPr b="1" sz="1350">
@@ -10476,7 +10476,7 @@
                 </a:solidFill>
                 <a:latin typeface="Segoe UI"/>
               </a:rPr>
-              <a:t>— sees amount in the MART (exempt); financials are the point of their job.</a:t>
+              <a:t>Sees amount in the MART (exempt); financials are the point of their job.</a:t>
             </a:r>
           </a:p>
           <a:p>
@@ -10495,7 +10495,7 @@
                 </a:solidFill>
                 <a:latin typeface="Segoe UI"/>
               </a:rPr>
-              <a:t>        –  </a:t>
+              <a:t>        ·  </a:t>
             </a:r>
             <a:r>
               <a:rPr b="1" sz="1350">
@@ -10513,7 +10513,7 @@
                 </a:solidFill>
                 <a:latin typeface="Segoe UI"/>
               </a:rPr>
-              <a:t>— sees NULL in RAW/STAGING (readers aren't exempt).</a:t>
+              <a:t>Sees NULL in RAW/STAGING (readers aren't exempt).</a:t>
             </a:r>
           </a:p>
           <a:p>
@@ -10550,7 +10550,7 @@
                 </a:solidFill>
                 <a:latin typeface="Segoe UI"/>
               </a:rPr>
-              <a:t>the tag→policy binding is not a Terraform resource — every apply drops it, so apply_pii_tags.py re-binds it right after apply (automated in CI).</a:t>
+              <a:t>The tag→policy binding is not a Terraform resource, every apply drops it, so apply_pii_tags.py re-binds it right after apply (automated in CI).</a:t>
             </a:r>
           </a:p>
         </p:txBody>
@@ -10681,7 +10681,7 @@
                 </a:solidFill>
                 <a:latin typeface="Segoe UI"/>
               </a:rPr>
-              <a:t>Classify a column, not a table — masking scales to every domain through tags, and CI re-establishes the binding on every deploy.</a:t>
+              <a:t>Classify a column, not a table, masking scales to every domain through tags, and CI re-establishes the binding on every deploy.</a:t>
             </a:r>
           </a:p>
         </p:txBody>
@@ -10715,7 +10715,7 @@
                 </a:solidFill>
                 <a:latin typeface="Segoe UI"/>
               </a:rPr>
-              <a:t>OpenGov Data Platform  ·  Case Study — Viewpoint  ·  Akash Pahilwan</a:t>
+              <a:t>OpenGov Data Platform  ·  Case Study  ·  Akash Pahilwan</a:t>
             </a:r>
           </a:p>
         </p:txBody>
@@ -10914,7 +10914,7 @@
                 </a:solidFill>
                 <a:latin typeface="Segoe UI"/>
               </a:rPr>
-              <a:t>Telemetry ingestion — ADLS → RAW, built to the brief</a:t>
+              <a:t>Telemetry ingestion, ADLS → RAW, built to the brief</a:t>
             </a:r>
           </a:p>
         </p:txBody>
@@ -10998,7 +10998,7 @@
                 </a:solidFill>
                 <a:latin typeface="Segoe UI"/>
               </a:rPr>
-              <a:t>hourly JSON in ADLS (og-telemetry/&lt;env&gt;/product_events/page_views/dt=/hr=/) — read via a keyless external stage (storage integration, no secrets).</a:t>
+              <a:t>Hourly JSON in ADLS (og-telemetry/&lt;env&gt;/product_events/page_views/dt=/hr=/), read via a keyless external stage (storage integration, no secrets).</a:t>
             </a:r>
           </a:p>
           <a:p>
@@ -11035,7 +11035,7 @@
                 </a:solidFill>
                 <a:latin typeface="Segoe UI"/>
               </a:rPr>
-              <a:t>rows missing event_id / account_id / event_timestamp → PAGE_VIEWS_QUARANTINE; the good rows land in append-only RAW.</a:t>
+              <a:t>Rows missing event_id / account_id / event_timestamp → PAGE_VIEWS_QUARANTINE; the good rows land in append-only RAW.</a:t>
             </a:r>
           </a:p>
           <a:p>
@@ -11072,7 +11072,7 @@
                 </a:solidFill>
                 <a:latin typeface="Segoe UI"/>
               </a:rPr>
-              <a:t>one PAGE_VIEWS_LOAD_LOG row per file — file, records loaded, quarantined, timestamp — an audit trail that outlives COPY history.</a:t>
+              <a:t>One PAGE_VIEWS_LOAD_LOG row per file, file, records loaded, quarantined, timestamp, an audit trail that outlives COPY history.</a:t>
             </a:r>
           </a:p>
           <a:p>
@@ -11109,7 +11109,7 @@
                 </a:solidFill>
                 <a:latin typeface="Segoe UI"/>
               </a:rPr>
-              <a:t>per-file dedup on re-run; --path/--backfill for a folder or the full set; event_id dedup deferred to dbt staging.</a:t>
+              <a:t>Per-file dedup on re-run; --path/--backfill for a folder or the full set; event_id dedup deferred to dbt staging.</a:t>
             </a:r>
           </a:p>
           <a:p>
@@ -11277,7 +11277,7 @@
                 </a:solidFill>
                 <a:latin typeface="Segoe UI"/>
               </a:rPr>
-              <a:t>RAW is immutable truth: validate at the door, quarantine the bad, log every load — and make re-runs safe.</a:t>
+              <a:t>RAW is immutable truth: validate at the door, quarantine the bad, log every load, and make re-runs safe.</a:t>
             </a:r>
           </a:p>
         </p:txBody>
@@ -11311,7 +11311,7 @@
                 </a:solidFill>
                 <a:latin typeface="Segoe UI"/>
               </a:rPr>
-              <a:t>OpenGov Data Platform  ·  Case Study — Viewpoint  ·  Akash Pahilwan</a:t>
+              <a:t>OpenGov Data Platform  ·  Case Study  ·  Akash Pahilwan</a:t>
             </a:r>
           </a:p>
         </p:txBody>
@@ -11510,7 +11510,7 @@
                 </a:solidFill>
                 <a:latin typeface="Segoe UI"/>
               </a:rPr>
-              <a:t>dbt — staging → RevOps mart, native on Snowflake</a:t>
+              <a:t>dbt, staging → RevOps mart, native on Snowflake</a:t>
             </a:r>
           </a:p>
         </p:txBody>
@@ -11594,7 +11594,7 @@
                 </a:solidFill>
                 <a:latin typeface="Segoe UI"/>
               </a:rPr>
-              <a:t>typed + snake_case; CDC (_fivetran_synced / _loaded_at); latest-per-PK via QUALIFY; clean_string on stage_name; soft-deletes dropped.</a:t>
+              <a:t>Typed + snake_case; CDC (_fivetran_synced / _loaded_at); latest-per-PK via QUALIFY; clean_string on stage_name; soft-deletes dropped.</a:t>
             </a:r>
           </a:p>
           <a:p>
@@ -11622,7 +11622,7 @@
                 </a:solidFill>
                 <a:latin typeface="Segoe UI"/>
               </a:rPr>
-              <a:t>Mart — mart_revops__pipeline:   </a:t>
+              <a:t>Mart, mart_revops__pipeline:   </a:t>
             </a:r>
             <a:r>
               <a:rPr sz="1650">
@@ -11631,7 +11631,7 @@
                 </a:solidFill>
                 <a:latin typeface="Segoe UI"/>
               </a:rPr>
-              <a:t>opportunities × accounts + days_to_close, pipeline_stage_bucket, weighted_amount. Public mesh model a spoke consumes.</a:t>
+              <a:t>Opportunities × accounts + days_to_close, pipeline_stage_bucket, weighted_amount. Public mesh model a spoke consumes.</a:t>
             </a:r>
           </a:p>
           <a:p>
@@ -11668,7 +11668,7 @@
                 </a:solidFill>
                 <a:latin typeface="Segoe UI"/>
               </a:rPr>
-              <a:t>not_null + unique PKs, accepted_values on stage_name, relationships opp→account, sources.yml — all green.</a:t>
+              <a:t>not_null + unique PKs, accepted_values on stage_name, relationships opp→account, sources.yml, all green.</a:t>
             </a:r>
           </a:p>
           <a:p>
@@ -11705,7 +11705,7 @@
                 </a:solidFill>
                 <a:latin typeface="Segoe UI"/>
               </a:rPr>
-              <a:t>dev → your sandbox (schema__model) · preprod → OG_DEV_DB real schemas · prod → OG_PROD_DB (alias naming).</a:t>
+              <a:t>Dev → your sandbox (schema__model) · preprod → OG_DEV_DB real schemas · prod → OG_PROD_DB (alias naming).</a:t>
             </a:r>
           </a:p>
           <a:p>
@@ -11742,7 +11742,7 @@
                 </a:solidFill>
                 <a:latin typeface="Segoe UI"/>
               </a:rPr>
-              <a:t>an apply_column_tags post-hook carries the PII_FINANCIAL tag onto built columns in preprod/prod.</a:t>
+              <a:t>An apply_column_tags post-hook carries the PII_FINANCIAL tag onto built columns in preprod/prod.</a:t>
             </a:r>
           </a:p>
         </p:txBody>
@@ -11873,7 +11873,7 @@
                 </a:solidFill>
                 <a:latin typeface="Segoe UI"/>
               </a:rPr>
-              <a:t>One project, layered + contracted — incremental where volume demands it, mesh-public where consumers depend on it.</a:t>
+              <a:t>One project, layered + contracted, incremental where volume demands it, mesh-public where consumers depend on it.</a:t>
             </a:r>
           </a:p>
         </p:txBody>
@@ -11907,7 +11907,7 @@
                 </a:solidFill>
                 <a:latin typeface="Segoe UI"/>
               </a:rPr>
-              <a:t>OpenGov Data Platform  ·  Case Study — Viewpoint  ·  Akash Pahilwan</a:t>
+              <a:t>OpenGov Data Platform  ·  Case Study  ·  Akash Pahilwan</a:t>
             </a:r>
           </a:p>
         </p:txBody>
@@ -12106,7 +12106,7 @@
                 </a:solidFill>
                 <a:latin typeface="Segoe UI"/>
               </a:rPr>
-              <a:t>CI/CD — how code becomes DEV, QA &amp; PROD</a:t>
+              <a:t>CI/CD, how code becomes DEV, QA &amp; PROD</a:t>
             </a:r>
           </a:p>
         </p:txBody>
@@ -12895,7 +12895,7 @@
                 </a:solidFill>
                 <a:latin typeface="Segoe UI"/>
               </a:rPr>
-              <a:t>per-developer sandboxes in OG_DEV_DB — build &amp; iterate freely</a:t>
+              <a:t>per-developer sandboxes in OG_DEV_DB; build and iterate freely</a:t>
             </a:r>
           </a:p>
           <a:p>
@@ -12920,7 +12920,7 @@
                 </a:solidFill>
                 <a:latin typeface="Segoe UI"/>
               </a:rPr>
-              <a:t>real STAGING/MARTS in OG_DEV_DB — integration build on merge to dev</a:t>
+              <a:t>real STAGING/MARTS in OG_DEV_DB; integration build on merge to dev</a:t>
             </a:r>
           </a:p>
           <a:p>
@@ -12945,7 +12945,7 @@
                 </a:solidFill>
                 <a:latin typeface="Segoe UI"/>
               </a:rPr>
-              <a:t>OG_PROD_DB — build on merge to main; protected environment + approval</a:t>
+              <a:t>OG_PROD_DB; built on merge to main, protected environment + approval</a:t>
             </a:r>
           </a:p>
         </p:txBody>
@@ -12979,7 +12979,7 @@
                 </a:solidFill>
                 <a:latin typeface="Segoe UI"/>
               </a:rPr>
-              <a:t>OpenGov Data Platform  ·  Case Study — Viewpoint  ·  Akash Pahilwan</a:t>
+              <a:t>OpenGov Data Platform  ·  Case Study  ·  Akash Pahilwan</a:t>
             </a:r>
           </a:p>
         </p:txBody>
@@ -13178,7 +13178,7 @@
                 </a:solidFill>
                 <a:latin typeface="Segoe UI"/>
               </a:rPr>
-              <a:t>The platform is a product — I build the factory</a:t>
+              <a:t>The platform is a product, I build the factory</a:t>
             </a:r>
           </a:p>
         </p:txBody>
@@ -13262,7 +13262,7 @@
                 </a:solidFill>
                 <a:latin typeface="Segoe UI"/>
               </a:rPr>
-              <a:t>one governed foundation powering analytics and AI across GTM, Finance, Product, and HR/People.</a:t>
+              <a:t>One governed foundation powering analytics and AI across GTM, Finance, Product, and HR/People.</a:t>
             </a:r>
           </a:p>
           <a:p>
@@ -13299,7 +13299,7 @@
                 </a:solidFill>
                 <a:latin typeface="Segoe UI"/>
               </a:rPr>
-              <a:t>domain teams build on a paved path with guardrails — self-service, not a ticket queue.</a:t>
+              <a:t>Domain teams build on a paved path with guardrails, self-service, not a ticket queue.</a:t>
             </a:r>
           </a:p>
           <a:p>
@@ -13346,7 +13346,7 @@
                 </a:solidFill>
                 <a:latin typeface="Segoe UI"/>
               </a:rPr>
-              <a:t>        –  </a:t>
+              <a:t>        ·  </a:t>
             </a:r>
             <a:r>
               <a:rPr b="1" sz="1600">
@@ -13364,7 +13364,7 @@
                 </a:solidFill>
                 <a:latin typeface="Segoe UI"/>
               </a:rPr>
-              <a:t>— RBAC, masking, and lineage are built in, not bolted on.</a:t>
+              <a:t>RBAC, masking, and lineage are built in, not bolted on.</a:t>
             </a:r>
           </a:p>
           <a:p>
@@ -13383,7 +13383,7 @@
                 </a:solidFill>
                 <a:latin typeface="Segoe UI"/>
               </a:rPr>
-              <a:t>        –  </a:t>
+              <a:t>        ·  </a:t>
             </a:r>
             <a:r>
               <a:rPr b="1" sz="1600">
@@ -13401,7 +13401,7 @@
                 </a:solidFill>
                 <a:latin typeface="Segoe UI"/>
               </a:rPr>
-              <a:t>— golden templates + IaC modules; onboard a domain in a PR.</a:t>
+              <a:t>Golden templates + IaC modules; onboard a domain in a PR.</a:t>
             </a:r>
           </a:p>
           <a:p>
@@ -13420,7 +13420,7 @@
                 </a:solidFill>
                 <a:latin typeface="Segoe UI"/>
               </a:rPr>
-              <a:t>        –  </a:t>
+              <a:t>        ·  </a:t>
             </a:r>
             <a:r>
               <a:rPr b="1" sz="1600">
@@ -13438,7 +13438,7 @@
                 </a:solidFill>
                 <a:latin typeface="Segoe UI"/>
               </a:rPr>
-              <a:t>— freshness, quality, and cost measured from day one.</a:t>
+              <a:t>Freshness, quality, and cost measured from day one.</a:t>
             </a:r>
           </a:p>
           <a:p>
@@ -13457,7 +13457,7 @@
                 </a:solidFill>
                 <a:latin typeface="Segoe UI"/>
               </a:rPr>
-              <a:t>        –  </a:t>
+              <a:t>        ·  </a:t>
             </a:r>
             <a:r>
               <a:rPr b="1" sz="1600">
@@ -13475,7 +13475,7 @@
                 </a:solidFill>
                 <a:latin typeface="Segoe UI"/>
               </a:rPr>
-              <a:t>— everything is code, tested in CI, rebuildable in any environment.</a:t>
+              <a:t>Everything is code, tested in CI, rebuildable in any environment.</a:t>
             </a:r>
           </a:p>
         </p:txBody>
@@ -13606,7 +13606,7 @@
                 </a:solidFill>
                 <a:latin typeface="Segoe UI"/>
               </a:rPr>
-              <a:t>Trust and speed are not a trade-off — the right guardrails deliver both.</a:t>
+              <a:t>Trust and speed are not a trade-off, the right guardrails deliver both.</a:t>
             </a:r>
           </a:p>
         </p:txBody>
@@ -13640,7 +13640,7 @@
                 </a:solidFill>
                 <a:latin typeface="Segoe UI"/>
               </a:rPr>
-              <a:t>OpenGov Data Platform  ·  Case Study — Viewpoint  ·  Akash Pahilwan</a:t>
+              <a:t>OpenGov Data Platform  ·  Case Study  ·  Akash Pahilwan</a:t>
             </a:r>
           </a:p>
         </p:txBody>
@@ -13960,7 +13960,7 @@
                 </a:solidFill>
                 <a:latin typeface="Segoe UI"/>
               </a:rPr>
-              <a:t>it's their default role and secondary roles are OFF — every session is exactly one role, so masking checks are unambiguous.</a:t>
+              <a:t>It's their default role and secondary roles are OFF, every session is exactly one role, so masking checks are unambiguous.</a:t>
             </a:r>
           </a:p>
           <a:p>
@@ -13997,7 +13997,7 @@
                 </a:solidFill>
                 <a:latin typeface="Segoe UI"/>
               </a:rPr>
-              <a:t>separate sandboxes, &lt;schema&gt;__&lt;model&gt; naming; can't touch shared STAGING/MARTS or anything in PROD.</a:t>
+              <a:t>Separate sandboxes, &lt;schema&gt;__&lt;model&gt; naming; can't touch shared STAGING/MARTS or anything in PROD.</a:t>
             </a:r>
           </a:p>
           <a:p>
@@ -14071,7 +14071,7 @@
                 </a:solidFill>
                 <a:latin typeface="Segoe UI"/>
               </a:rPr>
-              <a:t>add to environments.csv developers + human_users.csv → composite role + sandbox generated by Terraform in a PR.</a:t>
+              <a:t>Add to environments.csv developers + human_users.csv → composite role + sandbox generated by Terraform in a PR.</a:t>
             </a:r>
           </a:p>
         </p:txBody>
@@ -14236,7 +14236,7 @@
                 </a:solidFill>
                 <a:latin typeface="Segoe UI"/>
               </a:rPr>
-              <a:t>OpenGov Data Platform  ·  Case Study — Viewpoint  ·  Akash Pahilwan</a:t>
+              <a:t>OpenGov Data Platform  ·  Case Study  ·  Akash Pahilwan</a:t>
             </a:r>
           </a:p>
         </p:txBody>
@@ -14519,7 +14519,7 @@
                 </a:solidFill>
                 <a:latin typeface="Segoe UI"/>
               </a:rPr>
-              <a:t>one IaC-first, governed platform — and it's running, not just drawn.</a:t>
+              <a:t>One IaC-first, governed platform, and it's running, not just drawn.</a:t>
             </a:r>
           </a:p>
           <a:p>
@@ -14593,7 +14593,7 @@
                 </a:solidFill>
                 <a:latin typeface="Segoe UI"/>
               </a:rPr>
-              <a:t>config-driven RBAC + tag masking, per-developer sandboxes, CI/CD to DEV &amp; PROD.</a:t>
+              <a:t>Config-driven RBAC + tag masking, per-developer sandboxes, CI/CD to DEV &amp; PROD.</a:t>
             </a:r>
           </a:p>
           <a:p>
@@ -14630,7 +14630,7 @@
                 </a:solidFill>
                 <a:latin typeface="Segoe UI"/>
               </a:rPr>
-              <a:t>buy vs build · incremental vs full-refresh · centralized vs federated (dbt Mesh) · key-pair/OIDC secrets.</a:t>
+              <a:t>Buy vs build · incremental vs full-refresh · centralized vs federated (dbt Mesh) · key-pair/OIDC secrets.</a:t>
             </a:r>
           </a:p>
           <a:p>
@@ -14667,7 +14667,7 @@
                 </a:solidFill>
                 <a:latin typeface="Segoe UI"/>
               </a:rPr>
-              <a:t>a 10th domain is the same CSV rows + module — roles, masking, and CI all generated.</a:t>
+              <a:t>A 10th domain is the same CSV rows + module, roles, masking, and CI all generated.</a:t>
             </a:r>
           </a:p>
         </p:txBody>
@@ -14798,7 +14798,7 @@
                 </a:solidFill>
                 <a:latin typeface="Segoe UI"/>
               </a:rPr>
-              <a:t>The measure of the platform: how fast a federated team ships something trustworthy on top of it — safely, and on their own.</a:t>
+              <a:t>The measure of the platform: how fast a federated team ships something trustworthy on top of it, safely, and on their own.</a:t>
             </a:r>
           </a:p>
         </p:txBody>
@@ -14832,7 +14832,7 @@
                 </a:solidFill>
                 <a:latin typeface="Segoe UI"/>
               </a:rPr>
-              <a:t>OpenGov Data Platform  ·  Case Study — Viewpoint  ·  Akash Pahilwan</a:t>
+              <a:t>OpenGov Data Platform  ·  Case Study  ·  Akash Pahilwan</a:t>
             </a:r>
           </a:p>
         </p:txBody>
@@ -15011,7 +15011,7 @@
                 </a:solidFill>
                 <a:latin typeface="Segoe UI"/>
               </a:rPr>
-              <a:t>Deep dives for the panel's probes — pull these up on demand.</a:t>
+              <a:t>Deep dives for the panel's probes. Pull these up on demand.</a:t>
             </a:r>
           </a:p>
         </p:txBody>
@@ -15175,7 +15175,7 @@
                 </a:solidFill>
                 <a:latin typeface="Segoe UI"/>
               </a:rPr>
-              <a:t>Scaling RBAC to 10 domains — least privilege by construction</a:t>
+              <a:t>Scaling RBAC to 10 domains, least privilege by construction</a:t>
             </a:r>
           </a:p>
         </p:txBody>
@@ -15296,7 +15296,7 @@
                 </a:solidFill>
                 <a:latin typeface="Segoe UI"/>
               </a:rPr>
-              <a:t>REVOPS_ANALYST reads MARTS_* (all marts); FINANCE_ANALYST reads MARTS_FINANCE ONLY — an exact-schema grant, not the wildcard.</a:t>
+              <a:t>REVOPS_ANALYST reads MARTS_* (all marts); FINANCE_ANALYST reads MARTS_FINANCE ONLY, an exact-schema grant, not the wildcard.</a:t>
             </a:r>
           </a:p>
           <a:p>
@@ -15370,7 +15370,7 @@
                 </a:solidFill>
                 <a:latin typeface="Segoe UI"/>
               </a:rPr>
-              <a:t>REVOPS_DEVELOPER (write, incl PROD) is service-only — sync_config.py rejects granting it to a human; humans get read + their own sandbox.</a:t>
+              <a:t>REVOPS_DEVELOPER (write, incl PROD) is service-only, sync_config.py rejects granting it to a human; humans get read + their own sandbox.</a:t>
             </a:r>
           </a:p>
           <a:p>
@@ -15538,7 +15538,7 @@
                 </a:solidFill>
                 <a:latin typeface="Segoe UI"/>
               </a:rPr>
-              <a:t>Least privilege scales because it's generated from config — each domain analyst is confined to that domain's marts by an exact grant.</a:t>
+              <a:t>Least privilege scales because it's generated from config, each domain analyst is confined to that domain's marts by an exact grant.</a:t>
             </a:r>
           </a:p>
         </p:txBody>
@@ -15572,7 +15572,7 @@
                 </a:solidFill>
                 <a:latin typeface="Segoe UI"/>
               </a:rPr>
-              <a:t>OpenGov Data Platform  ·  Case Study — Viewpoint  ·  Akash Pahilwan</a:t>
+              <a:t>OpenGov Data Platform  ·  Case Study  ·  Akash Pahilwan</a:t>
             </a:r>
           </a:p>
         </p:txBody>
@@ -15771,7 +15771,7 @@
                 </a:solidFill>
                 <a:latin typeface="Segoe UI"/>
               </a:rPr>
-              <a:t>Incremental vs full-refresh — and fixing incrementals</a:t>
+              <a:t>Incremental vs full-refresh, and fixing incrementals</a:t>
             </a:r>
           </a:p>
         </p:txBody>
@@ -15855,7 +15855,7 @@
                 </a:solidFill>
                 <a:latin typeface="Segoe UI"/>
               </a:rPr>
-              <a:t>high-volume/append sources (telemetry, CDC tables) — build only rows since the last watermark; cheap, fast.</a:t>
+              <a:t>High-volume/append sources (telemetry, CDC tables), build only rows since the last watermark; cheap, fast.</a:t>
             </a:r>
           </a:p>
           <a:p>
@@ -15892,7 +15892,7 @@
                 </a:solidFill>
                 <a:latin typeface="Segoe UI"/>
               </a:rPr>
-              <a:t>small dimensions, or after a logic change — rebuild from scratch.</a:t>
+              <a:t>Small dimensions, or after a logic change, rebuild from scratch.</a:t>
             </a:r>
           </a:p>
           <a:p>
@@ -15929,7 +15929,7 @@
                 </a:solidFill>
                 <a:latin typeface="Segoe UI"/>
               </a:rPr>
-              <a:t>a normal build only merges NEW rows, so a logic fix to an incremental model never re-cleans already-materialized rows.</a:t>
+              <a:t>A normal build only merges NEW rows, so a logic fix to an incremental model never re-cleans already-materialized rows.</a:t>
             </a:r>
           </a:p>
           <a:p>
@@ -15966,7 +15966,7 @@
                 </a:solidFill>
                 <a:latin typeface="Segoe UI"/>
               </a:rPr>
-              <a:t>a manual full-refresh workflow — branch (dev→preprod / main→prod) × scope (all | only models changed in the last commit).</a:t>
+              <a:t>A manual full-refresh workflow, branch (dev→preprod / main→prod) × scope (all | only models changed in the last commit).</a:t>
             </a:r>
           </a:p>
           <a:p>
@@ -16003,7 +16003,7 @@
                 </a:solidFill>
                 <a:latin typeface="Segoe UI"/>
               </a:rPr>
-              <a:t>the page_views user_id VARIANT-null fix needed a full-refresh to purge 2 historical bad rows from PROD.</a:t>
+              <a:t>The page_views user_id VARIANT-null fix needed a full-refresh to purge 2 historical bad rows from PROD.</a:t>
             </a:r>
           </a:p>
         </p:txBody>
@@ -16134,7 +16134,7 @@
                 </a:solidFill>
                 <a:latin typeface="Segoe UI"/>
               </a:rPr>
-              <a:t>Pick incremental for volume, full-refresh for correctness — and make the full-refresh a one-click, scoped workflow.</a:t>
+              <a:t>Pick incremental for volume, full-refresh for correctness, and make the full-refresh a one-click, scoped workflow.</a:t>
             </a:r>
           </a:p>
         </p:txBody>
@@ -16168,7 +16168,7 @@
                 </a:solidFill>
                 <a:latin typeface="Segoe UI"/>
               </a:rPr>
-              <a:t>OpenGov Data Platform  ·  Case Study — Viewpoint  ·  Akash Pahilwan</a:t>
+              <a:t>OpenGov Data Platform  ·  Case Study  ·  Akash Pahilwan</a:t>
             </a:r>
           </a:p>
         </p:txBody>
@@ -16451,7 +16451,7 @@
                 </a:solidFill>
                 <a:latin typeface="Segoe UI"/>
               </a:rPr>
-              <a:t>key-pair (JWT) for Snowflake, storage key for the TF backend — all GitHub secrets; the private key touches only a temp file in the job.</a:t>
+              <a:t>Key-pair (JWT) for Snowflake, storage key for the TF backend, all GitHub secrets; the private key touches only a temp file in the job.</a:t>
             </a:r>
           </a:p>
           <a:p>
@@ -16488,7 +16488,7 @@
                 </a:solidFill>
                 <a:latin typeface="Segoe UI"/>
               </a:rPr>
-              <a:t>secrets are exposed only to post-merge apply jobs; PR-triggered plan never sees them; PROD gated by a protected Environment + approval.</a:t>
+              <a:t>Secrets are exposed only to post-merge apply jobs; PR-triggered plan never sees them; PROD gated by a protected Environment + approval.</a:t>
             </a:r>
           </a:p>
           <a:p>
@@ -16525,7 +16525,7 @@
                 </a:solidFill>
                 <a:latin typeface="Segoe UI"/>
               </a:rPr>
-              <a:t>Terraform state in an azurerm backend (ADLS), so CI and local share one source of truth — no drift, no local state to lose.</a:t>
+              <a:t>Terraform state in an azurerm backend (ADLS), so CI and local share one source of truth, no drift, no local state to lose.</a:t>
             </a:r>
           </a:p>
           <a:p>
@@ -16599,7 +16599,7 @@
                 </a:solidFill>
                 <a:latin typeface="Segoe UI"/>
               </a:rPr>
-              <a:t>sync_config.py validates every reference (unknown role/schema/env) and rejects a service-only role reaching a human — the linter is the reviewer.</a:t>
+              <a:t>sync_config.py validates every reference (unknown role/schema/env) and rejects a service-only role reaching a human, the linter is the reviewer.</a:t>
             </a:r>
           </a:p>
         </p:txBody>
@@ -16730,7 +16730,7 @@
                 </a:solidFill>
                 <a:latin typeface="Segoe UI"/>
               </a:rPr>
-              <a:t>The pipeline is the control plane: reviewed, idempotent, secret-safe, and standards-enforcing — provisioning you can trust.</a:t>
+              <a:t>The pipeline is the control plane: reviewed, idempotent, secret-safe, and standards-enforcing, provisioning you can trust.</a:t>
             </a:r>
           </a:p>
         </p:txBody>
@@ -16764,7 +16764,7 @@
                 </a:solidFill>
                 <a:latin typeface="Segoe UI"/>
               </a:rPr>
-              <a:t>OpenGov Data Platform  ·  Case Study — Viewpoint  ·  Akash Pahilwan</a:t>
+              <a:t>OpenGov Data Platform  ·  Case Study  ·  Akash Pahilwan</a:t>
             </a:r>
           </a:p>
         </p:txBody>
@@ -17047,7 +17047,7 @@
                 </a:solidFill>
                 <a:latin typeface="Segoe UI"/>
               </a:rPr>
-              <a:t>each micro-partition shreds consistent JSON paths into typed, compressed sub-columns with min/max stats — native-column treatment.</a:t>
+              <a:t>Each micro-partition shreds consistent JSON paths into typed, compressed sub-columns with min/max stats, native-column treatment.</a:t>
             </a:r>
           </a:p>
           <a:p>
@@ -17084,7 +17084,7 @@
                 </a:solidFill>
                 <a:latin typeface="Segoe UI"/>
               </a:rPr>
-              <a:t>selecting payload:properties.duration_ms reads only that sub-column off disk — never the whole document.</a:t>
+              <a:t>Selecting payload:properties.duration_ms reads only that sub-column off disk, never the whole document.</a:t>
             </a:r>
           </a:p>
           <a:p>
@@ -17121,7 +17121,7 @@
                 </a:solidFill>
                 <a:latin typeface="Segoe UI"/>
               </a:rPr>
-              <a:t>filters on extracted paths skip whole micro-partitions via metadata — scan cost tracks the answer, not the table.</a:t>
+              <a:t>Filters on extracted paths skip whole micro-partitions via metadata, scan cost tracks the answer, not the table.</a:t>
             </a:r>
           </a:p>
           <a:p>
@@ -17158,7 +17158,7 @@
                 </a:solidFill>
                 <a:latin typeface="Segoe UI"/>
               </a:rPr>
-              <a:t>wildly heterogeneous keys defeat sub-columnarization — promote hot filter / dedup keys to real columns (event_id).</a:t>
+              <a:t>Wildly heterogeneous keys defeat sub-columnarization, promote hot filter / dedup keys to real columns (event_id).</a:t>
             </a:r>
           </a:p>
           <a:p>
@@ -17278,7 +17278,7 @@
                 </a:solidFill>
                 <a:latin typeface="Consolas"/>
               </a:rPr>
-              <a:t>VARIANT internals — sketch</a:t>
+              <a:t>VARIANT internals (sketch)</a:t>
             </a:r>
           </a:p>
           <a:p>
@@ -17733,7 +17733,7 @@
                 </a:solidFill>
                 <a:latin typeface="Segoe UI"/>
               </a:rPr>
-              <a:t>Schema-on-read is nearly free at query time — consistent paths are columnarized on write; type once in staging, downstream never parses JSON.</a:t>
+              <a:t>Schema-on-read is nearly free at query time, consistent paths are columnarized on write; type once in staging, downstream never parses JSON.</a:t>
             </a:r>
           </a:p>
         </p:txBody>
@@ -17767,7 +17767,7 @@
                 </a:solidFill>
                 <a:latin typeface="Segoe UI"/>
               </a:rPr>
-              <a:t>OpenGov Data Platform  ·  Case Study — Viewpoint  ·  Akash Pahilwan</a:t>
+              <a:t>OpenGov Data Platform  ·  Case Study  ·  Akash Pahilwan</a:t>
             </a:r>
           </a:p>
         </p:txBody>
@@ -17966,7 +17966,7 @@
                 </a:solidFill>
                 <a:latin typeface="Segoe UI"/>
               </a:rPr>
-              <a:t>ADLS layout &amp; hourly loads — append-only RAW</a:t>
+              <a:t>ADLS layout &amp; hourly loads, append-only RAW</a:t>
             </a:r>
           </a:p>
         </p:txBody>
@@ -18050,7 +18050,7 @@
                 </a:solidFill>
                 <a:latin typeface="Segoe UI"/>
               </a:rPr>
-              <a:t>source/object/dt=YYYY-MM-DD/hr=HH/ — hourly runs list one narrow prefix; backfill = re-point at a date range; lifecycle rules attach per prefix.</a:t>
+              <a:t>Source/object/dt=YYYY-MM-DD/hr=HH/, hourly runs list one narrow prefix; backfill = re-point at a date range; lifecycle rules attach per prefix.</a:t>
             </a:r>
           </a:p>
           <a:p>
@@ -18087,7 +18087,7 @@
                 </a:solidFill>
                 <a:latin typeface="Segoe UI"/>
               </a:rPr>
-              <a:t>RAW is an immutable log, not a mirror — 'latest' applies to which files we read this run, not to what we keep.</a:t>
+              <a:t>RAW is an immutable log, not a mirror, 'latest' applies to which files we read this run, not to what we keep.</a:t>
             </a:r>
           </a:p>
           <a:p>
@@ -18161,7 +18161,7 @@
                 </a:solidFill>
                 <a:latin typeface="Segoe UI"/>
               </a:rPr>
-              <a:t>COPY FORCE=TRUE into a fresh table, then ALTER TABLE SWAP — rebuild history, never edit it.</a:t>
+              <a:t>COPY FORCE=TRUE into a fresh table, then ALTER TABLE SWAP, rebuild history, never edit it.</a:t>
             </a:r>
           </a:p>
           <a:p>
@@ -18198,7 +18198,7 @@
                 </a:solidFill>
                 <a:latin typeface="Segoe UI"/>
               </a:rPr>
-              <a:t>scheduled Python + COPY keeps validation / quarantine / _LOAD_LOG in code; production evolution: Snowpipe auto-ingest per S3 event, no scheduler.</a:t>
+              <a:t>Scheduled Python + COPY keeps validation / quarantine / _LOAD_LOG in code; production evolution: Snowpipe auto-ingest per S3 event, no scheduler.</a:t>
             </a:r>
           </a:p>
         </p:txBody>
@@ -18698,7 +18698,7 @@
                 </a:solidFill>
                 <a:latin typeface="Segoe UI"/>
               </a:rPr>
-              <a:t>Copy only the latest files, keep every row — append-only RAW plus three idempotency layers makes any re-run or backfill safe.</a:t>
+              <a:t>Copy only the latest files, keep every row, append-only RAW plus three idempotency layers makes any re-run or backfill safe.</a:t>
             </a:r>
           </a:p>
         </p:txBody>
@@ -18732,7 +18732,7 @@
                 </a:solidFill>
                 <a:latin typeface="Segoe UI"/>
               </a:rPr>
-              <a:t>OpenGov Data Platform  ·  Case Study — Viewpoint  ·  Akash Pahilwan</a:t>
+              <a:t>OpenGov Data Platform  ·  Case Study  ·  Akash Pahilwan</a:t>
             </a:r>
           </a:p>
         </p:txBody>
@@ -18931,7 +18931,7 @@
                 </a:solidFill>
                 <a:latin typeface="Segoe UI"/>
               </a:rPr>
-              <a:t>COPY INTO — load logs &amp; the 64-day horizon</a:t>
+              <a:t>COPY INTO, load logs &amp; the 64-day horizon</a:t>
             </a:r>
           </a:p>
         </p:txBody>
@@ -19015,7 +19015,7 @@
                 </a:solidFill>
                 <a:latin typeface="Segoe UI"/>
               </a:rPr>
-              <a:t>rows_parsed / rows_loaded / errors per file — the Python job persists it to _LOAD_LOG; ours never expires.</a:t>
+              <a:t>rows_parsed / rows_loaded / errors per file, the Python job persists it to _LOAD_LOG; ours never expires.</a:t>
             </a:r>
           </a:p>
           <a:p>
@@ -19089,7 +19089,7 @@
                 </a:solidFill>
                 <a:latin typeface="Segoe UI"/>
               </a:rPr>
-              <a:t>the internal metadata COPY uses to skip already-loaded files expires after 64 days — separate from the audit views.</a:t>
+              <a:t>The internal metadata COPY uses to skip already-loaded files expires after 64 days, separate from the audit views.</a:t>
             </a:r>
           </a:p>
           <a:p>
@@ -19126,7 +19126,7 @@
                 </a:solidFill>
                 <a:latin typeface="Segoe UI"/>
               </a:rPr>
-              <a:t>unknown-status files are skipped — a silent gap, not duplicates; backfill via LOAD_UNCERTAIN_FILES=TRUE or FORCE + SWAP.</a:t>
+              <a:t>Unknown-status files are skipped, a silent gap, not duplicates; backfill via LOAD_UNCERTAIN_FILES=TRUE or FORCE + SWAP.</a:t>
             </a:r>
           </a:p>
           <a:p>
@@ -19749,7 +19749,7 @@
                 </a:solidFill>
                 <a:latin typeface="Segoe UI"/>
               </a:rPr>
-              <a:t>Snowflake logs every COPY (14-day / 365-day views) and returns a per-file summary — persisting it in _LOAD_LOG gives an audit trail that outlives every retention window.</a:t>
+              <a:t>Snowflake logs every COPY (14-day / 365-day views) and returns a per-file summary, persisting it in _LOAD_LOG gives an audit trail that outlives every retention window.</a:t>
             </a:r>
           </a:p>
         </p:txBody>
@@ -19783,7 +19783,7 @@
                 </a:solidFill>
                 <a:latin typeface="Segoe UI"/>
               </a:rPr>
-              <a:t>OpenGov Data Platform  ·  Case Study — Viewpoint  ·  Akash Pahilwan</a:t>
+              <a:t>OpenGov Data Platform  ·  Case Study  ·  Akash Pahilwan</a:t>
             </a:r>
           </a:p>
         </p:txBody>
@@ -20584,7 +20584,7 @@
                 </a:solidFill>
                 <a:latin typeface="Segoe UI"/>
               </a:rPr>
-              <a:t>RAW  — source-system schemas</a:t>
+              <a:t>RAW: source-system schemas</a:t>
             </a:r>
           </a:p>
         </p:txBody>
@@ -20637,7 +20637,7 @@
                 </a:solidFill>
                 <a:latin typeface="Segoe UI"/>
               </a:rPr>
-              <a:t>STAGING — cleaned / conformed</a:t>
+              <a:t>STAGING: cleaned / conformed</a:t>
             </a:r>
           </a:p>
         </p:txBody>
@@ -20690,7 +20690,7 @@
                 </a:solidFill>
                 <a:latin typeface="Segoe UI"/>
               </a:rPr>
-              <a:t>MARTS — domain, business-ready</a:t>
+              <a:t>MARTS: domain, business-ready</a:t>
             </a:r>
           </a:p>
         </p:txBody>
@@ -20743,7 +20743,7 @@
                 </a:solidFill>
                 <a:latin typeface="Segoe UI"/>
               </a:rPr>
-              <a:t>SANDBOX — analyst scratch</a:t>
+              <a:t>SANDBOX: analyst scratch</a:t>
             </a:r>
           </a:p>
         </p:txBody>
@@ -21191,7 +21191,7 @@
                 </a:solidFill>
                 <a:latin typeface="Segoe UI"/>
               </a:rPr>
-              <a:t>OpenGov Data Platform  ·  Case Study — Viewpoint  ·  Akash Pahilwan</a:t>
+              <a:t>OpenGov Data Platform  ·  Case Study  ·  Akash Pahilwan</a:t>
             </a:r>
           </a:p>
         </p:txBody>
@@ -22082,7 +22082,7 @@
                 </a:solidFill>
                 <a:latin typeface="Segoe UI"/>
               </a:rPr>
-              <a:t>OpenGov Data Platform  ·  Case Study — Viewpoint  ·  Akash Pahilwan</a:t>
+              <a:t>OpenGov Data Platform  ·  Case Study  ·  Akash Pahilwan</a:t>
             </a:r>
           </a:p>
         </p:txBody>
@@ -22365,7 +22365,7 @@
                 </a:solidFill>
                 <a:latin typeface="Segoe UI"/>
               </a:rPr>
-              <a:t>the upstream source shape is uncontrolled; our deployed objects change only through reviewed PRs.</a:t>
+              <a:t>The upstream source shape is uncontrolled; our deployed objects change only through reviewed PRs.</a:t>
             </a:r>
           </a:p>
           <a:p>
@@ -22393,7 +22393,7 @@
                 </a:solidFill>
                 <a:latin typeface="Segoe UI"/>
               </a:rPr>
-              <a:t>Custom path — schema-on-read:   </a:t>
+              <a:t>Custom path, schema-on-read:   </a:t>
             </a:r>
             <a:r>
               <a:rPr sz="1650">
@@ -22402,7 +22402,7 @@
                 </a:solidFill>
                 <a:latin typeface="Segoe UI"/>
               </a:rPr>
-              <a:t>RAW lands each record as a VARIANT; a new source field needs zero DDL, zero deploy — typed at read time in dbt.</a:t>
+              <a:t>RAW lands each record as a VARIANT; a new source field needs zero DDL, zero deploy, typed at read time in dbt.</a:t>
             </a:r>
           </a:p>
           <a:p>
@@ -22439,7 +22439,7 @@
                 </a:solidFill>
                 <a:latin typeface="Segoe UI"/>
               </a:rPr>
-              <a:t>compare the payload to a registered contract — additive → log + surface; breaking → alert + quarantine. CI/CD never mutates a live table from drift.</a:t>
+              <a:t>Compare the payload to a registered contract, additive → log + surface; breaking → alert + quarantine. CI/CD never mutates a live table from drift.</a:t>
             </a:r>
           </a:p>
           <a:p>
@@ -22476,7 +22476,7 @@
                 </a:solidFill>
                 <a:latin typeface="Segoe UI"/>
               </a:rPr>
-              <a:t>expose it by adding one typed column in dbt; CI runs contracts + tests; review + merge deploys it.</a:t>
+              <a:t>Expose it by adding one typed column in dbt; CI runs contracts + tests; review + merge deploys it.</a:t>
             </a:r>
           </a:p>
           <a:p>
@@ -22504,7 +22504,7 @@
                 </a:solidFill>
                 <a:latin typeface="Segoe UI"/>
               </a:rPr>
-              <a:t>Fivetran — schema-on-write:   </a:t>
+              <a:t>Fivetran, schema-on-write:   </a:t>
             </a:r>
             <a:r>
               <a:rPr sz="1650">
@@ -22513,7 +22513,7 @@
                 </a:solidFill>
                 <a:latin typeface="Segoe UI"/>
               </a:rPr>
-              <a:t>it types columns and ALTERs its own RAW tables on drift; the dbt source contract + tests are our CI tripwire one layer down.</a:t>
+              <a:t>It types columns and ALTERs its own RAW tables on drift; the dbt source contract + tests are our CI tripwire one layer down.</a:t>
             </a:r>
           </a:p>
         </p:txBody>
@@ -23068,7 +23068,7 @@
                 </a:solidFill>
                 <a:latin typeface="Segoe UI"/>
               </a:rPr>
-              <a:t>Upstream drift lands safely in VARIANT; the deployed schema changes only through a reviewed, tested PR — drift is a blocking CI signal, not silent breakage.</a:t>
+              <a:t>Upstream drift lands safely in VARIANT; the deployed schema changes only through a reviewed, tested PR, drift is a blocking CI signal, not silent breakage.</a:t>
             </a:r>
           </a:p>
         </p:txBody>
@@ -23102,7 +23102,7 @@
                 </a:solidFill>
                 <a:latin typeface="Segoe UI"/>
               </a:rPr>
-              <a:t>OpenGov Data Platform  ·  Case Study — Viewpoint  ·  Akash Pahilwan</a:t>
+              <a:t>OpenGov Data Platform  ·  Case Study  ·  Akash Pahilwan</a:t>
             </a:r>
           </a:p>
         </p:txBody>
@@ -23385,7 +23385,7 @@
                 </a:solidFill>
                 <a:latin typeface="Segoe UI"/>
               </a:rPr>
-              <a:t>S3 keys as source/table/ingest_date=… — immutable, append-only, replayable.</a:t>
+              <a:t>S3 keys as source/table/ingest_date=…, immutable, append-only, replayable.</a:t>
             </a:r>
           </a:p>
           <a:p>
@@ -23459,7 +23459,7 @@
                 </a:solidFill>
                 <a:latin typeface="Segoe UI"/>
               </a:rPr>
-              <a:t>external stage + COPY INTO, or Snowpipe on arrival; capture METADATA$FILENAME for lineage.</a:t>
+              <a:t>External stage + COPY INTO, or Snowpipe on arrival; capture METADATA$FILENAME for lineage.</a:t>
             </a:r>
           </a:p>
           <a:p>
@@ -23496,7 +23496,7 @@
                 </a:solidFill>
                 <a:latin typeface="Segoe UI"/>
               </a:rPr>
-              <a:t>validate required fields; bad rows → _QUARANTINE table; never fail the whole batch on one row.</a:t>
+              <a:t>Validate required fields; bad rows → _QUARANTINE table; never fail the whole batch on one row.</a:t>
             </a:r>
           </a:p>
           <a:p>
@@ -23533,7 +23533,7 @@
                 </a:solidFill>
                 <a:latin typeface="Segoe UI"/>
               </a:rPr>
-              <a:t>a _LOAD_LOG row per file — records processed, quarantined, load timestamp.</a:t>
+              <a:t>A _LOAD_LOG row per file, records processed, quarantined, load timestamp.</a:t>
             </a:r>
           </a:p>
           <a:p>
@@ -23570,7 +23570,7 @@
                 </a:solidFill>
                 <a:latin typeface="Segoe UI"/>
               </a:rPr>
-              <a:t>dedup on natural key so re-loading a file is a no-op.</a:t>
+              <a:t>Dedup on natural key so re-loading a file is a no-op.</a:t>
             </a:r>
           </a:p>
         </p:txBody>
@@ -23701,7 +23701,7 @@
                 </a:solidFill>
                 <a:latin typeface="Segoe UI"/>
               </a:rPr>
-              <a:t>RAW is immutable truth — validate and quarantine at the door, log every load.</a:t>
+              <a:t>RAW is immutable truth, validate and quarantine at the door, log every load.</a:t>
             </a:r>
           </a:p>
         </p:txBody>
@@ -23735,7 +23735,7 @@
                 </a:solidFill>
                 <a:latin typeface="Segoe UI"/>
               </a:rPr>
-              <a:t>OpenGov Data Platform  ·  Case Study — Viewpoint  ·  Akash Pahilwan</a:t>
+              <a:t>OpenGov Data Platform  ·  Case Study  ·  Akash Pahilwan</a:t>
             </a:r>
           </a:p>
         </p:txBody>
@@ -24037,7 +24037,7 @@
                 </a:solidFill>
                 <a:latin typeface="Segoe UI"/>
               </a:rPr>
-              <a:t>        –  </a:t>
+              <a:t>        ·  </a:t>
             </a:r>
             <a:r>
               <a:rPr b="1" sz="1500">
@@ -24055,7 +24055,7 @@
                 </a:solidFill>
                 <a:latin typeface="Segoe UI"/>
               </a:rPr>
-              <a:t>— loader-owned, immutable, source-system schemas, no business logic.</a:t>
+              <a:t>Loader-owned, immutable, source-system schemas, no business logic.</a:t>
             </a:r>
           </a:p>
           <a:p>
@@ -24074,7 +24074,7 @@
                 </a:solidFill>
                 <a:latin typeface="Segoe UI"/>
               </a:rPr>
-              <a:t>        –  </a:t>
+              <a:t>        ·  </a:t>
             </a:r>
             <a:r>
               <a:rPr b="1" sz="1500">
@@ -24092,7 +24092,7 @@
                 </a:solidFill>
                 <a:latin typeface="Segoe UI"/>
               </a:rPr>
-              <a:t>— dbt-owned; typed, renamed, conformed; light transforms.</a:t>
+              <a:t>dbt-owned; typed, renamed, conformed; light transforms.</a:t>
             </a:r>
           </a:p>
           <a:p>
@@ -24111,7 +24111,7 @@
                 </a:solidFill>
                 <a:latin typeface="Segoe UI"/>
               </a:rPr>
-              <a:t>        –  </a:t>
+              <a:t>        ·  </a:t>
             </a:r>
             <a:r>
               <a:rPr b="1" sz="1500">
@@ -24129,7 +24129,7 @@
                 </a:solidFill>
                 <a:latin typeface="Segoe UI"/>
               </a:rPr>
-              <a:t>— dbt-owned; business-ready, domain schemas, tested &amp; documented.</a:t>
+              <a:t>dbt-owned; business-ready, domain schemas, tested &amp; documented.</a:t>
             </a:r>
           </a:p>
           <a:p>
@@ -24148,7 +24148,7 @@
                 </a:solidFill>
                 <a:latin typeface="Segoe UI"/>
               </a:rPr>
-              <a:t>        –  </a:t>
+              <a:t>        ·  </a:t>
             </a:r>
             <a:r>
               <a:rPr b="1" sz="1500">
@@ -24166,7 +24166,7 @@
                 </a:solidFill>
                 <a:latin typeface="Segoe UI"/>
               </a:rPr>
-              <a:t>— analyst scratch; safe to break, no downstream dependencies.</a:t>
+              <a:t>Analyst scratch; safe to break, no downstream dependencies.</a:t>
             </a:r>
           </a:p>
           <a:p>
@@ -24203,7 +24203,7 @@
                 </a:solidFill>
                 <a:latin typeface="Segoe UI"/>
               </a:rPr>
-              <a:t>separate ingest / transform / BI warehouses; right-sized; auto-suspend for cost.</a:t>
+              <a:t>Separate ingest / transform / BI warehouses; right-sized; auto-suspend for cost.</a:t>
             </a:r>
           </a:p>
           <a:p>
@@ -24240,7 +24240,7 @@
                 </a:solidFill>
                 <a:latin typeface="Segoe UI"/>
               </a:rPr>
-              <a:t>dev and prod isolated; promotion through CI, never manual edits in prod.</a:t>
+              <a:t>Dev and prod isolated; promotion through CI, never manual edits in prod.</a:t>
             </a:r>
           </a:p>
         </p:txBody>
@@ -24405,7 +24405,7 @@
                 </a:solidFill>
                 <a:latin typeface="Segoe UI"/>
               </a:rPr>
-              <a:t>OpenGov Data Platform  ·  Case Study — Viewpoint  ·  Akash Pahilwan</a:t>
+              <a:t>OpenGov Data Platform  ·  Case Study  ·  Akash Pahilwan</a:t>
             </a:r>
           </a:p>
         </p:txBody>
@@ -24604,7 +24604,7 @@
                 </a:solidFill>
                 <a:latin typeface="Segoe UI"/>
               </a:rPr>
-              <a:t>dbt for many domains — without a monolith</a:t>
+              <a:t>dbt for many domains, without a monolith</a:t>
             </a:r>
           </a:p>
         </p:txBody>
@@ -24688,7 +24688,7 @@
                 </a:solidFill>
                 <a:latin typeface="Segoe UI"/>
               </a:rPr>
-              <a:t>staging (1:1 with source) → intermediate → marts (by domain).</a:t>
+              <a:t>Staging (1:1 with source) → intermediate → marts (by domain).</a:t>
             </a:r>
           </a:p>
           <a:p>
@@ -24725,7 +24725,7 @@
                 </a:solidFill>
                 <a:latin typeface="Segoe UI"/>
               </a:rPr>
-              <a:t>folders + CODEOWNERS per domain (revops, finance, product, hr).</a:t>
+              <a:t>Folders + CODEOWNERS per domain (revops, finance, product, hr).</a:t>
             </a:r>
           </a:p>
           <a:p>
@@ -24762,7 +24762,7 @@
                 </a:solidFill>
                 <a:latin typeface="Segoe UI"/>
               </a:rPr>
-              <a:t>each domain exposes PUBLIC models via contracts; consumers depend on stable interfaces, not internals.</a:t>
+              <a:t>Each domain exposes PUBLIC models via contracts; consumers depend on stable interfaces, not internals.</a:t>
             </a:r>
           </a:p>
           <a:p>
@@ -24799,7 +24799,7 @@
                 </a:solidFill>
                 <a:latin typeface="Segoe UI"/>
               </a:rPr>
-              <a:t>generic + singular tests, model contracts, source freshness, exposures for BI/AI lineage.</a:t>
+              <a:t>Generic + singular tests, model contracts, source freshness, exposures for BI/AI lineage.</a:t>
             </a:r>
           </a:p>
           <a:p>
@@ -24836,7 +24836,7 @@
                 </a:solidFill>
                 <a:latin typeface="Segoe UI"/>
               </a:rPr>
-              <a:t>incremental for high-volume events (telemetry); full-refresh for small dimensions.</a:t>
+              <a:t>Incremental for high-volume events (telemetry); full-refresh for small dimensions.</a:t>
             </a:r>
           </a:p>
           <a:p>
@@ -24873,7 +24873,7 @@
                 </a:solidFill>
                 <a:latin typeface="Segoe UI"/>
               </a:rPr>
-              <a:t>slim CI builds only state:modified+ — seconds, not full rebuilds.</a:t>
+              <a:t>Slim CI builds only state:modified+, seconds, not full rebuilds.</a:t>
             </a:r>
           </a:p>
         </p:txBody>
@@ -25038,7 +25038,7 @@
                 </a:solidFill>
                 <a:latin typeface="Segoe UI"/>
               </a:rPr>
-              <a:t>OpenGov Data Platform  ·  Case Study — Viewpoint  ·  Akash Pahilwan</a:t>
+              <a:t>OpenGov Data Platform  ·  Case Study  ·  Akash Pahilwan</a:t>
             </a:r>
           </a:p>
         </p:txBody>
@@ -25312,7 +25312,7 @@
                 </a:solidFill>
                 <a:latin typeface="Segoe UI"/>
               </a:rPr>
-              <a:t>One Terraform module — domain_workspace:   </a:t>
+              <a:t>One Terraform module, domain_workspace:   </a:t>
             </a:r>
             <a:r>
               <a:rPr sz="1800">
@@ -25321,7 +25321,7 @@
                 </a:solidFill>
                 <a:latin typeface="Segoe UI"/>
               </a:rPr>
-              <a:t>input a domain name, get a full, governed workspace.</a:t>
+              <a:t>Input a domain name, get a full, governed workspace.</a:t>
             </a:r>
           </a:p>
           <a:p>
@@ -25340,7 +25340,7 @@
                 </a:solidFill>
                 <a:latin typeface="Segoe UI"/>
               </a:rPr>
-              <a:t>        –  </a:t>
+              <a:t>        ·  </a:t>
             </a:r>
             <a:r>
               <a:rPr b="1" sz="1500">
@@ -25358,7 +25358,7 @@
                 </a:solidFill>
                 <a:latin typeface="Segoe UI"/>
               </a:rPr>
-              <a:t>schemas (staging / marts / sandbox), functional + access roles, service accounts, a warehouse.</a:t>
+              <a:t>Schemas (staging / marts / sandbox), functional + access roles, service accounts, a warehouse.</a:t>
             </a:r>
           </a:p>
           <a:p>
@@ -25377,7 +25377,7 @@
                 </a:solidFill>
                 <a:latin typeface="Segoe UI"/>
               </a:rPr>
-              <a:t>        –  </a:t>
+              <a:t>        ·  </a:t>
             </a:r>
             <a:r>
               <a:rPr b="1" sz="1500">
@@ -25395,7 +25395,7 @@
                 </a:solidFill>
                 <a:latin typeface="Segoe UI"/>
               </a:rPr>
-              <a:t>default grants, PII tags, cost limits, and naming standards automatically.</a:t>
+              <a:t>Default grants, PII tags, cost limits, and naming standards automatically.</a:t>
             </a:r>
           </a:p>
           <a:p>
@@ -25432,7 +25432,7 @@
                 </a:solidFill>
                 <a:latin typeface="Segoe UI"/>
               </a:rPr>
-              <a:t>starter dbt project, connector config, and CI workflow scaffolded for the team.</a:t>
+              <a:t>Starter dbt project, connector config, and CI workflow scaffolded for the team.</a:t>
             </a:r>
           </a:p>
           <a:p>
@@ -25469,7 +25469,7 @@
                 </a:solidFill>
                 <a:latin typeface="Segoe UI"/>
               </a:rPr>
-              <a:t>a domain is onboarded by opening a PR — reviewed, planned, applied by CI. No tickets.</a:t>
+              <a:t>A domain is onboarded by opening a PR, reviewed, planned, applied by CI. No tickets.</a:t>
             </a:r>
           </a:p>
           <a:p>
@@ -25506,7 +25506,7 @@
                 </a:solidFill>
                 <a:latin typeface="Segoe UI"/>
               </a:rPr>
-              <a:t>consistent and governed by construction; hours, not weeks; the platform team doesn't become the bottleneck.</a:t>
+              <a:t>Consistent and governed by construction; hours, not weeks; the platform team doesn't become the bottleneck.</a:t>
             </a:r>
           </a:p>
         </p:txBody>
@@ -25637,7 +25637,7 @@
                 </a:solidFill>
                 <a:latin typeface="Segoe UI"/>
               </a:rPr>
-              <a:t>The paved path makes the governed way the easiest way — self-service without losing control.</a:t>
+              <a:t>The paved path makes the governed way the easiest way, self-service without losing control.</a:t>
             </a:r>
           </a:p>
         </p:txBody>
@@ -25671,7 +25671,7 @@
                 </a:solidFill>
                 <a:latin typeface="Segoe UI"/>
               </a:rPr>
-              <a:t>OpenGov Data Platform  ·  Case Study — Viewpoint  ·  Akash Pahilwan</a:t>
+              <a:t>OpenGov Data Platform  ·  Case Study  ·  Akash Pahilwan</a:t>
             </a:r>
           </a:p>
         </p:txBody>

--- a/presentation/OpenGov_Data_Platform_CaseStudy.pptx
+++ b/presentation/OpenGov_Data_Platform_CaseStudy.pptx
@@ -33,6 +33,9 @@
     <p:sldId id="281" r:id="rId33"/>
     <p:sldId id="282" r:id="rId34"/>
     <p:sldId id="283" r:id="rId35"/>
+    <p:sldId id="284" r:id="rId36"/>
+    <p:sldId id="285" r:id="rId37"/>
+    <p:sldId id="286" r:id="rId38"/>
   </p:sldIdLst>
   <p:sldSz cx="12191695" cy="6858000" type="screen4x3"/>
   <p:notesSz cx="6858000" cy="9144000"/>
@@ -1369,7 +1372,7 @@
           <a:lstStyle/>
           <a:p>
             <a:r>
-              <a:t>Land the thesis: platform-as-product, governed by default, self-service, running end-to-end. Invite deep-dive questions, the appendix has the internals.</a:t>
+              <a:t>Roadmap, part 1. Snowpipe replaces the scheduled COPY once files land continuously (the ingestion design already keeps the same append-only contract). Slim CI + staging contracts + spoke repos complete the dbt Mesh story. Row-access policies and OIDC are the security hardening; env-specific DEV_*/PROD_* roles (SnowOps-style) give per-environment isolation beyond the account-wide functional roles.</a:t>
             </a:r>
           </a:p>
         </p:txBody>
@@ -1439,7 +1442,7 @@
           <a:lstStyle/>
           <a:p>
             <a:r>
-              <a:t>Direct answer to 'how does this scale to 10 domains + how do you handle service vs human + audit'. The FINANCE_ANALYST demo is the concrete proof of domain-scoped least privilege, built and verified live.</a:t>
+              <a:t>Roadmap, part 2. Observability grows from the primitives we built (_LOAD_LOG, dbt tests) into published SLAs + alerting. Cost dashboards use the per-role warehouse split for attribution. The AI-readiness bets are the differentiator made concrete: a governed semantic layer as the single interface, contracts across domains, and governance that already travels to any service account including an LLM's.</a:t>
             </a:r>
           </a:p>
         </p:txBody>
@@ -1509,7 +1512,7 @@
           <a:lstStyle/>
           <a:p>
             <a:r>
-              <a:t>The 'incremental vs full-refresh' probe. The non-obvious operational point: an incremental logic fix requires a full-refresh, which is why there's a dedicated workflow with all/modified scope. Grounded in a real bug we fixed.</a:t>
+              <a:t>Land the thesis: platform-as-product, governed by default, self-service, running end-to-end. Invite deep-dive questions, the appendix has the internals.</a:t>
             </a:r>
           </a:p>
         </p:txBody>
@@ -1579,7 +1582,7 @@
           <a:lstStyle/>
           <a:p>
             <a:r>
-              <a:t>Hits every CI/CD probe: OIDC/key-pair, protecting secrets from fork PRs, idempotency + half-failure safety, linting/naming. The drift check + sync_config validation are our 'linting'; remote state + post-merge-only secrets are the security spine.</a:t>
+              <a:t>Direct answer to 'how does this scale to 10 domains + how do you handle service vs human + audit'. The FINANCE_ANALYST demo is the concrete proof of domain-scoped least privilege, built and verified live.</a:t>
             </a:r>
           </a:p>
         </p:txBody>
@@ -1649,7 +1652,7 @@
           <a:lstStyle/>
           <a:p>
             <a:r>
-              <a:t>BONUS / HIDDEN, pull up only if the panel digs into VARIANT performance. Key message: VARIANT is not a JSON string column. On write, Snowflake examines paths that occur consistently across rows in a micro-partition and stores each as its own typed, compressed sub-column with min/max metadata, so path projection and partition pruning behave like native columns. It degrades only when keys are wildly inconsistent row-to-row; the fix is promoting hot keys (event_id) to real columns, which we do anyway for dedup. Drift behavior: missing key reads as NULL (never an error), new keys are invisible until a PR selects them, and TRY_CAST + dbt tests turn type drift into a quarantine signal instead of a failed job. 16 MB/value limit is ~4 orders of magnitude above a telemetry event. One-breath close: 'stable RAW DDL, columnarized paths, type once in incremental staging, downstream never touches JSON.'</a:t>
+              <a:t>The 'incremental vs full-refresh' probe. The non-obvious operational point: an incremental logic fix requires a full-refresh, which is why there's a dedicated workflow with all/modified scope. Grounded in a real bug we fixed.</a:t>
             </a:r>
           </a:p>
         </p:txBody>
@@ -1719,7 +1722,7 @@
           <a:lstStyle/>
           <a:p>
             <a:r>
-              <a:t>BONUS / HIDDEN, pull up if asked about bucket layout, hourly cadence, or 'why not Snowpipe'. Hive-style dt=/hr= prefixes sort lexicographically by time, so the watermark is just the last processed prefix; re-scan a trailing 24-48h window so late-arriving files in an old hour still load (COPY's file history dedups the overlap for free). Append-only stance: never 'replace with latest', RAW keeps every loaded row; dedup and current-state are computed in staging (QUALIFY on event_id). Snowpipe question: for the case-study deliverable I keep a scheduled Python job + COPY, because the assessed logic, schema validation, quarantine, _LOAD_LOG summary, lives in that code, and hourly batch on an XS warehouse is cheap. In production, with files landing continuously, I'd flip to Snowpipe: S3 event notification -&gt; per-file auto-ingest, exactly-once per file, ~1-minute latency, no scheduler or watermark logic at all; validation then moves to a post-load stream/task. Same table, same append-only contract, only the trigger changes. 64-day detail: COPY's per-file load history EXPIRES after 64 days. A backfill touching older files is silently SKIPPED by default (status unknown -&gt; skip, no error, a silent gap, not duplicates). Deliberate old backfill: set LOAD_UNCERTAIN_FILES=TRUE (staging's event_id dedup absorbs any repeats) or FORCE=TRUE into a fresh table + SWAP. This expiry is exactly why the design has three layers, COPY history expires, a watermark can miss late files, so event_id dedup in staging is the backstop that never expires.</a:t>
+              <a:t>Hits every CI/CD probe: OIDC/key-pair, protecting secrets from fork PRs, idempotency + half-failure safety, linting/naming. The drift check + sync_config validation are our 'linting'; remote state + post-merge-only secrets are the security spine.</a:t>
             </a:r>
           </a:p>
         </p:txBody>
@@ -1745,6 +1748,146 @@
 </file>
 
 <file path=ppt/notesSlides/notesSlide26.xml><?xml version="1.0" encoding="utf-8"?>
+<p:notes xmlns:a="http://schemas.openxmlformats.org/drawingml/2006/main" xmlns:p="http://schemas.openxmlformats.org/presentationml/2006/main" xmlns:r="http://schemas.openxmlformats.org/officeDocument/2006/relationships">
+  <p:cSld>
+    <p:spTree>
+      <p:nvGrpSpPr>
+        <p:cNvPr id="1" name=""/>
+        <p:cNvGrpSpPr/>
+        <p:nvPr/>
+      </p:nvGrpSpPr>
+      <p:grpSpPr>
+        <a:xfrm>
+          <a:off x="0" y="0"/>
+          <a:ext cx="0" cy="0"/>
+          <a:chOff x="0" y="0"/>
+          <a:chExt cx="0" cy="0"/>
+        </a:xfrm>
+      </p:grpSpPr>
+      <p:sp>
+        <p:nvSpPr>
+          <p:cNvPr id="2" name="Slide Image Placeholder 1"/>
+          <p:cNvSpPr>
+            <a:spLocks noGrp="1"/>
+          </p:cNvSpPr>
+          <p:nvPr>
+            <p:ph type="sldImg" idx="2"/>
+          </p:nvPr>
+        </p:nvSpPr>
+        <p:spPr/>
+      </p:sp>
+      <p:sp>
+        <p:nvSpPr>
+          <p:cNvPr id="3" name="Notes Placeholder 2"/>
+          <p:cNvSpPr>
+            <a:spLocks noGrp="1"/>
+          </p:cNvSpPr>
+          <p:nvPr>
+            <p:ph type="body" idx="3" sz="quarter"/>
+          </p:nvPr>
+        </p:nvSpPr>
+        <p:spPr/>
+        <p:txBody>
+          <a:bodyPr/>
+          <a:lstStyle/>
+          <a:p>
+            <a:r>
+              <a:t>BONUS / HIDDEN, pull up only if the panel digs into VARIANT performance. Key message: VARIANT is not a JSON string column. On write, Snowflake examines paths that occur consistently across rows in a micro-partition and stores each as its own typed, compressed sub-column with min/max metadata, so path projection and partition pruning behave like native columns. It degrades only when keys are wildly inconsistent row-to-row; the fix is promoting hot keys (event_id) to real columns, which we do anyway for dedup. Drift behavior: missing key reads as NULL (never an error), new keys are invisible until a PR selects them, and TRY_CAST + dbt tests turn type drift into a quarantine signal instead of a failed job. 16 MB/value limit is ~4 orders of magnitude above a telemetry event. One-breath close: 'stable RAW DDL, columnarized paths, type once in incremental staging, downstream never touches JSON.'</a:t>
+            </a:r>
+          </a:p>
+        </p:txBody>
+      </p:sp>
+      <p:sp>
+        <p:nvSpPr>
+          <p:cNvPr id="4" name="Slide Number Placeholder 3"/>
+          <p:cNvSpPr>
+            <a:spLocks noGrp="1"/>
+          </p:cNvSpPr>
+          <p:nvPr>
+            <p:ph type="sldNum" idx="5" sz="quarter"/>
+          </p:nvPr>
+        </p:nvSpPr>
+        <p:spPr/>
+      </p:sp>
+    </p:spTree>
+  </p:cSld>
+  <p:clrMapOvr>
+    <a:masterClrMapping/>
+  </p:clrMapOvr>
+</p:notes>
+</file>
+
+<file path=ppt/notesSlides/notesSlide27.xml><?xml version="1.0" encoding="utf-8"?>
+<p:notes xmlns:a="http://schemas.openxmlformats.org/drawingml/2006/main" xmlns:p="http://schemas.openxmlformats.org/presentationml/2006/main" xmlns:r="http://schemas.openxmlformats.org/officeDocument/2006/relationships">
+  <p:cSld>
+    <p:spTree>
+      <p:nvGrpSpPr>
+        <p:cNvPr id="1" name=""/>
+        <p:cNvGrpSpPr/>
+        <p:nvPr/>
+      </p:nvGrpSpPr>
+      <p:grpSpPr>
+        <a:xfrm>
+          <a:off x="0" y="0"/>
+          <a:ext cx="0" cy="0"/>
+          <a:chOff x="0" y="0"/>
+          <a:chExt cx="0" cy="0"/>
+        </a:xfrm>
+      </p:grpSpPr>
+      <p:sp>
+        <p:nvSpPr>
+          <p:cNvPr id="2" name="Slide Image Placeholder 1"/>
+          <p:cNvSpPr>
+            <a:spLocks noGrp="1"/>
+          </p:cNvSpPr>
+          <p:nvPr>
+            <p:ph type="sldImg" idx="2"/>
+          </p:nvPr>
+        </p:nvSpPr>
+        <p:spPr/>
+      </p:sp>
+      <p:sp>
+        <p:nvSpPr>
+          <p:cNvPr id="3" name="Notes Placeholder 2"/>
+          <p:cNvSpPr>
+            <a:spLocks noGrp="1"/>
+          </p:cNvSpPr>
+          <p:nvPr>
+            <p:ph type="body" idx="3" sz="quarter"/>
+          </p:nvPr>
+        </p:nvSpPr>
+        <p:spPr/>
+        <p:txBody>
+          <a:bodyPr/>
+          <a:lstStyle/>
+          <a:p>
+            <a:r>
+              <a:t>BONUS / HIDDEN, pull up if asked about bucket layout, hourly cadence, or 'why not Snowpipe'. Hive-style dt=/hr= prefixes sort lexicographically by time, so the watermark is just the last processed prefix; re-scan a trailing 24-48h window so late-arriving files in an old hour still load (COPY's file history dedups the overlap for free). Append-only stance: never 'replace with latest', RAW keeps every loaded row; dedup and current-state are computed in staging (QUALIFY on event_id). Snowpipe question: for the case-study deliverable I keep a scheduled Python job + COPY, because the assessed logic, schema validation, quarantine, _LOAD_LOG summary, lives in that code, and hourly batch on an XS warehouse is cheap. In production, with files landing continuously, I'd flip to Snowpipe: S3 event notification -&gt; per-file auto-ingest, exactly-once per file, ~1-minute latency, no scheduler or watermark logic at all; validation then moves to a post-load stream/task. Same table, same append-only contract, only the trigger changes. 64-day detail: COPY's per-file load history EXPIRES after 64 days. A backfill touching older files is silently SKIPPED by default (status unknown -&gt; skip, no error, a silent gap, not duplicates). Deliberate old backfill: set LOAD_UNCERTAIN_FILES=TRUE (staging's event_id dedup absorbs any repeats) or FORCE=TRUE into a fresh table + SWAP. This expiry is exactly why the design has three layers, COPY history expires, a watermark can miss late files, so event_id dedup in staging is the backstop that never expires.</a:t>
+            </a:r>
+          </a:p>
+        </p:txBody>
+      </p:sp>
+      <p:sp>
+        <p:nvSpPr>
+          <p:cNvPr id="4" name="Slide Number Placeholder 3"/>
+          <p:cNvSpPr>
+            <a:spLocks noGrp="1"/>
+          </p:cNvSpPr>
+          <p:nvPr>
+            <p:ph type="sldNum" idx="5" sz="quarter"/>
+          </p:nvPr>
+        </p:nvSpPr>
+        <p:spPr/>
+      </p:sp>
+    </p:spTree>
+  </p:cSld>
+  <p:clrMapOvr>
+    <a:masterClrMapping/>
+  </p:clrMapOvr>
+</p:notes>
+</file>
+
+<file path=ppt/notesSlides/notesSlide28.xml><?xml version="1.0" encoding="utf-8"?>
 <p:notes xmlns:a="http://schemas.openxmlformats.org/drawingml/2006/main" xmlns:p="http://schemas.openxmlformats.org/presentationml/2006/main" xmlns:r="http://schemas.openxmlformats.org/officeDocument/2006/relationships">
   <p:cSld>
     <p:spTree>
@@ -7219,7 +7362,7 @@
                 </a:solidFill>
                 <a:latin typeface="Segoe UI"/>
               </a:rPr>
-              <a:t>Native audit surfaces:   </a:t>
+              <a:t>Native audit surfaces(SQL):   </a:t>
             </a:r>
             <a:r>
               <a:rPr sz="1600">
@@ -14290,7 +14433,7 @@
     <p:bg>
       <p:bgPr>
         <a:solidFill>
-          <a:srgbClr val="FFFFFF"/>
+          <a:srgbClr val="191552"/>
         </a:solidFill>
         <a:effectLst/>
       </p:bgPr>
@@ -14311,51 +14454,7 @@
         <p:spPr>
           <a:xfrm>
             <a:off x="0" y="0"/>
-            <a:ext cx="12191695" cy="1024128"/>
-          </a:xfrm>
-          <a:prstGeom prst="rect">
-            <a:avLst/>
-          </a:prstGeom>
-          <a:solidFill>
-            <a:srgbClr val="191552"/>
-          </a:solidFill>
-          <a:ln>
-            <a:noFill/>
-          </a:ln>
-          <a:effectLst/>
-        </p:spPr>
-        <p:style>
-          <a:lnRef idx="1">
-            <a:schemeClr val="accent1"/>
-          </a:lnRef>
-          <a:fillRef idx="3">
-            <a:schemeClr val="accent1"/>
-          </a:fillRef>
-          <a:effectRef idx="2">
-            <a:schemeClr val="accent1"/>
-          </a:effectRef>
-          <a:fontRef idx="minor">
-            <a:schemeClr val="lt1"/>
-          </a:fontRef>
-        </p:style>
-        <p:txBody>
-          <a:bodyPr rtlCol="0" anchor="ctr"/>
-          <a:lstStyle/>
-          <a:p>
-            <a:pPr algn="ctr"/>
-          </a:p>
-        </p:txBody>
-      </p:sp>
-      <p:sp>
-        <p:nvSpPr>
-          <p:cNvPr id="3" name="Rectangle 2"/>
-          <p:cNvSpPr/>
-          <p:nvPr/>
-        </p:nvSpPr>
-        <p:spPr>
-          <a:xfrm>
-            <a:off x="0" y="1024128"/>
-            <a:ext cx="12191695" cy="50292"/>
+            <a:ext cx="256032" cy="6858000"/>
           </a:xfrm>
           <a:prstGeom prst="rect">
             <a:avLst/>
@@ -14390,59 +14489,9 @@
           </a:p>
         </p:txBody>
       </p:sp>
-      <p:sp>
-        <p:nvSpPr>
-          <p:cNvPr id="4" name="TextBox 3"/>
-          <p:cNvSpPr txBox="1"/>
-          <p:nvPr/>
-        </p:nvSpPr>
-        <p:spPr>
-          <a:xfrm>
-            <a:off x="502920" y="109728"/>
-            <a:ext cx="9875520" cy="841248"/>
-          </a:xfrm>
-          <a:prstGeom prst="rect">
-            <a:avLst/>
-          </a:prstGeom>
-          <a:noFill/>
-        </p:spPr>
-        <p:txBody>
-          <a:bodyPr wrap="square" lIns="36576" rIns="36576" tIns="18288" bIns="18288" anchor="ctr">
-            <a:spAutoFit/>
-          </a:bodyPr>
-          <a:lstStyle/>
-          <a:p>
-            <a:pPr>
-              <a:spcAft>
-                <a:spcPts val="100"/>
-              </a:spcAft>
-            </a:pPr>
-            <a:r>
-              <a:rPr sz="1100" b="1">
-                <a:solidFill>
-                  <a:srgbClr val="A79FFF"/>
-                </a:solidFill>
-                <a:latin typeface="Segoe UI"/>
-              </a:rPr>
-              <a:t>WRAP-UP</a:t>
-            </a:r>
-          </a:p>
-          <a:p>
-            <a:r>
-              <a:rPr sz="2600" b="1">
-                <a:solidFill>
-                  <a:srgbClr val="FFFFFF"/>
-                </a:solidFill>
-                <a:latin typeface="Segoe UI"/>
-              </a:rPr>
-              <a:t>Close: one governed foundation, analytics &amp; AI on top</a:t>
-            </a:r>
-          </a:p>
-        </p:txBody>
-      </p:sp>
       <p:pic>
         <p:nvPicPr>
-          <p:cNvPr id="5" name="Picture 4" descr="image.png"/>
+          <p:cNvPr id="3" name="Picture 2" descr="image.png"/>
           <p:cNvPicPr>
             <a:picLocks noChangeAspect="1"/>
           </p:cNvPicPr>
@@ -14456,8 +14505,8 @@
         </p:blipFill>
         <p:spPr>
           <a:xfrm>
-            <a:off x="11259006" y="237744"/>
-            <a:ext cx="548640" cy="548640"/>
+            <a:off x="10561320" y="594360"/>
+            <a:ext cx="640080" cy="640080"/>
           </a:xfrm>
           <a:prstGeom prst="ellipse">
             <a:avLst/>
@@ -14466,14 +14515,14 @@
       </p:pic>
       <p:sp>
         <p:nvSpPr>
-          <p:cNvPr id="6" name="TextBox 5"/>
+          <p:cNvPr id="4" name="TextBox 3"/>
           <p:cNvSpPr txBox="1"/>
           <p:nvPr/>
         </p:nvSpPr>
         <p:spPr>
           <a:xfrm>
-            <a:off x="640080" y="1371600"/>
-            <a:ext cx="10972800" cy="4206240"/>
+            <a:off x="1005840" y="2468880"/>
+            <a:ext cx="10241280" cy="2194560"/>
           </a:xfrm>
           <a:prstGeom prst="rect">
             <a:avLst/>
@@ -14486,388 +14535,30 @@
           </a:bodyPr>
           <a:lstStyle/>
           <a:p>
+            <a:r>
+              <a:rPr sz="3800" b="1">
+                <a:solidFill>
+                  <a:srgbClr val="FFFFFF"/>
+                </a:solidFill>
+                <a:latin typeface="Segoe UI"/>
+              </a:rPr>
+              <a:t>Future Enhancements</a:t>
+            </a:r>
+          </a:p>
+          <a:p>
             <a:pPr>
-              <a:lnSpc>
-                <a:spcPct val="107000"/>
-              </a:lnSpc>
-              <a:spcAft>
-                <a:spcPts val="800"/>
-              </a:spcAft>
+              <a:spcBef>
+                <a:spcPts val="1000"/>
+              </a:spcBef>
             </a:pPr>
             <a:r>
               <a:rPr sz="1700">
                 <a:solidFill>
-                  <a:srgbClr val="4A3FFF"/>
-                </a:solidFill>
-                <a:latin typeface="Segoe UI"/>
-              </a:rPr>
-              <a:t>▸  </a:t>
-            </a:r>
-            <a:r>
-              <a:rPr b="1" sz="1700">
-                <a:solidFill>
-                  <a:srgbClr val="1B1B33"/>
-                </a:solidFill>
-                <a:latin typeface="Segoe UI"/>
-              </a:rPr>
-              <a:t>Foundation → pipelines → self-service → trust:   </a:t>
-            </a:r>
-            <a:r>
-              <a:rPr sz="1700">
-                <a:solidFill>
-                  <a:srgbClr val="1B1B33"/>
-                </a:solidFill>
-                <a:latin typeface="Segoe UI"/>
-              </a:rPr>
-              <a:t>One IaC-first, governed platform, and it's running, not just drawn.</a:t>
-            </a:r>
-          </a:p>
-          <a:p>
-            <a:pPr>
-              <a:lnSpc>
-                <a:spcPct val="107000"/>
-              </a:lnSpc>
-              <a:spcAft>
-                <a:spcPts val="800"/>
-              </a:spcAft>
-            </a:pPr>
-            <a:r>
-              <a:rPr sz="1700">
-                <a:solidFill>
-                  <a:srgbClr val="4A3FFF"/>
-                </a:solidFill>
-                <a:latin typeface="Segoe UI"/>
-              </a:rPr>
-              <a:t>▸  </a:t>
-            </a:r>
-            <a:r>
-              <a:rPr b="1" sz="1700">
-                <a:solidFill>
-                  <a:srgbClr val="1B1B33"/>
-                </a:solidFill>
-                <a:latin typeface="Segoe UI"/>
-              </a:rPr>
-              <a:t>Buy the commodity, build the differentiator:   </a:t>
-            </a:r>
-            <a:r>
-              <a:rPr sz="1700">
-                <a:solidFill>
-                  <a:srgbClr val="1B1B33"/>
-                </a:solidFill>
-                <a:latin typeface="Segoe UI"/>
-              </a:rPr>
-              <a:t>Fivetran for SaaS; custom Python for telemetry; native dbt for transforms.</a:t>
-            </a:r>
-          </a:p>
-          <a:p>
-            <a:pPr>
-              <a:lnSpc>
-                <a:spcPct val="107000"/>
-              </a:lnSpc>
-              <a:spcAft>
-                <a:spcPts val="800"/>
-              </a:spcAft>
-            </a:pPr>
-            <a:r>
-              <a:rPr sz="1700">
-                <a:solidFill>
-                  <a:srgbClr val="4A3FFF"/>
-                </a:solidFill>
-                <a:latin typeface="Segoe UI"/>
-              </a:rPr>
-              <a:t>▸  </a:t>
-            </a:r>
-            <a:r>
-              <a:rPr b="1" sz="1700">
-                <a:solidFill>
-                  <a:srgbClr val="1B1B33"/>
-                </a:solidFill>
-                <a:latin typeface="Segoe UI"/>
-              </a:rPr>
-              <a:t>Guardrails as paved paths:   </a:t>
-            </a:r>
-            <a:r>
-              <a:rPr sz="1700">
-                <a:solidFill>
-                  <a:srgbClr val="1B1B33"/>
-                </a:solidFill>
-                <a:latin typeface="Segoe UI"/>
-              </a:rPr>
-              <a:t>Config-driven RBAC + tag masking, per-developer sandboxes, CI/CD to DEV &amp; PROD.</a:t>
-            </a:r>
-          </a:p>
-          <a:p>
-            <a:pPr>
-              <a:lnSpc>
-                <a:spcPct val="107000"/>
-              </a:lnSpc>
-              <a:spcAft>
-                <a:spcPts val="800"/>
-              </a:spcAft>
-            </a:pPr>
-            <a:r>
-              <a:rPr sz="1700">
-                <a:solidFill>
-                  <a:srgbClr val="4A3FFF"/>
-                </a:solidFill>
-                <a:latin typeface="Segoe UI"/>
-              </a:rPr>
-              <a:t>▸  </a:t>
-            </a:r>
-            <a:r>
-              <a:rPr b="1" sz="1700">
-                <a:solidFill>
-                  <a:srgbClr val="1B1B33"/>
-                </a:solidFill>
-                <a:latin typeface="Segoe UI"/>
-              </a:rPr>
-              <a:t>Tradeoffs I'll defend:   </a:t>
-            </a:r>
-            <a:r>
-              <a:rPr sz="1700">
-                <a:solidFill>
-                  <a:srgbClr val="1B1B33"/>
-                </a:solidFill>
-                <a:latin typeface="Segoe UI"/>
-              </a:rPr>
-              <a:t>Buy vs build · incremental vs full-refresh · centralized vs federated (dbt Mesh) · key-pair/OIDC secrets.</a:t>
-            </a:r>
-          </a:p>
-          <a:p>
-            <a:pPr>
-              <a:lnSpc>
-                <a:spcPct val="107000"/>
-              </a:lnSpc>
-              <a:spcAft>
-                <a:spcPts val="800"/>
-              </a:spcAft>
-            </a:pPr>
-            <a:r>
-              <a:rPr sz="1700">
-                <a:solidFill>
-                  <a:srgbClr val="4A3FFF"/>
-                </a:solidFill>
-                <a:latin typeface="Segoe UI"/>
-              </a:rPr>
-              <a:t>▸  </a:t>
-            </a:r>
-            <a:r>
-              <a:rPr b="1" sz="1700">
-                <a:solidFill>
-                  <a:srgbClr val="1B1B33"/>
-                </a:solidFill>
-                <a:latin typeface="Segoe UI"/>
-              </a:rPr>
-              <a:t>Scales by construction:   </a:t>
-            </a:r>
-            <a:r>
-              <a:rPr sz="1700">
-                <a:solidFill>
-                  <a:srgbClr val="1B1B33"/>
-                </a:solidFill>
-                <a:latin typeface="Segoe UI"/>
-              </a:rPr>
-              <a:t>A 10th domain is the same CSV rows + module, roles, masking, and CI all generated.</a:t>
-            </a:r>
-          </a:p>
-        </p:txBody>
-      </p:sp>
-      <p:sp>
-        <p:nvSpPr>
-          <p:cNvPr id="7" name="Rounded Rectangle 6"/>
-          <p:cNvSpPr/>
-          <p:nvPr/>
-        </p:nvSpPr>
-        <p:spPr>
-          <a:xfrm>
-            <a:off x="502920" y="5806440"/>
-            <a:ext cx="11183112" cy="457200"/>
-          </a:xfrm>
-          <a:prstGeom prst="roundRect">
-            <a:avLst/>
-          </a:prstGeom>
-          <a:solidFill>
-            <a:srgbClr val="ECEBFB"/>
-          </a:solidFill>
-          <a:ln>
-            <a:noFill/>
-          </a:ln>
-          <a:effectLst/>
-        </p:spPr>
-        <p:style>
-          <a:lnRef idx="1">
-            <a:schemeClr val="accent1"/>
-          </a:lnRef>
-          <a:fillRef idx="3">
-            <a:schemeClr val="accent1"/>
-          </a:fillRef>
-          <a:effectRef idx="2">
-            <a:schemeClr val="accent1"/>
-          </a:effectRef>
-          <a:fontRef idx="minor">
-            <a:schemeClr val="lt1"/>
-          </a:fontRef>
-        </p:style>
-        <p:txBody>
-          <a:bodyPr rtlCol="0" anchor="ctr"/>
-          <a:lstStyle/>
-          <a:p>
-            <a:pPr algn="ctr"/>
-          </a:p>
-        </p:txBody>
-      </p:sp>
-      <p:sp>
-        <p:nvSpPr>
-          <p:cNvPr id="8" name="Rectangle 7"/>
-          <p:cNvSpPr/>
-          <p:nvPr/>
-        </p:nvSpPr>
-        <p:spPr>
-          <a:xfrm>
-            <a:off x="502920" y="5806440"/>
-            <a:ext cx="82296" cy="457200"/>
-          </a:xfrm>
-          <a:prstGeom prst="rect">
-            <a:avLst/>
-          </a:prstGeom>
-          <a:solidFill>
-            <a:srgbClr val="4A3FFF"/>
-          </a:solidFill>
-          <a:ln>
-            <a:noFill/>
-          </a:ln>
-          <a:effectLst/>
-        </p:spPr>
-        <p:style>
-          <a:lnRef idx="1">
-            <a:schemeClr val="accent1"/>
-          </a:lnRef>
-          <a:fillRef idx="3">
-            <a:schemeClr val="accent1"/>
-          </a:fillRef>
-          <a:effectRef idx="2">
-            <a:schemeClr val="accent1"/>
-          </a:effectRef>
-          <a:fontRef idx="minor">
-            <a:schemeClr val="lt1"/>
-          </a:fontRef>
-        </p:style>
-        <p:txBody>
-          <a:bodyPr rtlCol="0" anchor="ctr"/>
-          <a:lstStyle/>
-          <a:p>
-            <a:pPr algn="ctr"/>
-          </a:p>
-        </p:txBody>
-      </p:sp>
-      <p:sp>
-        <p:nvSpPr>
-          <p:cNvPr id="9" name="TextBox 8"/>
-          <p:cNvSpPr txBox="1"/>
-          <p:nvPr/>
-        </p:nvSpPr>
-        <p:spPr>
-          <a:xfrm>
-            <a:off x="731520" y="5806440"/>
-            <a:ext cx="10789920" cy="457200"/>
-          </a:xfrm>
-          <a:prstGeom prst="rect">
-            <a:avLst/>
-          </a:prstGeom>
-          <a:noFill/>
-        </p:spPr>
-        <p:txBody>
-          <a:bodyPr wrap="square" lIns="36576" rIns="36576" tIns="18288" bIns="18288" anchor="ctr">
-            <a:spAutoFit/>
-          </a:bodyPr>
-          <a:lstStyle/>
-          <a:p>
-            <a:r>
-              <a:rPr b="1" sz="1300">
-                <a:solidFill>
-                  <a:srgbClr val="3B34B8"/>
-                </a:solidFill>
-                <a:latin typeface="Segoe UI"/>
-              </a:rPr>
-              <a:t>Takeaway   </a:t>
-            </a:r>
-            <a:r>
-              <a:rPr sz="1300">
-                <a:solidFill>
-                  <a:srgbClr val="1B1B33"/>
-                </a:solidFill>
-                <a:latin typeface="Segoe UI"/>
-              </a:rPr>
-              <a:t>The measure of the platform: how fast a federated team ships something trustworthy on top of it, safely, and on their own.</a:t>
-            </a:r>
-          </a:p>
-        </p:txBody>
-      </p:sp>
-      <p:sp>
-        <p:nvSpPr>
-          <p:cNvPr id="10" name="TextBox 9"/>
-          <p:cNvSpPr txBox="1"/>
-          <p:nvPr/>
-        </p:nvSpPr>
-        <p:spPr>
-          <a:xfrm>
-            <a:off x="502920" y="6455664"/>
-            <a:ext cx="7315200" cy="320040"/>
-          </a:xfrm>
-          <a:prstGeom prst="rect">
-            <a:avLst/>
-          </a:prstGeom>
-          <a:noFill/>
-        </p:spPr>
-        <p:txBody>
-          <a:bodyPr wrap="square" lIns="36576" rIns="36576" tIns="18288" bIns="18288">
-            <a:spAutoFit/>
-          </a:bodyPr>
-          <a:lstStyle/>
-          <a:p>
-            <a:r>
-              <a:rPr sz="900">
-                <a:solidFill>
-                  <a:srgbClr val="5C5B77"/>
-                </a:solidFill>
-                <a:latin typeface="Segoe UI"/>
-              </a:rPr>
-              <a:t>OpenGov Data Platform  ·  Case Study  ·  Akash Pahilwan</a:t>
-            </a:r>
-          </a:p>
-        </p:txBody>
-      </p:sp>
-      <p:sp>
-        <p:nvSpPr>
-          <p:cNvPr id="11" name="TextBox 10"/>
-          <p:cNvSpPr txBox="1"/>
-          <p:nvPr/>
-        </p:nvSpPr>
-        <p:spPr>
-          <a:xfrm>
-            <a:off x="10911535" y="6455664"/>
-            <a:ext cx="822960" cy="320040"/>
-          </a:xfrm>
-          <a:prstGeom prst="rect">
-            <a:avLst/>
-          </a:prstGeom>
-          <a:noFill/>
-        </p:spPr>
-        <p:txBody>
-          <a:bodyPr wrap="square" lIns="36576" rIns="36576" tIns="18288" bIns="18288">
-            <a:spAutoFit/>
-          </a:bodyPr>
-          <a:lstStyle/>
-          <a:p>
-            <a:pPr algn="r"/>
-            <a:r>
-              <a:rPr sz="900">
-                <a:solidFill>
-                  <a:srgbClr val="5C5B77"/>
-                </a:solidFill>
-                <a:latin typeface="Segoe UI"/>
-              </a:rPr>
-              <a:t>20</a:t>
+                  <a:srgbClr val="A79FFF"/>
+                </a:solidFill>
+                <a:latin typeface="Segoe UI"/>
+              </a:rPr>
+              <a:t>Where the platform goes next. Each is an additive step on the foundation, not a rebuild.</a:t>
             </a:r>
           </a:p>
         </p:txBody>
@@ -14886,7 +14577,7 @@
     <p:bg>
       <p:bgPr>
         <a:solidFill>
-          <a:srgbClr val="191552"/>
+          <a:srgbClr val="FFFFFF"/>
         </a:solidFill>
         <a:effectLst/>
       </p:bgPr>
@@ -14907,7 +14598,51 @@
         <p:spPr>
           <a:xfrm>
             <a:off x="0" y="0"/>
-            <a:ext cx="256032" cy="6858000"/>
+            <a:ext cx="12191695" cy="1024128"/>
+          </a:xfrm>
+          <a:prstGeom prst="rect">
+            <a:avLst/>
+          </a:prstGeom>
+          <a:solidFill>
+            <a:srgbClr val="191552"/>
+          </a:solidFill>
+          <a:ln>
+            <a:noFill/>
+          </a:ln>
+          <a:effectLst/>
+        </p:spPr>
+        <p:style>
+          <a:lnRef idx="1">
+            <a:schemeClr val="accent1"/>
+          </a:lnRef>
+          <a:fillRef idx="3">
+            <a:schemeClr val="accent1"/>
+          </a:fillRef>
+          <a:effectRef idx="2">
+            <a:schemeClr val="accent1"/>
+          </a:effectRef>
+          <a:fontRef idx="minor">
+            <a:schemeClr val="lt1"/>
+          </a:fontRef>
+        </p:style>
+        <p:txBody>
+          <a:bodyPr rtlCol="0" anchor="ctr"/>
+          <a:lstStyle/>
+          <a:p>
+            <a:pPr algn="ctr"/>
+          </a:p>
+        </p:txBody>
+      </p:sp>
+      <p:sp>
+        <p:nvSpPr>
+          <p:cNvPr id="3" name="Rectangle 2"/>
+          <p:cNvSpPr/>
+          <p:nvPr/>
+        </p:nvSpPr>
+        <p:spPr>
+          <a:xfrm>
+            <a:off x="0" y="1024128"/>
+            <a:ext cx="12191695" cy="50292"/>
           </a:xfrm>
           <a:prstGeom prst="rect">
             <a:avLst/>
@@ -14942,9 +14677,59 @@
           </a:p>
         </p:txBody>
       </p:sp>
+      <p:sp>
+        <p:nvSpPr>
+          <p:cNvPr id="4" name="TextBox 3"/>
+          <p:cNvSpPr txBox="1"/>
+          <p:nvPr/>
+        </p:nvSpPr>
+        <p:spPr>
+          <a:xfrm>
+            <a:off x="502920" y="109728"/>
+            <a:ext cx="9875520" cy="841248"/>
+          </a:xfrm>
+          <a:prstGeom prst="rect">
+            <a:avLst/>
+          </a:prstGeom>
+          <a:noFill/>
+        </p:spPr>
+        <p:txBody>
+          <a:bodyPr wrap="square" lIns="36576" rIns="36576" tIns="18288" bIns="18288" anchor="ctr">
+            <a:spAutoFit/>
+          </a:bodyPr>
+          <a:lstStyle/>
+          <a:p>
+            <a:pPr>
+              <a:spcAft>
+                <a:spcPts val="100"/>
+              </a:spcAft>
+            </a:pPr>
+            <a:r>
+              <a:rPr sz="1100" b="1">
+                <a:solidFill>
+                  <a:srgbClr val="A79FFF"/>
+                </a:solidFill>
+                <a:latin typeface="Segoe UI"/>
+              </a:rPr>
+              <a:t>ROADMAP</a:t>
+            </a:r>
+          </a:p>
+          <a:p>
+            <a:r>
+              <a:rPr sz="2600" b="1">
+                <a:solidFill>
+                  <a:srgbClr val="FFFFFF"/>
+                </a:solidFill>
+                <a:latin typeface="Segoe UI"/>
+              </a:rPr>
+              <a:t>Future enhancements: ingestion, dbt &amp; governance</a:t>
+            </a:r>
+          </a:p>
+        </p:txBody>
+      </p:sp>
       <p:pic>
         <p:nvPicPr>
-          <p:cNvPr id="3" name="Picture 2" descr="image.png"/>
+          <p:cNvPr id="5" name="Picture 4" descr="image.png"/>
           <p:cNvPicPr>
             <a:picLocks noChangeAspect="1"/>
           </p:cNvPicPr>
@@ -14958,8 +14743,8 @@
         </p:blipFill>
         <p:spPr>
           <a:xfrm>
-            <a:off x="10561320" y="594360"/>
-            <a:ext cx="640080" cy="640080"/>
+            <a:off x="11259006" y="237744"/>
+            <a:ext cx="548640" cy="548640"/>
           </a:xfrm>
           <a:prstGeom prst="ellipse">
             <a:avLst/>
@@ -14968,14 +14753,14 @@
       </p:pic>
       <p:sp>
         <p:nvSpPr>
-          <p:cNvPr id="4" name="TextBox 3"/>
+          <p:cNvPr id="6" name="TextBox 5"/>
           <p:cNvSpPr txBox="1"/>
           <p:nvPr/>
         </p:nvSpPr>
         <p:spPr>
           <a:xfrm>
-            <a:off x="1005840" y="2468880"/>
-            <a:ext cx="10241280" cy="2194560"/>
+            <a:off x="640080" y="1325880"/>
+            <a:ext cx="10972800" cy="4434840"/>
           </a:xfrm>
           <a:prstGeom prst="rect">
             <a:avLst/>
@@ -14988,30 +14773,509 @@
           </a:bodyPr>
           <a:lstStyle/>
           <a:p>
-            <a:r>
-              <a:rPr sz="3800" b="1">
-                <a:solidFill>
-                  <a:srgbClr val="FFFFFF"/>
-                </a:solidFill>
-                <a:latin typeface="Segoe UI"/>
-              </a:rPr>
-              <a:t>Technical Appendix</a:t>
-            </a:r>
-          </a:p>
-          <a:p>
             <a:pPr>
-              <a:spcBef>
-                <a:spcPts val="1000"/>
-              </a:spcBef>
+              <a:lnSpc>
+                <a:spcPct val="107000"/>
+              </a:lnSpc>
+              <a:spcAft>
+                <a:spcPts val="800"/>
+              </a:spcAft>
             </a:pPr>
             <a:r>
-              <a:rPr sz="1700">
-                <a:solidFill>
-                  <a:srgbClr val="A79FFF"/>
-                </a:solidFill>
-                <a:latin typeface="Segoe UI"/>
-              </a:rPr>
-              <a:t>Deep dives for the panel's probes. Pull these up on demand.</a:t>
+              <a:rPr sz="1550">
+                <a:solidFill>
+                  <a:srgbClr val="4A3FFF"/>
+                </a:solidFill>
+                <a:latin typeface="Segoe UI"/>
+              </a:rPr>
+              <a:t>▸  </a:t>
+            </a:r>
+            <a:r>
+              <a:rPr b="1" sz="1550">
+                <a:solidFill>
+                  <a:srgbClr val="1B1B33"/>
+                </a:solidFill>
+                <a:latin typeface="Segoe UI"/>
+              </a:rPr>
+              <a:t>Ingestion:</a:t>
+            </a:r>
+          </a:p>
+          <a:p>
+            <a:pPr>
+              <a:lnSpc>
+                <a:spcPct val="107000"/>
+              </a:lnSpc>
+              <a:spcAft>
+                <a:spcPts val="300"/>
+              </a:spcAft>
+            </a:pPr>
+            <a:r>
+              <a:rPr sz="1250">
+                <a:solidFill>
+                  <a:srgbClr val="5C5B77"/>
+                </a:solidFill>
+                <a:latin typeface="Segoe UI"/>
+              </a:rPr>
+              <a:t>        ·  </a:t>
+            </a:r>
+            <a:r>
+              <a:rPr b="1" sz="1250">
+                <a:solidFill>
+                  <a:srgbClr val="1B1B33"/>
+                </a:solidFill>
+                <a:latin typeface="Segoe UI"/>
+              </a:rPr>
+              <a:t>Snowpipe auto-ingest   </a:t>
+            </a:r>
+            <a:r>
+              <a:rPr sz="1250">
+                <a:solidFill>
+                  <a:srgbClr val="3E3D5C"/>
+                </a:solidFill>
+                <a:latin typeface="Segoe UI"/>
+              </a:rPr>
+              <a:t>Event-driven per-file load; retires the scheduled COPY + watermark (Event Grid / Lambda on arrival).</a:t>
+            </a:r>
+          </a:p>
+          <a:p>
+            <a:pPr>
+              <a:lnSpc>
+                <a:spcPct val="107000"/>
+              </a:lnSpc>
+              <a:spcAft>
+                <a:spcPts val="300"/>
+              </a:spcAft>
+            </a:pPr>
+            <a:r>
+              <a:rPr sz="1250">
+                <a:solidFill>
+                  <a:srgbClr val="5C5B77"/>
+                </a:solidFill>
+                <a:latin typeface="Segoe UI"/>
+              </a:rPr>
+              <a:t>        ·  </a:t>
+            </a:r>
+            <a:r>
+              <a:rPr b="1" sz="1250">
+                <a:solidFill>
+                  <a:srgbClr val="1B1B33"/>
+                </a:solidFill>
+                <a:latin typeface="Segoe UI"/>
+              </a:rPr>
+              <a:t>Config-driven multi-event framework   </a:t>
+            </a:r>
+            <a:r>
+              <a:rPr sz="1250">
+                <a:solidFill>
+                  <a:srgbClr val="3E3D5C"/>
+                </a:solidFill>
+                <a:latin typeface="Segoe UI"/>
+              </a:rPr>
+              <a:t>Onboard a second event type with config, not copy-pasted code.</a:t>
+            </a:r>
+          </a:p>
+          <a:p>
+            <a:pPr>
+              <a:lnSpc>
+                <a:spcPct val="107000"/>
+              </a:lnSpc>
+              <a:spcAft>
+                <a:spcPts val="800"/>
+              </a:spcAft>
+            </a:pPr>
+            <a:r>
+              <a:rPr sz="1550">
+                <a:solidFill>
+                  <a:srgbClr val="4A3FFF"/>
+                </a:solidFill>
+                <a:latin typeface="Segoe UI"/>
+              </a:rPr>
+              <a:t>▸  </a:t>
+            </a:r>
+            <a:r>
+              <a:rPr b="1" sz="1550">
+                <a:solidFill>
+                  <a:srgbClr val="1B1B33"/>
+                </a:solidFill>
+                <a:latin typeface="Segoe UI"/>
+              </a:rPr>
+              <a:t>dbt / transforms:</a:t>
+            </a:r>
+          </a:p>
+          <a:p>
+            <a:pPr>
+              <a:lnSpc>
+                <a:spcPct val="107000"/>
+              </a:lnSpc>
+              <a:spcAft>
+                <a:spcPts val="300"/>
+              </a:spcAft>
+            </a:pPr>
+            <a:r>
+              <a:rPr sz="1250">
+                <a:solidFill>
+                  <a:srgbClr val="5C5B77"/>
+                </a:solidFill>
+                <a:latin typeface="Segoe UI"/>
+              </a:rPr>
+              <a:t>        ·  </a:t>
+            </a:r>
+            <a:r>
+              <a:rPr b="1" sz="1250">
+                <a:solidFill>
+                  <a:srgbClr val="1B1B33"/>
+                </a:solidFill>
+                <a:latin typeface="Segoe UI"/>
+              </a:rPr>
+              <a:t>Slim CI (state:modified)   </a:t>
+            </a:r>
+            <a:r>
+              <a:rPr sz="1250">
+                <a:solidFill>
+                  <a:srgbClr val="3E3D5C"/>
+                </a:solidFill>
+                <a:latin typeface="Segoe UI"/>
+              </a:rPr>
+              <a:t>Build only what changed; contracts on staging models; exposures for BI/AI lineage.</a:t>
+            </a:r>
+          </a:p>
+          <a:p>
+            <a:pPr>
+              <a:lnSpc>
+                <a:spcPct val="107000"/>
+              </a:lnSpc>
+              <a:spcAft>
+                <a:spcPts val="300"/>
+              </a:spcAft>
+            </a:pPr>
+            <a:r>
+              <a:rPr sz="1250">
+                <a:solidFill>
+                  <a:srgbClr val="5C5B77"/>
+                </a:solidFill>
+                <a:latin typeface="Segoe UI"/>
+              </a:rPr>
+              <a:t>        ·  </a:t>
+            </a:r>
+            <a:r>
+              <a:rPr b="1" sz="1250">
+                <a:solidFill>
+                  <a:srgbClr val="1B1B33"/>
+                </a:solidFill>
+                <a:latin typeface="Segoe UI"/>
+              </a:rPr>
+              <a:t>Domain spoke repos   </a:t>
+            </a:r>
+            <a:r>
+              <a:rPr sz="1250">
+                <a:solidFill>
+                  <a:srgbClr val="3E3D5C"/>
+                </a:solidFill>
+                <a:latin typeface="Segoe UI"/>
+              </a:rPr>
+              <a:t>Consume the hub's public mart cross-project (full dbt Mesh).</a:t>
+            </a:r>
+          </a:p>
+          <a:p>
+            <a:pPr>
+              <a:lnSpc>
+                <a:spcPct val="107000"/>
+              </a:lnSpc>
+              <a:spcAft>
+                <a:spcPts val="800"/>
+              </a:spcAft>
+            </a:pPr>
+            <a:r>
+              <a:rPr sz="1550">
+                <a:solidFill>
+                  <a:srgbClr val="4A3FFF"/>
+                </a:solidFill>
+                <a:latin typeface="Segoe UI"/>
+              </a:rPr>
+              <a:t>▸  </a:t>
+            </a:r>
+            <a:r>
+              <a:rPr b="1" sz="1550">
+                <a:solidFill>
+                  <a:srgbClr val="1B1B33"/>
+                </a:solidFill>
+                <a:latin typeface="Segoe UI"/>
+              </a:rPr>
+              <a:t>Governance &amp; security:</a:t>
+            </a:r>
+          </a:p>
+          <a:p>
+            <a:pPr>
+              <a:lnSpc>
+                <a:spcPct val="107000"/>
+              </a:lnSpc>
+              <a:spcAft>
+                <a:spcPts val="300"/>
+              </a:spcAft>
+            </a:pPr>
+            <a:r>
+              <a:rPr sz="1250">
+                <a:solidFill>
+                  <a:srgbClr val="5C5B77"/>
+                </a:solidFill>
+                <a:latin typeface="Segoe UI"/>
+              </a:rPr>
+              <a:t>        ·  </a:t>
+            </a:r>
+            <a:r>
+              <a:rPr b="1" sz="1250">
+                <a:solidFill>
+                  <a:srgbClr val="1B1B33"/>
+                </a:solidFill>
+                <a:latin typeface="Segoe UI"/>
+              </a:rPr>
+              <a:t>Row-access policies   </a:t>
+            </a:r>
+            <a:r>
+              <a:rPr sz="1250">
+                <a:solidFill>
+                  <a:srgbClr val="3E3D5C"/>
+                </a:solidFill>
+                <a:latin typeface="Segoe UI"/>
+              </a:rPr>
+              <a:t>Tenant / region isolation on shared tables.</a:t>
+            </a:r>
+          </a:p>
+          <a:p>
+            <a:pPr>
+              <a:lnSpc>
+                <a:spcPct val="107000"/>
+              </a:lnSpc>
+              <a:spcAft>
+                <a:spcPts val="300"/>
+              </a:spcAft>
+            </a:pPr>
+            <a:r>
+              <a:rPr sz="1250">
+                <a:solidFill>
+                  <a:srgbClr val="5C5B77"/>
+                </a:solidFill>
+                <a:latin typeface="Segoe UI"/>
+              </a:rPr>
+              <a:t>        ·  </a:t>
+            </a:r>
+            <a:r>
+              <a:rPr b="1" sz="1250">
+                <a:solidFill>
+                  <a:srgbClr val="1B1B33"/>
+                </a:solidFill>
+                <a:latin typeface="Segoe UI"/>
+              </a:rPr>
+              <a:t>OIDC federated CI auth   </a:t>
+            </a:r>
+            <a:r>
+              <a:rPr sz="1250">
+                <a:solidFill>
+                  <a:srgbClr val="3E3D5C"/>
+                </a:solidFill>
+                <a:latin typeface="Segoe UI"/>
+              </a:rPr>
+              <a:t>Retire long-lived key-pairs; env-specific DEV_* / PROD_* role split for per-env isolation.</a:t>
+            </a:r>
+          </a:p>
+        </p:txBody>
+      </p:sp>
+      <p:sp>
+        <p:nvSpPr>
+          <p:cNvPr id="7" name="Rounded Rectangle 6"/>
+          <p:cNvSpPr/>
+          <p:nvPr/>
+        </p:nvSpPr>
+        <p:spPr>
+          <a:xfrm>
+            <a:off x="502920" y="5806440"/>
+            <a:ext cx="11183112" cy="457200"/>
+          </a:xfrm>
+          <a:prstGeom prst="roundRect">
+            <a:avLst/>
+          </a:prstGeom>
+          <a:solidFill>
+            <a:srgbClr val="ECEBFB"/>
+          </a:solidFill>
+          <a:ln>
+            <a:noFill/>
+          </a:ln>
+          <a:effectLst/>
+        </p:spPr>
+        <p:style>
+          <a:lnRef idx="1">
+            <a:schemeClr val="accent1"/>
+          </a:lnRef>
+          <a:fillRef idx="3">
+            <a:schemeClr val="accent1"/>
+          </a:fillRef>
+          <a:effectRef idx="2">
+            <a:schemeClr val="accent1"/>
+          </a:effectRef>
+          <a:fontRef idx="minor">
+            <a:schemeClr val="lt1"/>
+          </a:fontRef>
+        </p:style>
+        <p:txBody>
+          <a:bodyPr rtlCol="0" anchor="ctr"/>
+          <a:lstStyle/>
+          <a:p>
+            <a:pPr algn="ctr"/>
+          </a:p>
+        </p:txBody>
+      </p:sp>
+      <p:sp>
+        <p:nvSpPr>
+          <p:cNvPr id="8" name="Rectangle 7"/>
+          <p:cNvSpPr/>
+          <p:nvPr/>
+        </p:nvSpPr>
+        <p:spPr>
+          <a:xfrm>
+            <a:off x="502920" y="5806440"/>
+            <a:ext cx="82296" cy="457200"/>
+          </a:xfrm>
+          <a:prstGeom prst="rect">
+            <a:avLst/>
+          </a:prstGeom>
+          <a:solidFill>
+            <a:srgbClr val="4A3FFF"/>
+          </a:solidFill>
+          <a:ln>
+            <a:noFill/>
+          </a:ln>
+          <a:effectLst/>
+        </p:spPr>
+        <p:style>
+          <a:lnRef idx="1">
+            <a:schemeClr val="accent1"/>
+          </a:lnRef>
+          <a:fillRef idx="3">
+            <a:schemeClr val="accent1"/>
+          </a:fillRef>
+          <a:effectRef idx="2">
+            <a:schemeClr val="accent1"/>
+          </a:effectRef>
+          <a:fontRef idx="minor">
+            <a:schemeClr val="lt1"/>
+          </a:fontRef>
+        </p:style>
+        <p:txBody>
+          <a:bodyPr rtlCol="0" anchor="ctr"/>
+          <a:lstStyle/>
+          <a:p>
+            <a:pPr algn="ctr"/>
+          </a:p>
+        </p:txBody>
+      </p:sp>
+      <p:sp>
+        <p:nvSpPr>
+          <p:cNvPr id="9" name="TextBox 8"/>
+          <p:cNvSpPr txBox="1"/>
+          <p:nvPr/>
+        </p:nvSpPr>
+        <p:spPr>
+          <a:xfrm>
+            <a:off x="731520" y="5806440"/>
+            <a:ext cx="10789920" cy="457200"/>
+          </a:xfrm>
+          <a:prstGeom prst="rect">
+            <a:avLst/>
+          </a:prstGeom>
+          <a:noFill/>
+        </p:spPr>
+        <p:txBody>
+          <a:bodyPr wrap="square" lIns="36576" rIns="36576" tIns="18288" bIns="18288" anchor="ctr">
+            <a:spAutoFit/>
+          </a:bodyPr>
+          <a:lstStyle/>
+          <a:p>
+            <a:r>
+              <a:rPr b="1" sz="1300">
+                <a:solidFill>
+                  <a:srgbClr val="3B34B8"/>
+                </a:solidFill>
+                <a:latin typeface="Segoe UI"/>
+              </a:rPr>
+              <a:t>Takeaway   </a:t>
+            </a:r>
+            <a:r>
+              <a:rPr sz="1300">
+                <a:solidFill>
+                  <a:srgbClr val="1B1B33"/>
+                </a:solidFill>
+                <a:latin typeface="Segoe UI"/>
+              </a:rPr>
+              <a:t>The foundation is built; each of these is an additive step on top of it, not a rebuild.</a:t>
+            </a:r>
+          </a:p>
+        </p:txBody>
+      </p:sp>
+      <p:sp>
+        <p:nvSpPr>
+          <p:cNvPr id="10" name="TextBox 9"/>
+          <p:cNvSpPr txBox="1"/>
+          <p:nvPr/>
+        </p:nvSpPr>
+        <p:spPr>
+          <a:xfrm>
+            <a:off x="502920" y="6455664"/>
+            <a:ext cx="7315200" cy="320040"/>
+          </a:xfrm>
+          <a:prstGeom prst="rect">
+            <a:avLst/>
+          </a:prstGeom>
+          <a:noFill/>
+        </p:spPr>
+        <p:txBody>
+          <a:bodyPr wrap="square" lIns="36576" rIns="36576" tIns="18288" bIns="18288">
+            <a:spAutoFit/>
+          </a:bodyPr>
+          <a:lstStyle/>
+          <a:p>
+            <a:r>
+              <a:rPr sz="900">
+                <a:solidFill>
+                  <a:srgbClr val="5C5B77"/>
+                </a:solidFill>
+                <a:latin typeface="Segoe UI"/>
+              </a:rPr>
+              <a:t>OpenGov Data Platform  ·  Case Study  ·  Akash Pahilwan</a:t>
+            </a:r>
+          </a:p>
+        </p:txBody>
+      </p:sp>
+      <p:sp>
+        <p:nvSpPr>
+          <p:cNvPr id="11" name="TextBox 10"/>
+          <p:cNvSpPr txBox="1"/>
+          <p:nvPr/>
+        </p:nvSpPr>
+        <p:spPr>
+          <a:xfrm>
+            <a:off x="10911535" y="6455664"/>
+            <a:ext cx="822960" cy="320040"/>
+          </a:xfrm>
+          <a:prstGeom prst="rect">
+            <a:avLst/>
+          </a:prstGeom>
+          <a:noFill/>
+        </p:spPr>
+        <p:txBody>
+          <a:bodyPr wrap="square" lIns="36576" rIns="36576" tIns="18288" bIns="18288">
+            <a:spAutoFit/>
+          </a:bodyPr>
+          <a:lstStyle/>
+          <a:p>
+            <a:pPr algn="r"/>
+            <a:r>
+              <a:rPr sz="900">
+                <a:solidFill>
+                  <a:srgbClr val="5C5B77"/>
+                </a:solidFill>
+                <a:latin typeface="Segoe UI"/>
+              </a:rPr>
+              <a:t>20</a:t>
             </a:r>
           </a:p>
         </p:txBody>
@@ -15164,7 +15428,7 @@
                 </a:solidFill>
                 <a:latin typeface="Segoe UI"/>
               </a:rPr>
-              <a:t>APPENDIX · GOVERNANCE</a:t>
+              <a:t>ROADMAP</a:t>
             </a:r>
           </a:p>
           <a:p>
@@ -15175,7 +15439,7 @@
                 </a:solidFill>
                 <a:latin typeface="Segoe UI"/>
               </a:rPr>
-              <a:t>Scaling RBAC to 10 domains, least privilege by construction</a:t>
+              <a:t>Future enhancements: observability, cost &amp; AI</a:t>
             </a:r>
           </a:p>
         </p:txBody>
@@ -15212,8 +15476,8 @@
         </p:nvSpPr>
         <p:spPr>
           <a:xfrm>
-            <a:off x="640080" y="1371600"/>
-            <a:ext cx="10972800" cy="4206240"/>
+            <a:off x="640080" y="1325880"/>
+            <a:ext cx="10972800" cy="4434840"/>
           </a:xfrm>
           <a:prstGeom prst="rect">
             <a:avLst/>
@@ -15235,7 +15499,7 @@
               </a:spcAft>
             </a:pPr>
             <a:r>
-              <a:rPr sz="1650">
+              <a:rPr sz="1550">
                 <a:solidFill>
                   <a:srgbClr val="4A3FFF"/>
                 </a:solidFill>
@@ -15244,22 +15508,87 @@
               <a:t>▸  </a:t>
             </a:r>
             <a:r>
-              <a:rPr b="1" sz="1650">
+              <a:rPr b="1" sz="1550">
                 <a:solidFill>
                   <a:srgbClr val="1B1B33"/>
                 </a:solidFill>
                 <a:latin typeface="Segoe UI"/>
               </a:rPr>
-              <a:t>Access roles are reusable primitives:   </a:t>
-            </a:r>
-            <a:r>
-              <a:rPr sz="1650">
+              <a:t>Observability &amp; SLAs:</a:t>
+            </a:r>
+          </a:p>
+          <a:p>
+            <a:pPr>
+              <a:lnSpc>
+                <a:spcPct val="107000"/>
+              </a:lnSpc>
+              <a:spcAft>
+                <a:spcPts val="300"/>
+              </a:spcAft>
+            </a:pPr>
+            <a:r>
+              <a:rPr sz="1250">
+                <a:solidFill>
+                  <a:srgbClr val="5C5B77"/>
+                </a:solidFill>
+                <a:latin typeface="Segoe UI"/>
+              </a:rPr>
+              <a:t>        ·  </a:t>
+            </a:r>
+            <a:r>
+              <a:rPr b="1" sz="1250">
                 <a:solidFill>
                   <a:srgbClr val="1B1B33"/>
                 </a:solidFill>
                 <a:latin typeface="Segoe UI"/>
               </a:rPr>
-              <a:t>AR_&lt;ENV&gt;_&lt;SCHEMA&gt;_R/W hold the grants; a new domain = a generated set, never bespoke grant spaghetti.</a:t>
+              <a:t>Published data SLAs   </a:t>
+            </a:r>
+            <a:r>
+              <a:rPr sz="1250">
+                <a:solidFill>
+                  <a:srgbClr val="3E3D5C"/>
+                </a:solidFill>
+                <a:latin typeface="Segoe UI"/>
+              </a:rPr>
+              <a:t>dbt source freshness + a monitoring model over _LOAD_LOG; freshness / quality targets we measure.</a:t>
+            </a:r>
+          </a:p>
+          <a:p>
+            <a:pPr>
+              <a:lnSpc>
+                <a:spcPct val="107000"/>
+              </a:lnSpc>
+              <a:spcAft>
+                <a:spcPts val="300"/>
+              </a:spcAft>
+            </a:pPr>
+            <a:r>
+              <a:rPr sz="1250">
+                <a:solidFill>
+                  <a:srgbClr val="5C5B77"/>
+                </a:solidFill>
+                <a:latin typeface="Segoe UI"/>
+              </a:rPr>
+              <a:t>        ·  </a:t>
+            </a:r>
+            <a:r>
+              <a:rPr b="1" sz="1250">
+                <a:solidFill>
+                  <a:srgbClr val="1B1B33"/>
+                </a:solidFill>
+                <a:latin typeface="Segoe UI"/>
+              </a:rPr>
+              <a:t>Alerting   </a:t>
+            </a:r>
+            <a:r>
+              <a:rPr sz="1250">
+                <a:solidFill>
+                  <a:srgbClr val="3E3D5C"/>
+                </a:solidFill>
+                <a:latin typeface="Segoe UI"/>
+              </a:rPr>
+              <a:t>Test &amp; freshness breaches routed to Slack / on-call.</a:t>
             </a:r>
           </a:p>
           <a:p>
@@ -15272,7 +15601,7 @@
               </a:spcAft>
             </a:pPr>
             <a:r>
-              <a:rPr sz="1650">
+              <a:rPr sz="1550">
                 <a:solidFill>
                   <a:srgbClr val="4A3FFF"/>
                 </a:solidFill>
@@ -15281,22 +15610,50 @@
               <a:t>▸  </a:t>
             </a:r>
             <a:r>
-              <a:rPr b="1" sz="1650">
+              <a:rPr b="1" sz="1550">
                 <a:solidFill>
                   <a:srgbClr val="1B1B33"/>
                 </a:solidFill>
                 <a:latin typeface="Segoe UI"/>
               </a:rPr>
-              <a:t>Domain-scoped analysts:   </a:t>
-            </a:r>
-            <a:r>
-              <a:rPr sz="1650">
+              <a:t>Cost / FinOps:</a:t>
+            </a:r>
+          </a:p>
+          <a:p>
+            <a:pPr>
+              <a:lnSpc>
+                <a:spcPct val="107000"/>
+              </a:lnSpc>
+              <a:spcAft>
+                <a:spcPts val="300"/>
+              </a:spcAft>
+            </a:pPr>
+            <a:r>
+              <a:rPr sz="1250">
+                <a:solidFill>
+                  <a:srgbClr val="5C5B77"/>
+                </a:solidFill>
+                <a:latin typeface="Segoe UI"/>
+              </a:rPr>
+              <a:t>        ·  </a:t>
+            </a:r>
+            <a:r>
+              <a:rPr b="1" sz="1250">
                 <a:solidFill>
                   <a:srgbClr val="1B1B33"/>
                 </a:solidFill>
                 <a:latin typeface="Segoe UI"/>
               </a:rPr>
-              <a:t>REVOPS_ANALYST reads MARTS_* (all marts); FINANCE_ANALYST reads MARTS_FINANCE ONLY, an exact-schema grant, not the wildcard.</a:t>
+              <a:t>Per-domain cost dashboards   </a:t>
+            </a:r>
+            <a:r>
+              <a:rPr sz="1250">
+                <a:solidFill>
+                  <a:srgbClr val="3E3D5C"/>
+                </a:solidFill>
+                <a:latin typeface="Segoe UI"/>
+              </a:rPr>
+              <a:t>Resource monitors + query budgets on the per-role warehouses.</a:t>
             </a:r>
           </a:p>
           <a:p>
@@ -15309,7 +15666,7 @@
               </a:spcAft>
             </a:pPr>
             <a:r>
-              <a:rPr sz="1650">
+              <a:rPr sz="1550">
                 <a:solidFill>
                   <a:srgbClr val="4A3FFF"/>
                 </a:solidFill>
@@ -15318,22 +15675,13 @@
               <a:t>▸  </a:t>
             </a:r>
             <a:r>
-              <a:rPr b="1" sz="1650">
+              <a:rPr b="1" sz="1550">
                 <a:solidFill>
                   <a:srgbClr val="1B1B33"/>
                 </a:solidFill>
                 <a:latin typeface="Segoe UI"/>
               </a:rPr>
-              <a:t>Proven live:   </a:t>
-            </a:r>
-            <a:r>
-              <a:rPr sz="1650">
-                <a:solidFill>
-                  <a:srgbClr val="1B1B33"/>
-                </a:solidFill>
-                <a:latin typeface="Segoe UI"/>
-              </a:rPr>
-              <a:t>FINANCE_ANALYST sees only MARTS_FINANCE and is DENIED MARTS_REVOPS; the RevOps analyst still sees both.</a:t>
+              <a:t>AI-readiness:</a:t>
             </a:r>
           </a:p>
           <a:p>
@@ -15342,35 +15690,35 @@
                 <a:spcPct val="107000"/>
               </a:lnSpc>
               <a:spcAft>
-                <a:spcPts val="800"/>
+                <a:spcPts val="300"/>
               </a:spcAft>
             </a:pPr>
             <a:r>
-              <a:rPr sz="1650">
-                <a:solidFill>
-                  <a:srgbClr val="4A3FFF"/>
-                </a:solidFill>
-                <a:latin typeface="Segoe UI"/>
-              </a:rPr>
-              <a:t>▸  </a:t>
-            </a:r>
-            <a:r>
-              <a:rPr b="1" sz="1650">
+              <a:rPr sz="1250">
+                <a:solidFill>
+                  <a:srgbClr val="5C5B77"/>
+                </a:solidFill>
+                <a:latin typeface="Segoe UI"/>
+              </a:rPr>
+              <a:t>        ·  </a:t>
+            </a:r>
+            <a:r>
+              <a:rPr b="1" sz="1250">
                 <a:solidFill>
                   <a:srgbClr val="1B1B33"/>
                 </a:solidFill>
                 <a:latin typeface="Segoe UI"/>
               </a:rPr>
-              <a:t>Service vs human:   </a:t>
-            </a:r>
-            <a:r>
-              <a:rPr sz="1650">
-                <a:solidFill>
-                  <a:srgbClr val="1B1B33"/>
-                </a:solidFill>
-                <a:latin typeface="Segoe UI"/>
-              </a:rPr>
-              <a:t>REVOPS_DEVELOPER (write, incl PROD) is service-only, sync_config.py rejects granting it to a human; humans get read + their own sandbox.</a:t>
+              <a:t>Governed semantic / metrics layer   </a:t>
+            </a:r>
+            <a:r>
+              <a:rPr sz="1250">
+                <a:solidFill>
+                  <a:srgbClr val="3E3D5C"/>
+                </a:solidFill>
+                <a:latin typeface="Segoe UI"/>
+              </a:rPr>
+              <a:t>One metric definition for BI, notebooks and LLMs; no more confidently-wrong AI.</a:t>
             </a:r>
           </a:p>
           <a:p>
@@ -15379,35 +15727,35 @@
                 <a:spcPct val="107000"/>
               </a:lnSpc>
               <a:spcAft>
-                <a:spcPts val="800"/>
+                <a:spcPts val="300"/>
               </a:spcAft>
             </a:pPr>
             <a:r>
-              <a:rPr sz="1650">
-                <a:solidFill>
-                  <a:srgbClr val="4A3FFF"/>
-                </a:solidFill>
-                <a:latin typeface="Segoe UI"/>
-              </a:rPr>
-              <a:t>▸  </a:t>
-            </a:r>
-            <a:r>
-              <a:rPr b="1" sz="1650">
+              <a:rPr sz="1250">
+                <a:solidFill>
+                  <a:srgbClr val="5C5B77"/>
+                </a:solidFill>
+                <a:latin typeface="Segoe UI"/>
+              </a:rPr>
+              <a:t>        ·  </a:t>
+            </a:r>
+            <a:r>
+              <a:rPr b="1" sz="1250">
                 <a:solidFill>
                   <a:srgbClr val="1B1B33"/>
                 </a:solidFill>
                 <a:latin typeface="Segoe UI"/>
               </a:rPr>
-              <a:t>Audit:   </a:t>
-            </a:r>
-            <a:r>
-              <a:rPr sz="1650">
-                <a:solidFill>
-                  <a:srgbClr val="1B1B33"/>
-                </a:solidFill>
-                <a:latin typeface="Segoe UI"/>
-              </a:rPr>
-              <a:t>ACCESS_HISTORY answers 'who read ACCOUNT.ARR and when'; POLICY_REFERENCES proves the mask was attached at read time.</a:t>
+              <a:t>AI reads products, not raw   </a:t>
+            </a:r>
+            <a:r>
+              <a:rPr sz="1250">
+                <a:solidFill>
+                  <a:srgbClr val="3E3D5C"/>
+                </a:solidFill>
+                <a:latin typeface="Segoe UI"/>
+              </a:rPr>
+              <a:t>RAG / agents on contracted marts; masking already applies to an LLM service account.</a:t>
             </a:r>
           </a:p>
         </p:txBody>
@@ -15538,7 +15886,7 @@
                 </a:solidFill>
                 <a:latin typeface="Segoe UI"/>
               </a:rPr>
-              <a:t>Least privilege scales because it's generated from config, each domain analyst is confined to that domain's marts by an exact grant.</a:t>
+              <a:t>Trustworthy AI and trustworthy analytics come from the same governed foundation; the semantic layer is the next interface.</a:t>
             </a:r>
           </a:p>
         </p:txBody>
@@ -15760,7 +16108,7 @@
                 </a:solidFill>
                 <a:latin typeface="Segoe UI"/>
               </a:rPr>
-              <a:t>APPENDIX · DBT</a:t>
+              <a:t>WRAP-UP</a:t>
             </a:r>
           </a:p>
           <a:p>
@@ -15771,7 +16119,7 @@
                 </a:solidFill>
                 <a:latin typeface="Segoe UI"/>
               </a:rPr>
-              <a:t>Incremental vs full-refresh, and fixing incrementals</a:t>
+              <a:t>Close: one governed foundation, analytics &amp; AI on top</a:t>
             </a:r>
           </a:p>
         </p:txBody>
@@ -15831,7 +16179,7 @@
               </a:spcAft>
             </a:pPr>
             <a:r>
-              <a:rPr sz="1650">
+              <a:rPr sz="1700">
                 <a:solidFill>
                   <a:srgbClr val="4A3FFF"/>
                 </a:solidFill>
@@ -15840,22 +16188,22 @@
               <a:t>▸  </a:t>
             </a:r>
             <a:r>
-              <a:rPr b="1" sz="1650">
+              <a:rPr b="1" sz="1700">
                 <a:solidFill>
                   <a:srgbClr val="1B1B33"/>
                 </a:solidFill>
                 <a:latin typeface="Segoe UI"/>
               </a:rPr>
-              <a:t>Incremental (merge):   </a:t>
-            </a:r>
-            <a:r>
-              <a:rPr sz="1650">
+              <a:t>Foundation → pipelines → self-service → trust:   </a:t>
+            </a:r>
+            <a:r>
+              <a:rPr sz="1700">
                 <a:solidFill>
                   <a:srgbClr val="1B1B33"/>
                 </a:solidFill>
                 <a:latin typeface="Segoe UI"/>
               </a:rPr>
-              <a:t>High-volume/append sources (telemetry, CDC tables), build only rows since the last watermark; cheap, fast.</a:t>
+              <a:t>One IaC-first, governed platform, and it's running, not just drawn.</a:t>
             </a:r>
           </a:p>
           <a:p>
@@ -15868,7 +16216,7 @@
               </a:spcAft>
             </a:pPr>
             <a:r>
-              <a:rPr sz="1650">
+              <a:rPr sz="1700">
                 <a:solidFill>
                   <a:srgbClr val="4A3FFF"/>
                 </a:solidFill>
@@ -15877,22 +16225,22 @@
               <a:t>▸  </a:t>
             </a:r>
             <a:r>
-              <a:rPr b="1" sz="1650">
+              <a:rPr b="1" sz="1700">
                 <a:solidFill>
                   <a:srgbClr val="1B1B33"/>
                 </a:solidFill>
                 <a:latin typeface="Segoe UI"/>
               </a:rPr>
-              <a:t>Full-refresh:   </a:t>
-            </a:r>
-            <a:r>
-              <a:rPr sz="1650">
+              <a:t>Buy the commodity, build the differentiator:   </a:t>
+            </a:r>
+            <a:r>
+              <a:rPr sz="1700">
                 <a:solidFill>
                   <a:srgbClr val="1B1B33"/>
                 </a:solidFill>
                 <a:latin typeface="Segoe UI"/>
               </a:rPr>
-              <a:t>Small dimensions, or after a logic change, rebuild from scratch.</a:t>
+              <a:t>Fivetran for SaaS; custom Python for telemetry; native dbt for transforms.</a:t>
             </a:r>
           </a:p>
           <a:p>
@@ -15905,7 +16253,7 @@
               </a:spcAft>
             </a:pPr>
             <a:r>
-              <a:rPr sz="1650">
+              <a:rPr sz="1700">
                 <a:solidFill>
                   <a:srgbClr val="4A3FFF"/>
                 </a:solidFill>
@@ -15914,22 +16262,22 @@
               <a:t>▸  </a:t>
             </a:r>
             <a:r>
-              <a:rPr b="1" sz="1650">
+              <a:rPr b="1" sz="1700">
                 <a:solidFill>
                   <a:srgbClr val="1B1B33"/>
                 </a:solidFill>
                 <a:latin typeface="Segoe UI"/>
               </a:rPr>
-              <a:t>The trap:   </a:t>
-            </a:r>
-            <a:r>
-              <a:rPr sz="1650">
+              <a:t>Guardrails as paved paths:   </a:t>
+            </a:r>
+            <a:r>
+              <a:rPr sz="1700">
                 <a:solidFill>
                   <a:srgbClr val="1B1B33"/>
                 </a:solidFill>
                 <a:latin typeface="Segoe UI"/>
               </a:rPr>
-              <a:t>A normal build only merges NEW rows, so a logic fix to an incremental model never re-cleans already-materialized rows.</a:t>
+              <a:t>Config-driven RBAC + tag masking, per-developer sandboxes, CI/CD to DEV &amp; PROD.</a:t>
             </a:r>
           </a:p>
           <a:p>
@@ -15942,7 +16290,7 @@
               </a:spcAft>
             </a:pPr>
             <a:r>
-              <a:rPr sz="1650">
+              <a:rPr sz="1700">
                 <a:solidFill>
                   <a:srgbClr val="4A3FFF"/>
                 </a:solidFill>
@@ -15951,59 +16299,22 @@
               <a:t>▸  </a:t>
             </a:r>
             <a:r>
-              <a:rPr b="1" sz="1650">
+              <a:rPr b="1" sz="1700">
                 <a:solidFill>
                   <a:srgbClr val="1B1B33"/>
                 </a:solidFill>
                 <a:latin typeface="Segoe UI"/>
               </a:rPr>
-              <a:t>The fix, as a button:   </a:t>
-            </a:r>
-            <a:r>
-              <a:rPr sz="1650">
+              <a:t>Scales by construction:   </a:t>
+            </a:r>
+            <a:r>
+              <a:rPr sz="1700">
                 <a:solidFill>
                   <a:srgbClr val="1B1B33"/>
                 </a:solidFill>
                 <a:latin typeface="Segoe UI"/>
               </a:rPr>
-              <a:t>A manual full-refresh workflow, branch (dev→preprod / main→prod) × scope (all | only models changed in the last commit).</a:t>
-            </a:r>
-          </a:p>
-          <a:p>
-            <a:pPr>
-              <a:lnSpc>
-                <a:spcPct val="107000"/>
-              </a:lnSpc>
-              <a:spcAft>
-                <a:spcPts val="800"/>
-              </a:spcAft>
-            </a:pPr>
-            <a:r>
-              <a:rPr sz="1650">
-                <a:solidFill>
-                  <a:srgbClr val="4A3FFF"/>
-                </a:solidFill>
-                <a:latin typeface="Segoe UI"/>
-              </a:rPr>
-              <a:t>▸  </a:t>
-            </a:r>
-            <a:r>
-              <a:rPr b="1" sz="1650">
-                <a:solidFill>
-                  <a:srgbClr val="1B1B33"/>
-                </a:solidFill>
-                <a:latin typeface="Segoe UI"/>
-              </a:rPr>
-              <a:t>Real example:   </a:t>
-            </a:r>
-            <a:r>
-              <a:rPr sz="1650">
-                <a:solidFill>
-                  <a:srgbClr val="1B1B33"/>
-                </a:solidFill>
-                <a:latin typeface="Segoe UI"/>
-              </a:rPr>
-              <a:t>The page_views user_id VARIANT-null fix needed a full-refresh to purge 2 historical bad rows from PROD.</a:t>
+              <a:t>A 10th domain is the same CSV rows + module, roles, masking, and CI all generated.</a:t>
             </a:r>
           </a:p>
         </p:txBody>
@@ -16134,7 +16445,7 @@
                 </a:solidFill>
                 <a:latin typeface="Segoe UI"/>
               </a:rPr>
-              <a:t>Pick incremental for volume, full-refresh for correctness, and make the full-refresh a one-click, scoped workflow.</a:t>
+              <a:t>The measure of the platform: how fast a federated team ships something trustworthy on top of it, safely, and on their own.</a:t>
             </a:r>
           </a:p>
         </p:txBody>
@@ -16222,7 +16533,7 @@
     <p:bg>
       <p:bgPr>
         <a:solidFill>
-          <a:srgbClr val="FFFFFF"/>
+          <a:srgbClr val="191552"/>
         </a:solidFill>
         <a:effectLst/>
       </p:bgPr>
@@ -16243,51 +16554,7 @@
         <p:spPr>
           <a:xfrm>
             <a:off x="0" y="0"/>
-            <a:ext cx="12191695" cy="1024128"/>
-          </a:xfrm>
-          <a:prstGeom prst="rect">
-            <a:avLst/>
-          </a:prstGeom>
-          <a:solidFill>
-            <a:srgbClr val="191552"/>
-          </a:solidFill>
-          <a:ln>
-            <a:noFill/>
-          </a:ln>
-          <a:effectLst/>
-        </p:spPr>
-        <p:style>
-          <a:lnRef idx="1">
-            <a:schemeClr val="accent1"/>
-          </a:lnRef>
-          <a:fillRef idx="3">
-            <a:schemeClr val="accent1"/>
-          </a:fillRef>
-          <a:effectRef idx="2">
-            <a:schemeClr val="accent1"/>
-          </a:effectRef>
-          <a:fontRef idx="minor">
-            <a:schemeClr val="lt1"/>
-          </a:fontRef>
-        </p:style>
-        <p:txBody>
-          <a:bodyPr rtlCol="0" anchor="ctr"/>
-          <a:lstStyle/>
-          <a:p>
-            <a:pPr algn="ctr"/>
-          </a:p>
-        </p:txBody>
-      </p:sp>
-      <p:sp>
-        <p:nvSpPr>
-          <p:cNvPr id="3" name="Rectangle 2"/>
-          <p:cNvSpPr/>
-          <p:nvPr/>
-        </p:nvSpPr>
-        <p:spPr>
-          <a:xfrm>
-            <a:off x="0" y="1024128"/>
-            <a:ext cx="12191695" cy="50292"/>
+            <a:ext cx="256032" cy="6858000"/>
           </a:xfrm>
           <a:prstGeom prst="rect">
             <a:avLst/>
@@ -16322,59 +16589,9 @@
           </a:p>
         </p:txBody>
       </p:sp>
-      <p:sp>
-        <p:nvSpPr>
-          <p:cNvPr id="4" name="TextBox 3"/>
-          <p:cNvSpPr txBox="1"/>
-          <p:nvPr/>
-        </p:nvSpPr>
-        <p:spPr>
-          <a:xfrm>
-            <a:off x="502920" y="109728"/>
-            <a:ext cx="9875520" cy="841248"/>
-          </a:xfrm>
-          <a:prstGeom prst="rect">
-            <a:avLst/>
-          </a:prstGeom>
-          <a:noFill/>
-        </p:spPr>
-        <p:txBody>
-          <a:bodyPr wrap="square" lIns="36576" rIns="36576" tIns="18288" bIns="18288" anchor="ctr">
-            <a:spAutoFit/>
-          </a:bodyPr>
-          <a:lstStyle/>
-          <a:p>
-            <a:pPr>
-              <a:spcAft>
-                <a:spcPts val="100"/>
-              </a:spcAft>
-            </a:pPr>
-            <a:r>
-              <a:rPr sz="1100" b="1">
-                <a:solidFill>
-                  <a:srgbClr val="A79FFF"/>
-                </a:solidFill>
-                <a:latin typeface="Segoe UI"/>
-              </a:rPr>
-              <a:t>APPENDIX · DELIVERY</a:t>
-            </a:r>
-          </a:p>
-          <a:p>
-            <a:r>
-              <a:rPr sz="2600" b="1">
-                <a:solidFill>
-                  <a:srgbClr val="FFFFFF"/>
-                </a:solidFill>
-                <a:latin typeface="Segoe UI"/>
-              </a:rPr>
-              <a:t>CI/CD security, idempotency &amp; standards</a:t>
-            </a:r>
-          </a:p>
-        </p:txBody>
-      </p:sp>
       <p:pic>
         <p:nvPicPr>
-          <p:cNvPr id="5" name="Picture 4" descr="image.png"/>
+          <p:cNvPr id="3" name="Picture 2" descr="image.png"/>
           <p:cNvPicPr>
             <a:picLocks noChangeAspect="1"/>
           </p:cNvPicPr>
@@ -16388,8 +16605,8 @@
         </p:blipFill>
         <p:spPr>
           <a:xfrm>
-            <a:off x="11259006" y="237744"/>
-            <a:ext cx="548640" cy="548640"/>
+            <a:off x="10561320" y="594360"/>
+            <a:ext cx="640080" cy="640080"/>
           </a:xfrm>
           <a:prstGeom prst="ellipse">
             <a:avLst/>
@@ -16398,14 +16615,14 @@
       </p:pic>
       <p:sp>
         <p:nvSpPr>
-          <p:cNvPr id="6" name="TextBox 5"/>
+          <p:cNvPr id="4" name="TextBox 3"/>
           <p:cNvSpPr txBox="1"/>
           <p:nvPr/>
         </p:nvSpPr>
         <p:spPr>
           <a:xfrm>
-            <a:off x="640080" y="1371600"/>
-            <a:ext cx="10972800" cy="4206240"/>
+            <a:off x="1005840" y="2468880"/>
+            <a:ext cx="10241280" cy="2194560"/>
           </a:xfrm>
           <a:prstGeom prst="rect">
             <a:avLst/>
@@ -16418,388 +16635,30 @@
           </a:bodyPr>
           <a:lstStyle/>
           <a:p>
+            <a:r>
+              <a:rPr sz="3800" b="1">
+                <a:solidFill>
+                  <a:srgbClr val="FFFFFF"/>
+                </a:solidFill>
+                <a:latin typeface="Segoe UI"/>
+              </a:rPr>
+              <a:t>Technical Appendix</a:t>
+            </a:r>
+          </a:p>
+          <a:p>
             <a:pPr>
-              <a:lnSpc>
-                <a:spcPct val="107000"/>
-              </a:lnSpc>
-              <a:spcAft>
-                <a:spcPts val="800"/>
-              </a:spcAft>
+              <a:spcBef>
+                <a:spcPts val="1000"/>
+              </a:spcBef>
             </a:pPr>
             <a:r>
-              <a:rPr sz="1650">
-                <a:solidFill>
-                  <a:srgbClr val="4A3FFF"/>
-                </a:solidFill>
-                <a:latin typeface="Segoe UI"/>
-              </a:rPr>
-              <a:t>▸  </a:t>
-            </a:r>
-            <a:r>
-              <a:rPr b="1" sz="1650">
-                <a:solidFill>
-                  <a:srgbClr val="1B1B33"/>
-                </a:solidFill>
-                <a:latin typeface="Segoe UI"/>
-              </a:rPr>
-              <a:t>No static secrets:   </a:t>
-            </a:r>
-            <a:r>
-              <a:rPr sz="1650">
-                <a:solidFill>
-                  <a:srgbClr val="1B1B33"/>
-                </a:solidFill>
-                <a:latin typeface="Segoe UI"/>
-              </a:rPr>
-              <a:t>Key-pair (JWT) for Snowflake, storage key for the TF backend, all GitHub secrets; the private key touches only a temp file in the job.</a:t>
-            </a:r>
-          </a:p>
-          <a:p>
-            <a:pPr>
-              <a:lnSpc>
-                <a:spcPct val="107000"/>
-              </a:lnSpc>
-              <a:spcAft>
-                <a:spcPts val="800"/>
-              </a:spcAft>
-            </a:pPr>
-            <a:r>
-              <a:rPr sz="1650">
-                <a:solidFill>
-                  <a:srgbClr val="4A3FFF"/>
-                </a:solidFill>
-                <a:latin typeface="Segoe UI"/>
-              </a:rPr>
-              <a:t>▸  </a:t>
-            </a:r>
-            <a:r>
-              <a:rPr b="1" sz="1650">
-                <a:solidFill>
-                  <a:srgbClr val="1B1B33"/>
-                </a:solidFill>
-                <a:latin typeface="Segoe UI"/>
-              </a:rPr>
-              <a:t>Malicious-PR safe:   </a:t>
-            </a:r>
-            <a:r>
-              <a:rPr sz="1650">
-                <a:solidFill>
-                  <a:srgbClr val="1B1B33"/>
-                </a:solidFill>
-                <a:latin typeface="Segoe UI"/>
-              </a:rPr>
-              <a:t>Secrets are exposed only to post-merge apply jobs; PR-triggered plan never sees them; PROD gated by a protected Environment + approval.</a:t>
-            </a:r>
-          </a:p>
-          <a:p>
-            <a:pPr>
-              <a:lnSpc>
-                <a:spcPct val="107000"/>
-              </a:lnSpc>
-              <a:spcAft>
-                <a:spcPts val="800"/>
-              </a:spcAft>
-            </a:pPr>
-            <a:r>
-              <a:rPr sz="1650">
-                <a:solidFill>
-                  <a:srgbClr val="4A3FFF"/>
-                </a:solidFill>
-                <a:latin typeface="Segoe UI"/>
-              </a:rPr>
-              <a:t>▸  </a:t>
-            </a:r>
-            <a:r>
-              <a:rPr b="1" sz="1650">
-                <a:solidFill>
-                  <a:srgbClr val="1B1B33"/>
-                </a:solidFill>
-                <a:latin typeface="Segoe UI"/>
-              </a:rPr>
-              <a:t>Remote state:   </a:t>
-            </a:r>
-            <a:r>
-              <a:rPr sz="1650">
-                <a:solidFill>
-                  <a:srgbClr val="1B1B33"/>
-                </a:solidFill>
-                <a:latin typeface="Segoe UI"/>
-              </a:rPr>
-              <a:t>Terraform state in an azurerm backend (ADLS), so CI and local share one source of truth, no drift, no local state to lose.</a:t>
-            </a:r>
-          </a:p>
-          <a:p>
-            <a:pPr>
-              <a:lnSpc>
-                <a:spcPct val="107000"/>
-              </a:lnSpc>
-              <a:spcAft>
-                <a:spcPts val="800"/>
-              </a:spcAft>
-            </a:pPr>
-            <a:r>
-              <a:rPr sz="1650">
-                <a:solidFill>
-                  <a:srgbClr val="4A3FFF"/>
-                </a:solidFill>
-                <a:latin typeface="Segoe UI"/>
-              </a:rPr>
-              <a:t>▸  </a:t>
-            </a:r>
-            <a:r>
-              <a:rPr b="1" sz="1650">
-                <a:solidFill>
-                  <a:srgbClr val="1B1B33"/>
-                </a:solidFill>
-                <a:latin typeface="Segoe UI"/>
-              </a:rPr>
-              <a:t>Idempotent &amp; half-failure safe:   </a:t>
-            </a:r>
-            <a:r>
-              <a:rPr sz="1650">
-                <a:solidFill>
-                  <a:srgbClr val="1B1B33"/>
-                </a:solidFill>
-                <a:latin typeface="Segoe UI"/>
-              </a:rPr>
-              <a:t>config→JSON→for_each reruns cleanly; a drift check fails the PR if CSVs and generated JSON disagree; apply_pii_tags skips absent objects.</a:t>
-            </a:r>
-          </a:p>
-          <a:p>
-            <a:pPr>
-              <a:lnSpc>
-                <a:spcPct val="107000"/>
-              </a:lnSpc>
-              <a:spcAft>
-                <a:spcPts val="800"/>
-              </a:spcAft>
-            </a:pPr>
-            <a:r>
-              <a:rPr sz="1650">
-                <a:solidFill>
-                  <a:srgbClr val="4A3FFF"/>
-                </a:solidFill>
-                <a:latin typeface="Segoe UI"/>
-              </a:rPr>
-              <a:t>▸  </a:t>
-            </a:r>
-            <a:r>
-              <a:rPr b="1" sz="1650">
-                <a:solidFill>
-                  <a:srgbClr val="1B1B33"/>
-                </a:solidFill>
-                <a:latin typeface="Segoe UI"/>
-              </a:rPr>
-              <a:t>Standards enforced:   </a:t>
-            </a:r>
-            <a:r>
-              <a:rPr sz="1650">
-                <a:solidFill>
-                  <a:srgbClr val="1B1B33"/>
-                </a:solidFill>
-                <a:latin typeface="Segoe UI"/>
-              </a:rPr>
-              <a:t>sync_config.py validates every reference (unknown role/schema/env) and rejects a service-only role reaching a human, the linter is the reviewer.</a:t>
-            </a:r>
-          </a:p>
-        </p:txBody>
-      </p:sp>
-      <p:sp>
-        <p:nvSpPr>
-          <p:cNvPr id="7" name="Rounded Rectangle 6"/>
-          <p:cNvSpPr/>
-          <p:nvPr/>
-        </p:nvSpPr>
-        <p:spPr>
-          <a:xfrm>
-            <a:off x="502920" y="5806440"/>
-            <a:ext cx="11183112" cy="457200"/>
-          </a:xfrm>
-          <a:prstGeom prst="roundRect">
-            <a:avLst/>
-          </a:prstGeom>
-          <a:solidFill>
-            <a:srgbClr val="ECEBFB"/>
-          </a:solidFill>
-          <a:ln>
-            <a:noFill/>
-          </a:ln>
-          <a:effectLst/>
-        </p:spPr>
-        <p:style>
-          <a:lnRef idx="1">
-            <a:schemeClr val="accent1"/>
-          </a:lnRef>
-          <a:fillRef idx="3">
-            <a:schemeClr val="accent1"/>
-          </a:fillRef>
-          <a:effectRef idx="2">
-            <a:schemeClr val="accent1"/>
-          </a:effectRef>
-          <a:fontRef idx="minor">
-            <a:schemeClr val="lt1"/>
-          </a:fontRef>
-        </p:style>
-        <p:txBody>
-          <a:bodyPr rtlCol="0" anchor="ctr"/>
-          <a:lstStyle/>
-          <a:p>
-            <a:pPr algn="ctr"/>
-          </a:p>
-        </p:txBody>
-      </p:sp>
-      <p:sp>
-        <p:nvSpPr>
-          <p:cNvPr id="8" name="Rectangle 7"/>
-          <p:cNvSpPr/>
-          <p:nvPr/>
-        </p:nvSpPr>
-        <p:spPr>
-          <a:xfrm>
-            <a:off x="502920" y="5806440"/>
-            <a:ext cx="82296" cy="457200"/>
-          </a:xfrm>
-          <a:prstGeom prst="rect">
-            <a:avLst/>
-          </a:prstGeom>
-          <a:solidFill>
-            <a:srgbClr val="4A3FFF"/>
-          </a:solidFill>
-          <a:ln>
-            <a:noFill/>
-          </a:ln>
-          <a:effectLst/>
-        </p:spPr>
-        <p:style>
-          <a:lnRef idx="1">
-            <a:schemeClr val="accent1"/>
-          </a:lnRef>
-          <a:fillRef idx="3">
-            <a:schemeClr val="accent1"/>
-          </a:fillRef>
-          <a:effectRef idx="2">
-            <a:schemeClr val="accent1"/>
-          </a:effectRef>
-          <a:fontRef idx="minor">
-            <a:schemeClr val="lt1"/>
-          </a:fontRef>
-        </p:style>
-        <p:txBody>
-          <a:bodyPr rtlCol="0" anchor="ctr"/>
-          <a:lstStyle/>
-          <a:p>
-            <a:pPr algn="ctr"/>
-          </a:p>
-        </p:txBody>
-      </p:sp>
-      <p:sp>
-        <p:nvSpPr>
-          <p:cNvPr id="9" name="TextBox 8"/>
-          <p:cNvSpPr txBox="1"/>
-          <p:nvPr/>
-        </p:nvSpPr>
-        <p:spPr>
-          <a:xfrm>
-            <a:off x="731520" y="5806440"/>
-            <a:ext cx="10789920" cy="457200"/>
-          </a:xfrm>
-          <a:prstGeom prst="rect">
-            <a:avLst/>
-          </a:prstGeom>
-          <a:noFill/>
-        </p:spPr>
-        <p:txBody>
-          <a:bodyPr wrap="square" lIns="36576" rIns="36576" tIns="18288" bIns="18288" anchor="ctr">
-            <a:spAutoFit/>
-          </a:bodyPr>
-          <a:lstStyle/>
-          <a:p>
-            <a:r>
-              <a:rPr b="1" sz="1300">
-                <a:solidFill>
-                  <a:srgbClr val="3B34B8"/>
-                </a:solidFill>
-                <a:latin typeface="Segoe UI"/>
-              </a:rPr>
-              <a:t>Takeaway   </a:t>
-            </a:r>
-            <a:r>
-              <a:rPr sz="1300">
-                <a:solidFill>
-                  <a:srgbClr val="1B1B33"/>
-                </a:solidFill>
-                <a:latin typeface="Segoe UI"/>
-              </a:rPr>
-              <a:t>The pipeline is the control plane: reviewed, idempotent, secret-safe, and standards-enforcing, provisioning you can trust.</a:t>
-            </a:r>
-          </a:p>
-        </p:txBody>
-      </p:sp>
-      <p:sp>
-        <p:nvSpPr>
-          <p:cNvPr id="10" name="TextBox 9"/>
-          <p:cNvSpPr txBox="1"/>
-          <p:nvPr/>
-        </p:nvSpPr>
-        <p:spPr>
-          <a:xfrm>
-            <a:off x="502920" y="6455664"/>
-            <a:ext cx="7315200" cy="320040"/>
-          </a:xfrm>
-          <a:prstGeom prst="rect">
-            <a:avLst/>
-          </a:prstGeom>
-          <a:noFill/>
-        </p:spPr>
-        <p:txBody>
-          <a:bodyPr wrap="square" lIns="36576" rIns="36576" tIns="18288" bIns="18288">
-            <a:spAutoFit/>
-          </a:bodyPr>
-          <a:lstStyle/>
-          <a:p>
-            <a:r>
-              <a:rPr sz="900">
-                <a:solidFill>
-                  <a:srgbClr val="5C5B77"/>
-                </a:solidFill>
-                <a:latin typeface="Segoe UI"/>
-              </a:rPr>
-              <a:t>OpenGov Data Platform  ·  Case Study  ·  Akash Pahilwan</a:t>
-            </a:r>
-          </a:p>
-        </p:txBody>
-      </p:sp>
-      <p:sp>
-        <p:nvSpPr>
-          <p:cNvPr id="11" name="TextBox 10"/>
-          <p:cNvSpPr txBox="1"/>
-          <p:nvPr/>
-        </p:nvSpPr>
-        <p:spPr>
-          <a:xfrm>
-            <a:off x="10911535" y="6455664"/>
-            <a:ext cx="822960" cy="320040"/>
-          </a:xfrm>
-          <a:prstGeom prst="rect">
-            <a:avLst/>
-          </a:prstGeom>
-          <a:noFill/>
-        </p:spPr>
-        <p:txBody>
-          <a:bodyPr wrap="square" lIns="36576" rIns="36576" tIns="18288" bIns="18288">
-            <a:spAutoFit/>
-          </a:bodyPr>
-          <a:lstStyle/>
-          <a:p>
-            <a:pPr algn="r"/>
-            <a:r>
-              <a:rPr sz="900">
-                <a:solidFill>
-                  <a:srgbClr val="5C5B77"/>
-                </a:solidFill>
-                <a:latin typeface="Segoe UI"/>
-              </a:rPr>
-              <a:t>23</a:t>
+              <a:rPr sz="1700">
+                <a:solidFill>
+                  <a:srgbClr val="A79FFF"/>
+                </a:solidFill>
+                <a:latin typeface="Segoe UI"/>
+              </a:rPr>
+              <a:t>Deep dives for the panel's probes. Pull these up on demand.</a:t>
             </a:r>
           </a:p>
         </p:txBody>
@@ -16952,7 +16811,7 @@
                 </a:solidFill>
                 <a:latin typeface="Segoe UI"/>
               </a:rPr>
-              <a:t>APPENDIX · INTERNALS</a:t>
+              <a:t>APPENDIX · GOVERNANCE</a:t>
             </a:r>
           </a:p>
           <a:p>
@@ -16963,7 +16822,7 @@
                 </a:solidFill>
                 <a:latin typeface="Segoe UI"/>
               </a:rPr>
-              <a:t>Why VARIANT stays fast at scale</a:t>
+              <a:t>Scaling RBAC to 10 domains, least privilege by construction</a:t>
             </a:r>
           </a:p>
         </p:txBody>
@@ -17000,8 +16859,8 @@
         </p:nvSpPr>
         <p:spPr>
           <a:xfrm>
-            <a:off x="594360" y="1371600"/>
-            <a:ext cx="6446520" cy="4297680"/>
+            <a:off x="640080" y="1371600"/>
+            <a:ext cx="10972800" cy="4206240"/>
           </a:xfrm>
           <a:prstGeom prst="rect">
             <a:avLst/>
@@ -17038,7 +16897,7 @@
                 </a:solidFill>
                 <a:latin typeface="Segoe UI"/>
               </a:rPr>
-              <a:t>Not a text blob:   </a:t>
+              <a:t>Access roles are reusable primitives:   </a:t>
             </a:r>
             <a:r>
               <a:rPr sz="1650">
@@ -17047,7 +16906,7 @@
                 </a:solidFill>
                 <a:latin typeface="Segoe UI"/>
               </a:rPr>
-              <a:t>Each micro-partition shreds consistent JSON paths into typed, compressed sub-columns with min/max stats, native-column treatment.</a:t>
+              <a:t>AR_&lt;ENV&gt;_&lt;SCHEMA&gt;_R/W hold the grants; a new domain = a generated set, never bespoke grant spaghetti.</a:t>
             </a:r>
           </a:p>
           <a:p>
@@ -17075,7 +16934,7 @@
                 </a:solidFill>
                 <a:latin typeface="Segoe UI"/>
               </a:rPr>
-              <a:t>Projection works:   </a:t>
+              <a:t>Domain-scoped analysts:   </a:t>
             </a:r>
             <a:r>
               <a:rPr sz="1650">
@@ -17084,7 +16943,7 @@
                 </a:solidFill>
                 <a:latin typeface="Segoe UI"/>
               </a:rPr>
-              <a:t>Selecting payload:properties.duration_ms reads only that sub-column off disk, never the whole document.</a:t>
+              <a:t>REVOPS_ANALYST reads MARTS_* (all marts); FINANCE_ANALYST reads MARTS_FINANCE ONLY, an exact-schema grant, not the wildcard.</a:t>
             </a:r>
           </a:p>
           <a:p>
@@ -17112,7 +16971,7 @@
                 </a:solidFill>
                 <a:latin typeface="Segoe UI"/>
               </a:rPr>
-              <a:t>Pruning works:   </a:t>
+              <a:t>Proven live:   </a:t>
             </a:r>
             <a:r>
               <a:rPr sz="1650">
@@ -17121,7 +16980,7 @@
                 </a:solidFill>
                 <a:latin typeface="Segoe UI"/>
               </a:rPr>
-              <a:t>Filters on extracted paths skip whole micro-partitions via metadata, scan cost tracks the answer, not the table.</a:t>
+              <a:t>FINANCE_ANALYST sees only MARTS_FINANCE and is DENIED MARTS_REVOPS; the RevOps analyst still sees both.</a:t>
             </a:r>
           </a:p>
           <a:p>
@@ -17149,7 +17008,7 @@
                 </a:solidFill>
                 <a:latin typeface="Segoe UI"/>
               </a:rPr>
-              <a:t>When it degrades:   </a:t>
+              <a:t>Service vs human:   </a:t>
             </a:r>
             <a:r>
               <a:rPr sz="1650">
@@ -17158,7 +17017,7 @@
                 </a:solidFill>
                 <a:latin typeface="Segoe UI"/>
               </a:rPr>
-              <a:t>Wildly heterogeneous keys defeat sub-columnarization, promote hot filter / dedup keys to real columns (event_id).</a:t>
+              <a:t>REVOPS_DEVELOPER (write, incl PROD) is service-only, sync_config.py rejects granting it to a human; humans get read + their own sandbox.</a:t>
             </a:r>
           </a:p>
           <a:p>
@@ -17186,7 +17045,7 @@
                 </a:solidFill>
                 <a:latin typeface="Segoe UI"/>
               </a:rPr>
-              <a:t>Discipline &amp; limits:   </a:t>
+              <a:t>Audit:   </a:t>
             </a:r>
             <a:r>
               <a:rPr sz="1650">
@@ -17195,7 +17054,7 @@
                 </a:solidFill>
                 <a:latin typeface="Segoe UI"/>
               </a:rPr>
-              <a:t>16 MB per value (events are KBs); missing key → NULL, never an error; TRY_CAST + tests absorb type drift; marts never read payload.</a:t>
+              <a:t>ACCESS_HISTORY answers 'who read ACCOUNT.ARR and when'; POLICY_REFERENCES proves the mask was attached at read time.</a:t>
             </a:r>
           </a:p>
         </p:txBody>
@@ -17203,413 +17062,6 @@
       <p:sp>
         <p:nvSpPr>
           <p:cNvPr id="7" name="Rounded Rectangle 6"/>
-          <p:cNvSpPr/>
-          <p:nvPr/>
-        </p:nvSpPr>
-        <p:spPr>
-          <a:xfrm>
-            <a:off x="7315200" y="1463040"/>
-            <a:ext cx="4370832" cy="4160520"/>
-          </a:xfrm>
-          <a:prstGeom prst="roundRect">
-            <a:avLst/>
-          </a:prstGeom>
-          <a:solidFill>
-            <a:srgbClr val="191552"/>
-          </a:solidFill>
-          <a:ln>
-            <a:noFill/>
-          </a:ln>
-          <a:effectLst/>
-        </p:spPr>
-        <p:style>
-          <a:lnRef idx="1">
-            <a:schemeClr val="accent1"/>
-          </a:lnRef>
-          <a:fillRef idx="3">
-            <a:schemeClr val="accent1"/>
-          </a:fillRef>
-          <a:effectRef idx="2">
-            <a:schemeClr val="accent1"/>
-          </a:effectRef>
-          <a:fontRef idx="minor">
-            <a:schemeClr val="lt1"/>
-          </a:fontRef>
-        </p:style>
-        <p:txBody>
-          <a:bodyPr rtlCol="0" anchor="ctr"/>
-          <a:lstStyle/>
-          <a:p>
-            <a:pPr algn="ctr"/>
-          </a:p>
-        </p:txBody>
-      </p:sp>
-      <p:sp>
-        <p:nvSpPr>
-          <p:cNvPr id="8" name="TextBox 7"/>
-          <p:cNvSpPr txBox="1"/>
-          <p:nvPr/>
-        </p:nvSpPr>
-        <p:spPr>
-          <a:xfrm>
-            <a:off x="7461504" y="1572768"/>
-            <a:ext cx="4078224" cy="3941063"/>
-          </a:xfrm>
-          <a:prstGeom prst="rect">
-            <a:avLst/>
-          </a:prstGeom>
-          <a:noFill/>
-        </p:spPr>
-        <p:txBody>
-          <a:bodyPr wrap="none" lIns="36576" rIns="36576" tIns="18288" bIns="18288" anchor="t">
-            <a:spAutoFit/>
-          </a:bodyPr>
-          <a:lstStyle/>
-          <a:p>
-            <a:pPr>
-              <a:spcAft>
-                <a:spcPts val="600"/>
-              </a:spcAft>
-            </a:pPr>
-            <a:r>
-              <a:rPr sz="1000" b="1">
-                <a:solidFill>
-                  <a:srgbClr val="A79FFF"/>
-                </a:solidFill>
-                <a:latin typeface="Consolas"/>
-              </a:rPr>
-              <a:t>VARIANT internals (sketch)</a:t>
-            </a:r>
-          </a:p>
-          <a:p>
-            <a:pPr>
-              <a:lnSpc>
-                <a:spcPct val="100000"/>
-              </a:lnSpc>
-              <a:spcAft>
-                <a:spcPts val="100"/>
-              </a:spcAft>
-            </a:pPr>
-            <a:r>
-              <a:rPr sz="1000">
-                <a:solidFill>
-                  <a:srgbClr val="8ED6B0"/>
-                </a:solidFill>
-                <a:latin typeface="Consolas"/>
-              </a:rPr>
-              <a:t>-- inside one micro-partition,</a:t>
-            </a:r>
-          </a:p>
-          <a:p>
-            <a:pPr>
-              <a:lnSpc>
-                <a:spcPct val="100000"/>
-              </a:lnSpc>
-              <a:spcAft>
-                <a:spcPts val="100"/>
-              </a:spcAft>
-            </a:pPr>
-            <a:r>
-              <a:rPr sz="1000">
-                <a:solidFill>
-                  <a:srgbClr val="8ED6B0"/>
-                </a:solidFill>
-                <a:latin typeface="Consolas"/>
-              </a:rPr>
-              <a:t>-- payload VARIANT is stored as:</a:t>
-            </a:r>
-          </a:p>
-          <a:p>
-            <a:pPr>
-              <a:lnSpc>
-                <a:spcPct val="100000"/>
-              </a:lnSpc>
-              <a:spcAft>
-                <a:spcPts val="100"/>
-              </a:spcAft>
-            </a:pPr>
-            <a:r>
-              <a:rPr sz="1000">
-                <a:solidFill>
-                  <a:srgbClr val="8ED6B0"/>
-                </a:solidFill>
-                <a:latin typeface="Consolas"/>
-              </a:rPr>
-              <a:t>--  :event_id            -&gt; sub-col</a:t>
-            </a:r>
-          </a:p>
-          <a:p>
-            <a:pPr>
-              <a:lnSpc>
-                <a:spcPct val="100000"/>
-              </a:lnSpc>
-              <a:spcAft>
-                <a:spcPts val="100"/>
-              </a:spcAft>
-            </a:pPr>
-            <a:r>
-              <a:rPr sz="1000">
-                <a:solidFill>
-                  <a:srgbClr val="8ED6B0"/>
-                </a:solidFill>
-                <a:latin typeface="Consolas"/>
-              </a:rPr>
-              <a:t>--  :account_id          -&gt; sub-col</a:t>
-            </a:r>
-          </a:p>
-          <a:p>
-            <a:pPr>
-              <a:lnSpc>
-                <a:spcPct val="100000"/>
-              </a:lnSpc>
-              <a:spcAft>
-                <a:spcPts val="100"/>
-              </a:spcAft>
-            </a:pPr>
-            <a:r>
-              <a:rPr sz="1000">
-                <a:solidFill>
-                  <a:srgbClr val="8ED6B0"/>
-                </a:solidFill>
-                <a:latin typeface="Consolas"/>
-              </a:rPr>
-              <a:t>--  :properties.duration_ms -&gt; sub-col</a:t>
-            </a:r>
-          </a:p>
-          <a:p>
-            <a:pPr>
-              <a:lnSpc>
-                <a:spcPct val="100000"/>
-              </a:lnSpc>
-              <a:spcAft>
-                <a:spcPts val="100"/>
-              </a:spcAft>
-            </a:pPr>
-            <a:r>
-              <a:rPr sz="1000">
-                <a:solidFill>
-                  <a:srgbClr val="8ED6B0"/>
-                </a:solidFill>
-                <a:latin typeface="Consolas"/>
-              </a:rPr>
-              <a:t>--  ...each with min/max stats</a:t>
-            </a:r>
-          </a:p>
-          <a:p>
-            <a:pPr>
-              <a:lnSpc>
-                <a:spcPct val="100000"/>
-              </a:lnSpc>
-              <a:spcAft>
-                <a:spcPts val="100"/>
-              </a:spcAft>
-            </a:pPr>
-          </a:p>
-          <a:p>
-            <a:pPr>
-              <a:lnSpc>
-                <a:spcPct val="100000"/>
-              </a:lnSpc>
-              <a:spcAft>
-                <a:spcPts val="100"/>
-              </a:spcAft>
-            </a:pPr>
-            <a:r>
-              <a:rPr sz="1000">
-                <a:solidFill>
-                  <a:srgbClr val="8ED6B0"/>
-                </a:solidFill>
-                <a:latin typeface="Consolas"/>
-              </a:rPr>
-              <a:t>-- projection: reads ONE sub-column</a:t>
-            </a:r>
-          </a:p>
-          <a:p>
-            <a:pPr>
-              <a:lnSpc>
-                <a:spcPct val="100000"/>
-              </a:lnSpc>
-              <a:spcAft>
-                <a:spcPts val="100"/>
-              </a:spcAft>
-            </a:pPr>
-            <a:r>
-              <a:rPr sz="1000">
-                <a:solidFill>
-                  <a:srgbClr val="E6E9F5"/>
-                </a:solidFill>
-                <a:latin typeface="Consolas"/>
-              </a:rPr>
-              <a:t>SELECT payload:properties.duration_ms</a:t>
-            </a:r>
-          </a:p>
-          <a:p>
-            <a:pPr>
-              <a:lnSpc>
-                <a:spcPct val="100000"/>
-              </a:lnSpc>
-              <a:spcAft>
-                <a:spcPts val="100"/>
-              </a:spcAft>
-            </a:pPr>
-            <a:r>
-              <a:rPr sz="1000">
-                <a:solidFill>
-                  <a:srgbClr val="E6E9F5"/>
-                </a:solidFill>
-                <a:latin typeface="Consolas"/>
-              </a:rPr>
-              <a:t>FROM raw.product_events.page_views</a:t>
-            </a:r>
-          </a:p>
-          <a:p>
-            <a:pPr>
-              <a:lnSpc>
-                <a:spcPct val="100000"/>
-              </a:lnSpc>
-              <a:spcAft>
-                <a:spcPts val="100"/>
-              </a:spcAft>
-            </a:pPr>
-          </a:p>
-          <a:p>
-            <a:pPr>
-              <a:lnSpc>
-                <a:spcPct val="100000"/>
-              </a:lnSpc>
-              <a:spcAft>
-                <a:spcPts val="100"/>
-              </a:spcAft>
-            </a:pPr>
-            <a:r>
-              <a:rPr sz="1000">
-                <a:solidFill>
-                  <a:srgbClr val="8ED6B0"/>
-                </a:solidFill>
-                <a:latin typeface="Consolas"/>
-              </a:rPr>
-              <a:t>-- pruning: skips micro-partitions</a:t>
-            </a:r>
-          </a:p>
-          <a:p>
-            <a:pPr>
-              <a:lnSpc>
-                <a:spcPct val="100000"/>
-              </a:lnSpc>
-              <a:spcAft>
-                <a:spcPts val="100"/>
-              </a:spcAft>
-            </a:pPr>
-            <a:r>
-              <a:rPr sz="1000">
-                <a:solidFill>
-                  <a:srgbClr val="E6E9F5"/>
-                </a:solidFill>
-                <a:latin typeface="Consolas"/>
-              </a:rPr>
-              <a:t>WHERE payload:event_timestamp</a:t>
-            </a:r>
-          </a:p>
-          <a:p>
-            <a:pPr>
-              <a:lnSpc>
-                <a:spcPct val="100000"/>
-              </a:lnSpc>
-              <a:spcAft>
-                <a:spcPts val="100"/>
-              </a:spcAft>
-            </a:pPr>
-            <a:r>
-              <a:rPr sz="1000">
-                <a:solidFill>
-                  <a:srgbClr val="E6E9F5"/>
-                </a:solidFill>
-                <a:latin typeface="Consolas"/>
-              </a:rPr>
-              <a:t>      ::timestamp_ntz &gt;= '2026-07-01'</a:t>
-            </a:r>
-          </a:p>
-          <a:p>
-            <a:pPr>
-              <a:lnSpc>
-                <a:spcPct val="100000"/>
-              </a:lnSpc>
-              <a:spcAft>
-                <a:spcPts val="100"/>
-              </a:spcAft>
-            </a:pPr>
-          </a:p>
-          <a:p>
-            <a:pPr>
-              <a:lnSpc>
-                <a:spcPct val="100000"/>
-              </a:lnSpc>
-              <a:spcAft>
-                <a:spcPts val="100"/>
-              </a:spcAft>
-            </a:pPr>
-            <a:r>
-              <a:rPr sz="1000">
-                <a:solidFill>
-                  <a:srgbClr val="8ED6B0"/>
-                </a:solidFill>
-                <a:latin typeface="Consolas"/>
-              </a:rPr>
-              <a:t>-- drift-safe typing in staging</a:t>
-            </a:r>
-          </a:p>
-          <a:p>
-            <a:pPr>
-              <a:lnSpc>
-                <a:spcPct val="100000"/>
-              </a:lnSpc>
-              <a:spcAft>
-                <a:spcPts val="100"/>
-              </a:spcAft>
-            </a:pPr>
-            <a:r>
-              <a:rPr sz="1000">
-                <a:solidFill>
-                  <a:srgbClr val="E6E9F5"/>
-                </a:solidFill>
-                <a:latin typeface="Consolas"/>
-              </a:rPr>
-              <a:t>TRY_CAST(payload:properties.duration_ms</a:t>
-            </a:r>
-          </a:p>
-          <a:p>
-            <a:pPr>
-              <a:lnSpc>
-                <a:spcPct val="100000"/>
-              </a:lnSpc>
-              <a:spcAft>
-                <a:spcPts val="100"/>
-              </a:spcAft>
-            </a:pPr>
-            <a:r>
-              <a:rPr sz="1000">
-                <a:solidFill>
-                  <a:srgbClr val="E6E9F5"/>
-                </a:solidFill>
-                <a:latin typeface="Consolas"/>
-              </a:rPr>
-              <a:t>         AS INT)  </a:t>
-            </a:r>
-            <a:r>
-              <a:rPr sz="1000">
-                <a:solidFill>
-                  <a:srgbClr val="8ED6B0"/>
-                </a:solidFill>
-                <a:latin typeface="Consolas"/>
-              </a:rPr>
-              <a:t>-- bad value -&gt; NULL</a:t>
-            </a:r>
-          </a:p>
-        </p:txBody>
-      </p:sp>
-      <p:sp>
-        <p:nvSpPr>
-          <p:cNvPr id="9" name="Rounded Rectangle 8"/>
           <p:cNvSpPr/>
           <p:nvPr/>
         </p:nvSpPr>
@@ -17653,7 +17105,7 @@
       </p:sp>
       <p:sp>
         <p:nvSpPr>
-          <p:cNvPr id="10" name="Rectangle 9"/>
+          <p:cNvPr id="8" name="Rectangle 7"/>
           <p:cNvSpPr/>
           <p:nvPr/>
         </p:nvSpPr>
@@ -17697,7 +17149,7 @@
       </p:sp>
       <p:sp>
         <p:nvSpPr>
-          <p:cNvPr id="11" name="TextBox 10"/>
+          <p:cNvPr id="9" name="TextBox 8"/>
           <p:cNvSpPr txBox="1"/>
           <p:nvPr/>
         </p:nvSpPr>
@@ -17733,14 +17185,14 @@
                 </a:solidFill>
                 <a:latin typeface="Segoe UI"/>
               </a:rPr>
-              <a:t>Schema-on-read is nearly free at query time, consistent paths are columnarized on write; type once in staging, downstream never parses JSON.</a:t>
-            </a:r>
-          </a:p>
-        </p:txBody>
-      </p:sp>
-      <p:sp>
-        <p:nvSpPr>
-          <p:cNvPr id="12" name="TextBox 11"/>
+              <a:t>Least privilege scales because it's generated from config, each domain analyst is confined to that domain's marts by an exact grant.</a:t>
+            </a:r>
+          </a:p>
+        </p:txBody>
+      </p:sp>
+      <p:sp>
+        <p:nvSpPr>
+          <p:cNvPr id="10" name="TextBox 9"/>
           <p:cNvSpPr txBox="1"/>
           <p:nvPr/>
         </p:nvSpPr>
@@ -17774,7 +17226,7 @@
       </p:sp>
       <p:sp>
         <p:nvSpPr>
-          <p:cNvPr id="13" name="TextBox 12"/>
+          <p:cNvPr id="11" name="TextBox 10"/>
           <p:cNvSpPr txBox="1"/>
           <p:nvPr/>
         </p:nvSpPr>
@@ -17802,7 +17254,7 @@
                 </a:solidFill>
                 <a:latin typeface="Segoe UI"/>
               </a:rPr>
-              <a:t>24</a:t>
+              <a:t>23</a:t>
             </a:r>
           </a:p>
         </p:txBody>
@@ -17955,7 +17407,7 @@
                 </a:solidFill>
                 <a:latin typeface="Segoe UI"/>
               </a:rPr>
-              <a:t>APPENDIX · INTERNALS</a:t>
+              <a:t>APPENDIX · DBT</a:t>
             </a:r>
           </a:p>
           <a:p>
@@ -17966,7 +17418,7 @@
                 </a:solidFill>
                 <a:latin typeface="Segoe UI"/>
               </a:rPr>
-              <a:t>ADLS layout &amp; hourly loads, append-only RAW</a:t>
+              <a:t>Incremental vs full-refresh, and fixing incrementals</a:t>
             </a:r>
           </a:p>
         </p:txBody>
@@ -18003,8 +17455,8 @@
         </p:nvSpPr>
         <p:spPr>
           <a:xfrm>
-            <a:off x="594360" y="1371600"/>
-            <a:ext cx="6446520" cy="4297680"/>
+            <a:off x="640080" y="1371600"/>
+            <a:ext cx="10972800" cy="4206240"/>
           </a:xfrm>
           <a:prstGeom prst="rect">
             <a:avLst/>
@@ -18041,7 +17493,7 @@
                 </a:solidFill>
                 <a:latin typeface="Segoe UI"/>
               </a:rPr>
-              <a:t>One prefix per source object:   </a:t>
+              <a:t>Incremental (merge):   </a:t>
             </a:r>
             <a:r>
               <a:rPr sz="1650">
@@ -18050,7 +17502,7 @@
                 </a:solidFill>
                 <a:latin typeface="Segoe UI"/>
               </a:rPr>
-              <a:t>Source/object/dt=YYYY-MM-DD/hr=HH/, hourly runs list one narrow prefix; backfill = re-point at a date range; lifecycle rules attach per prefix.</a:t>
+              <a:t>High-volume/append sources (telemetry, CDC tables), build only rows since the last watermark; cheap, fast.</a:t>
             </a:r>
           </a:p>
           <a:p>
@@ -18078,7 +17530,7 @@
                 </a:solidFill>
                 <a:latin typeface="Segoe UI"/>
               </a:rPr>
-              <a:t>Append new files, never replace:   </a:t>
+              <a:t>Full-refresh:   </a:t>
             </a:r>
             <a:r>
               <a:rPr sz="1650">
@@ -18087,7 +17539,7 @@
                 </a:solidFill>
                 <a:latin typeface="Segoe UI"/>
               </a:rPr>
-              <a:t>RAW is an immutable log, not a mirror, 'latest' applies to which files we read this run, not to what we keep.</a:t>
+              <a:t>Small dimensions, or after a logic change, rebuild from scratch.</a:t>
             </a:r>
           </a:p>
           <a:p>
@@ -18115,7 +17567,7 @@
                 </a:solidFill>
                 <a:latin typeface="Segoe UI"/>
               </a:rPr>
-              <a:t>Idempotent in three layers:   </a:t>
+              <a:t>The trap:   </a:t>
             </a:r>
             <a:r>
               <a:rPr sz="1650">
@@ -18124,7 +17576,7 @@
                 </a:solidFill>
                 <a:latin typeface="Segoe UI"/>
               </a:rPr>
-              <a:t>COPY's 64-day file-load history (re-run loads zero) · _LOAD_LOG watermark + trailing-window rescan for late files · event_id dedup in staging.</a:t>
+              <a:t>A normal build only merges NEW rows, so a logic fix to an incremental model never re-cleans already-materialized rows.</a:t>
             </a:r>
           </a:p>
           <a:p>
@@ -18152,7 +17604,7 @@
                 </a:solidFill>
                 <a:latin typeface="Segoe UI"/>
               </a:rPr>
-              <a:t>Full refresh without mutation:   </a:t>
+              <a:t>The fix, as a button:   </a:t>
             </a:r>
             <a:r>
               <a:rPr sz="1650">
@@ -18161,7 +17613,7 @@
                 </a:solidFill>
                 <a:latin typeface="Segoe UI"/>
               </a:rPr>
-              <a:t>COPY FORCE=TRUE into a fresh table, then ALTER TABLE SWAP, rebuild history, never edit it.</a:t>
+              <a:t>A manual full-refresh workflow, branch (dev→preprod / main→prod) × scope (all | only models changed in the last commit).</a:t>
             </a:r>
           </a:p>
           <a:p>
@@ -18189,7 +17641,7 @@
                 </a:solidFill>
                 <a:latin typeface="Segoe UI"/>
               </a:rPr>
-              <a:t>COPY now, Snowpipe next:   </a:t>
+              <a:t>Real example:   </a:t>
             </a:r>
             <a:r>
               <a:rPr sz="1650">
@@ -18198,7 +17650,7 @@
                 </a:solidFill>
                 <a:latin typeface="Segoe UI"/>
               </a:rPr>
-              <a:t>Scheduled Python + COPY keeps validation / quarantine / _LOAD_LOG in code; production evolution: Snowpipe auto-ingest per S3 event, no scheduler.</a:t>
+              <a:t>The page_views user_id VARIANT-null fix needed a full-refresh to purge 2 historical bad rows from PROD.</a:t>
             </a:r>
           </a:p>
         </p:txBody>
@@ -18206,375 +17658,6 @@
       <p:sp>
         <p:nvSpPr>
           <p:cNvPr id="7" name="Rounded Rectangle 6"/>
-          <p:cNvSpPr/>
-          <p:nvPr/>
-        </p:nvSpPr>
-        <p:spPr>
-          <a:xfrm>
-            <a:off x="7315200" y="1463040"/>
-            <a:ext cx="4370832" cy="4160520"/>
-          </a:xfrm>
-          <a:prstGeom prst="roundRect">
-            <a:avLst/>
-          </a:prstGeom>
-          <a:solidFill>
-            <a:srgbClr val="191552"/>
-          </a:solidFill>
-          <a:ln>
-            <a:noFill/>
-          </a:ln>
-          <a:effectLst/>
-        </p:spPr>
-        <p:style>
-          <a:lnRef idx="1">
-            <a:schemeClr val="accent1"/>
-          </a:lnRef>
-          <a:fillRef idx="3">
-            <a:schemeClr val="accent1"/>
-          </a:fillRef>
-          <a:effectRef idx="2">
-            <a:schemeClr val="accent1"/>
-          </a:effectRef>
-          <a:fontRef idx="minor">
-            <a:schemeClr val="lt1"/>
-          </a:fontRef>
-        </p:style>
-        <p:txBody>
-          <a:bodyPr rtlCol="0" anchor="ctr"/>
-          <a:lstStyle/>
-          <a:p>
-            <a:pPr algn="ctr"/>
-          </a:p>
-        </p:txBody>
-      </p:sp>
-      <p:sp>
-        <p:nvSpPr>
-          <p:cNvPr id="8" name="TextBox 7"/>
-          <p:cNvSpPr txBox="1"/>
-          <p:nvPr/>
-        </p:nvSpPr>
-        <p:spPr>
-          <a:xfrm>
-            <a:off x="7461504" y="1572768"/>
-            <a:ext cx="4078224" cy="3941063"/>
-          </a:xfrm>
-          <a:prstGeom prst="rect">
-            <a:avLst/>
-          </a:prstGeom>
-          <a:noFill/>
-        </p:spPr>
-        <p:txBody>
-          <a:bodyPr wrap="none" lIns="36576" rIns="36576" tIns="18288" bIns="18288" anchor="t">
-            <a:spAutoFit/>
-          </a:bodyPr>
-          <a:lstStyle/>
-          <a:p>
-            <a:pPr>
-              <a:spcAft>
-                <a:spcPts val="600"/>
-              </a:spcAft>
-            </a:pPr>
-            <a:r>
-              <a:rPr sz="1000" b="1">
-                <a:solidFill>
-                  <a:srgbClr val="A79FFF"/>
-                </a:solidFill>
-                <a:latin typeface="Consolas"/>
-              </a:rPr>
-              <a:t>land hourly, append-only</a:t>
-            </a:r>
-          </a:p>
-          <a:p>
-            <a:pPr>
-              <a:lnSpc>
-                <a:spcPct val="100000"/>
-              </a:lnSpc>
-              <a:spcAft>
-                <a:spcPts val="100"/>
-              </a:spcAft>
-            </a:pPr>
-            <a:r>
-              <a:rPr sz="1000">
-                <a:solidFill>
-                  <a:srgbClr val="E6E9F5"/>
-                </a:solidFill>
-                <a:latin typeface="Consolas"/>
-              </a:rPr>
-              <a:t>azure://snowopssa.blob.core.windows.net/</a:t>
-            </a:r>
-          </a:p>
-          <a:p>
-            <a:pPr>
-              <a:lnSpc>
-                <a:spcPct val="100000"/>
-              </a:lnSpc>
-              <a:spcAft>
-                <a:spcPts val="100"/>
-              </a:spcAft>
-            </a:pPr>
-            <a:r>
-              <a:rPr sz="1000">
-                <a:solidFill>
-                  <a:srgbClr val="E6E9F5"/>
-                </a:solidFill>
-                <a:latin typeface="Consolas"/>
-              </a:rPr>
-              <a:t>  og-telemetry/prod/product_events/</a:t>
-            </a:r>
-          </a:p>
-          <a:p>
-            <a:pPr>
-              <a:lnSpc>
-                <a:spcPct val="100000"/>
-              </a:lnSpc>
-              <a:spcAft>
-                <a:spcPts val="100"/>
-              </a:spcAft>
-            </a:pPr>
-            <a:r>
-              <a:rPr sz="1000">
-                <a:solidFill>
-                  <a:srgbClr val="E6E9F5"/>
-                </a:solidFill>
-                <a:latin typeface="Consolas"/>
-              </a:rPr>
-              <a:t>    page_views/dt=2026-07-12/hr=14/</a:t>
-            </a:r>
-          </a:p>
-          <a:p>
-            <a:pPr>
-              <a:lnSpc>
-                <a:spcPct val="100000"/>
-              </a:lnSpc>
-              <a:spcAft>
-                <a:spcPts val="100"/>
-              </a:spcAft>
-            </a:pPr>
-            <a:r>
-              <a:rPr sz="1000">
-                <a:solidFill>
-                  <a:srgbClr val="E6E9F5"/>
-                </a:solidFill>
-                <a:latin typeface="Consolas"/>
-              </a:rPr>
-              <a:t>      page_views_2026-07-12_14.json</a:t>
-            </a:r>
-          </a:p>
-          <a:p>
-            <a:pPr>
-              <a:lnSpc>
-                <a:spcPct val="100000"/>
-              </a:lnSpc>
-              <a:spcAft>
-                <a:spcPts val="100"/>
-              </a:spcAft>
-            </a:pPr>
-            <a:r>
-              <a:rPr sz="1000">
-                <a:solidFill>
-                  <a:srgbClr val="E6E9F5"/>
-                </a:solidFill>
-                <a:latin typeface="Consolas"/>
-              </a:rPr>
-              <a:t>    .../hr=15/ ...</a:t>
-            </a:r>
-          </a:p>
-          <a:p>
-            <a:pPr>
-              <a:lnSpc>
-                <a:spcPct val="100000"/>
-              </a:lnSpc>
-              <a:spcAft>
-                <a:spcPts val="100"/>
-              </a:spcAft>
-            </a:pPr>
-          </a:p>
-          <a:p>
-            <a:pPr>
-              <a:lnSpc>
-                <a:spcPct val="100000"/>
-              </a:lnSpc>
-              <a:spcAft>
-                <a:spcPts val="100"/>
-              </a:spcAft>
-            </a:pPr>
-            <a:r>
-              <a:rPr sz="1000">
-                <a:solidFill>
-                  <a:srgbClr val="8ED6B0"/>
-                </a:solidFill>
-                <a:latin typeface="Consolas"/>
-              </a:rPr>
-              <a:t>-- hourly job: append new files only</a:t>
-            </a:r>
-          </a:p>
-          <a:p>
-            <a:pPr>
-              <a:lnSpc>
-                <a:spcPct val="100000"/>
-              </a:lnSpc>
-              <a:spcAft>
-                <a:spcPts val="100"/>
-              </a:spcAft>
-            </a:pPr>
-            <a:r>
-              <a:rPr sz="1000">
-                <a:solidFill>
-                  <a:srgbClr val="E6E9F5"/>
-                </a:solidFill>
-                <a:latin typeface="Consolas"/>
-              </a:rPr>
-              <a:t>COPY INTO product_events_raw_adls.page_views</a:t>
-            </a:r>
-          </a:p>
-          <a:p>
-            <a:pPr>
-              <a:lnSpc>
-                <a:spcPct val="100000"/>
-              </a:lnSpc>
-              <a:spcAft>
-                <a:spcPts val="100"/>
-              </a:spcAft>
-            </a:pPr>
-            <a:r>
-              <a:rPr sz="1000">
-                <a:solidFill>
-                  <a:srgbClr val="E6E9F5"/>
-                </a:solidFill>
-                <a:latin typeface="Consolas"/>
-              </a:rPr>
-              <a:t>FROM @page_views_stage/dt=2026-07-12/</a:t>
-            </a:r>
-          </a:p>
-          <a:p>
-            <a:pPr>
-              <a:lnSpc>
-                <a:spcPct val="100000"/>
-              </a:lnSpc>
-              <a:spcAft>
-                <a:spcPts val="100"/>
-              </a:spcAft>
-            </a:pPr>
-            <a:r>
-              <a:rPr sz="1000">
-                <a:solidFill>
-                  <a:srgbClr val="E6E9F5"/>
-                </a:solidFill>
-                <a:latin typeface="Consolas"/>
-              </a:rPr>
-              <a:t>FILE_FORMAT = ff_json;</a:t>
-            </a:r>
-          </a:p>
-          <a:p>
-            <a:pPr>
-              <a:lnSpc>
-                <a:spcPct val="100000"/>
-              </a:lnSpc>
-              <a:spcAft>
-                <a:spcPts val="100"/>
-              </a:spcAft>
-            </a:pPr>
-            <a:r>
-              <a:rPr sz="1000">
-                <a:solidFill>
-                  <a:srgbClr val="8ED6B0"/>
-                </a:solidFill>
-                <a:latin typeface="Consolas"/>
-              </a:rPr>
-              <a:t>-- 64-day file history: re-run = 0 rows</a:t>
-            </a:r>
-          </a:p>
-          <a:p>
-            <a:pPr>
-              <a:lnSpc>
-                <a:spcPct val="100000"/>
-              </a:lnSpc>
-              <a:spcAft>
-                <a:spcPts val="100"/>
-              </a:spcAft>
-            </a:pPr>
-          </a:p>
-          <a:p>
-            <a:pPr>
-              <a:lnSpc>
-                <a:spcPct val="100000"/>
-              </a:lnSpc>
-              <a:spcAft>
-                <a:spcPts val="100"/>
-              </a:spcAft>
-            </a:pPr>
-            <a:r>
-              <a:rPr sz="1000">
-                <a:solidFill>
-                  <a:srgbClr val="8ED6B0"/>
-                </a:solidFill>
-                <a:latin typeface="Consolas"/>
-              </a:rPr>
-              <a:t>-- staging: producer resends -&gt; 1 row</a:t>
-            </a:r>
-          </a:p>
-          <a:p>
-            <a:pPr>
-              <a:lnSpc>
-                <a:spcPct val="100000"/>
-              </a:lnSpc>
-              <a:spcAft>
-                <a:spcPts val="100"/>
-              </a:spcAft>
-            </a:pPr>
-            <a:r>
-              <a:rPr sz="1000">
-                <a:solidFill>
-                  <a:srgbClr val="E6E9F5"/>
-                </a:solidFill>
-                <a:latin typeface="Consolas"/>
-              </a:rPr>
-              <a:t>QUALIFY ROW_NUMBER() OVER (</a:t>
-            </a:r>
-          </a:p>
-          <a:p>
-            <a:pPr>
-              <a:lnSpc>
-                <a:spcPct val="100000"/>
-              </a:lnSpc>
-              <a:spcAft>
-                <a:spcPts val="100"/>
-              </a:spcAft>
-            </a:pPr>
-            <a:r>
-              <a:rPr sz="1000">
-                <a:solidFill>
-                  <a:srgbClr val="E6E9F5"/>
-                </a:solidFill>
-                <a:latin typeface="Consolas"/>
-              </a:rPr>
-              <a:t>  PARTITION BY event_id</a:t>
-            </a:r>
-          </a:p>
-          <a:p>
-            <a:pPr>
-              <a:lnSpc>
-                <a:spcPct val="100000"/>
-              </a:lnSpc>
-              <a:spcAft>
-                <a:spcPts val="100"/>
-              </a:spcAft>
-            </a:pPr>
-            <a:r>
-              <a:rPr sz="1000">
-                <a:solidFill>
-                  <a:srgbClr val="E6E9F5"/>
-                </a:solidFill>
-                <a:latin typeface="Consolas"/>
-              </a:rPr>
-              <a:t>  ORDER BY loaded_at DESC) = 1</a:t>
-            </a:r>
-          </a:p>
-        </p:txBody>
-      </p:sp>
-      <p:sp>
-        <p:nvSpPr>
-          <p:cNvPr id="9" name="Rounded Rectangle 8"/>
           <p:cNvSpPr/>
           <p:nvPr/>
         </p:nvSpPr>
@@ -18618,7 +17701,7 @@
       </p:sp>
       <p:sp>
         <p:nvSpPr>
-          <p:cNvPr id="10" name="Rectangle 9"/>
+          <p:cNvPr id="8" name="Rectangle 7"/>
           <p:cNvSpPr/>
           <p:nvPr/>
         </p:nvSpPr>
@@ -18662,7 +17745,7 @@
       </p:sp>
       <p:sp>
         <p:nvSpPr>
-          <p:cNvPr id="11" name="TextBox 10"/>
+          <p:cNvPr id="9" name="TextBox 8"/>
           <p:cNvSpPr txBox="1"/>
           <p:nvPr/>
         </p:nvSpPr>
@@ -18698,14 +17781,14 @@
                 </a:solidFill>
                 <a:latin typeface="Segoe UI"/>
               </a:rPr>
-              <a:t>Copy only the latest files, keep every row, append-only RAW plus three idempotency layers makes any re-run or backfill safe.</a:t>
-            </a:r>
-          </a:p>
-        </p:txBody>
-      </p:sp>
-      <p:sp>
-        <p:nvSpPr>
-          <p:cNvPr id="12" name="TextBox 11"/>
+              <a:t>Pick incremental for volume, full-refresh for correctness, and make the full-refresh a one-click, scoped workflow.</a:t>
+            </a:r>
+          </a:p>
+        </p:txBody>
+      </p:sp>
+      <p:sp>
+        <p:nvSpPr>
+          <p:cNvPr id="10" name="TextBox 9"/>
           <p:cNvSpPr txBox="1"/>
           <p:nvPr/>
         </p:nvSpPr>
@@ -18739,7 +17822,7 @@
       </p:sp>
       <p:sp>
         <p:nvSpPr>
-          <p:cNvPr id="13" name="TextBox 12"/>
+          <p:cNvPr id="11" name="TextBox 10"/>
           <p:cNvSpPr txBox="1"/>
           <p:nvPr/>
         </p:nvSpPr>
@@ -18767,7 +17850,7 @@
                 </a:solidFill>
                 <a:latin typeface="Segoe UI"/>
               </a:rPr>
-              <a:t>25</a:t>
+              <a:t>24</a:t>
             </a:r>
           </a:p>
         </p:txBody>
@@ -18920,7 +18003,7 @@
                 </a:solidFill>
                 <a:latin typeface="Segoe UI"/>
               </a:rPr>
-              <a:t>APPENDIX · INTERNALS</a:t>
+              <a:t>APPENDIX · DELIVERY</a:t>
             </a:r>
           </a:p>
           <a:p>
@@ -18931,7 +18014,7 @@
                 </a:solidFill>
                 <a:latin typeface="Segoe UI"/>
               </a:rPr>
-              <a:t>COPY INTO, load logs &amp; the 64-day horizon</a:t>
+              <a:t>CI/CD security, idempotency &amp; standards</a:t>
             </a:r>
           </a:p>
         </p:txBody>
@@ -18968,8 +18051,8 @@
         </p:nvSpPr>
         <p:spPr>
           <a:xfrm>
-            <a:off x="594360" y="1371600"/>
-            <a:ext cx="6446520" cy="4297680"/>
+            <a:off x="640080" y="1371600"/>
+            <a:ext cx="10972800" cy="4206240"/>
           </a:xfrm>
           <a:prstGeom prst="rect">
             <a:avLst/>
@@ -19006,7 +18089,7 @@
                 </a:solidFill>
                 <a:latin typeface="Segoe UI"/>
               </a:rPr>
-              <a:t>COPY returns a per-file result set:   </a:t>
+              <a:t>No static secrets:   </a:t>
             </a:r>
             <a:r>
               <a:rPr sz="1650">
@@ -19015,7 +18098,7 @@
                 </a:solidFill>
                 <a:latin typeface="Segoe UI"/>
               </a:rPr>
-              <a:t>rows_parsed / rows_loaded / errors per file, the Python job persists it to _LOAD_LOG; ours never expires.</a:t>
+              <a:t>Key-pair (JWT) for Snowflake, storage key for the TF backend, all GitHub secrets; the private key touches only a temp file in the job.</a:t>
             </a:r>
           </a:p>
           <a:p>
@@ -19043,7 +18126,7 @@
                 </a:solidFill>
                 <a:latin typeface="Segoe UI"/>
               </a:rPr>
-              <a:t>Built-in audit views:   </a:t>
+              <a:t>Malicious-PR safe:   </a:t>
             </a:r>
             <a:r>
               <a:rPr sz="1650">
@@ -19052,7 +18135,7 @@
                 </a:solidFill>
                 <a:latin typeface="Segoe UI"/>
               </a:rPr>
-              <a:t>COPY_HISTORY table function = 14 days, per table; ACCOUNT_USAGE = 365 days, account-wide (~90 min lag).</a:t>
+              <a:t>Secrets are exposed only to post-merge apply jobs; PR-triggered plan never sees them; PROD gated by a protected Environment + approval.</a:t>
             </a:r>
           </a:p>
           <a:p>
@@ -19080,7 +18163,7 @@
                 </a:solidFill>
                 <a:latin typeface="Segoe UI"/>
               </a:rPr>
-              <a:t>The 64-day dedup horizon:   </a:t>
+              <a:t>Remote state:   </a:t>
             </a:r>
             <a:r>
               <a:rPr sz="1650">
@@ -19089,7 +18172,7 @@
                 </a:solidFill>
                 <a:latin typeface="Segoe UI"/>
               </a:rPr>
-              <a:t>The internal metadata COPY uses to skip already-loaded files expires after 64 days, separate from the audit views.</a:t>
+              <a:t>Terraform state in an azurerm backend (ADLS), so CI and local share one source of truth, no drift, no local state to lose.</a:t>
             </a:r>
           </a:p>
           <a:p>
@@ -19117,7 +18200,7 @@
                 </a:solidFill>
                 <a:latin typeface="Segoe UI"/>
               </a:rPr>
-              <a:t>Beyond 64 days = silent skip:   </a:t>
+              <a:t>Idempotent &amp; half-failure safe:   </a:t>
             </a:r>
             <a:r>
               <a:rPr sz="1650">
@@ -19126,7 +18209,7 @@
                 </a:solidFill>
                 <a:latin typeface="Segoe UI"/>
               </a:rPr>
-              <a:t>Unknown-status files are skipped, a silent gap, not duplicates; backfill via LOAD_UNCERTAIN_FILES=TRUE or FORCE + SWAP.</a:t>
+              <a:t>config→JSON→for_each reruns cleanly; a drift check fails the PR if CSVs and generated JSON disagree; apply_pii_tags skips absent objects.</a:t>
             </a:r>
           </a:p>
           <a:p>
@@ -19154,7 +18237,7 @@
                 </a:solidFill>
                 <a:latin typeface="Segoe UI"/>
               </a:rPr>
-              <a:t>Why three layers:   </a:t>
+              <a:t>Standards enforced:   </a:t>
             </a:r>
             <a:r>
               <a:rPr sz="1650">
@@ -19163,7 +18246,7 @@
                 </a:solidFill>
                 <a:latin typeface="Segoe UI"/>
               </a:rPr>
-              <a:t>COPY history expires · watermarks miss late files · event_id dedup in staging never expires.</a:t>
+              <a:t>sync_config.py validates every reference (unknown role/schema/env) and rejects a service-only role reaching a human, the linter is the reviewer.</a:t>
             </a:r>
           </a:p>
         </p:txBody>
@@ -19176,10 +18259,236 @@
         </p:nvSpPr>
         <p:spPr>
           <a:xfrm>
-            <a:off x="7315200" y="1463040"/>
-            <a:ext cx="4370832" cy="4160520"/>
+            <a:off x="502920" y="5806440"/>
+            <a:ext cx="11183112" cy="457200"/>
           </a:xfrm>
           <a:prstGeom prst="roundRect">
+            <a:avLst/>
+          </a:prstGeom>
+          <a:solidFill>
+            <a:srgbClr val="ECEBFB"/>
+          </a:solidFill>
+          <a:ln>
+            <a:noFill/>
+          </a:ln>
+          <a:effectLst/>
+        </p:spPr>
+        <p:style>
+          <a:lnRef idx="1">
+            <a:schemeClr val="accent1"/>
+          </a:lnRef>
+          <a:fillRef idx="3">
+            <a:schemeClr val="accent1"/>
+          </a:fillRef>
+          <a:effectRef idx="2">
+            <a:schemeClr val="accent1"/>
+          </a:effectRef>
+          <a:fontRef idx="minor">
+            <a:schemeClr val="lt1"/>
+          </a:fontRef>
+        </p:style>
+        <p:txBody>
+          <a:bodyPr rtlCol="0" anchor="ctr"/>
+          <a:lstStyle/>
+          <a:p>
+            <a:pPr algn="ctr"/>
+          </a:p>
+        </p:txBody>
+      </p:sp>
+      <p:sp>
+        <p:nvSpPr>
+          <p:cNvPr id="8" name="Rectangle 7"/>
+          <p:cNvSpPr/>
+          <p:nvPr/>
+        </p:nvSpPr>
+        <p:spPr>
+          <a:xfrm>
+            <a:off x="502920" y="5806440"/>
+            <a:ext cx="82296" cy="457200"/>
+          </a:xfrm>
+          <a:prstGeom prst="rect">
+            <a:avLst/>
+          </a:prstGeom>
+          <a:solidFill>
+            <a:srgbClr val="4A3FFF"/>
+          </a:solidFill>
+          <a:ln>
+            <a:noFill/>
+          </a:ln>
+          <a:effectLst/>
+        </p:spPr>
+        <p:style>
+          <a:lnRef idx="1">
+            <a:schemeClr val="accent1"/>
+          </a:lnRef>
+          <a:fillRef idx="3">
+            <a:schemeClr val="accent1"/>
+          </a:fillRef>
+          <a:effectRef idx="2">
+            <a:schemeClr val="accent1"/>
+          </a:effectRef>
+          <a:fontRef idx="minor">
+            <a:schemeClr val="lt1"/>
+          </a:fontRef>
+        </p:style>
+        <p:txBody>
+          <a:bodyPr rtlCol="0" anchor="ctr"/>
+          <a:lstStyle/>
+          <a:p>
+            <a:pPr algn="ctr"/>
+          </a:p>
+        </p:txBody>
+      </p:sp>
+      <p:sp>
+        <p:nvSpPr>
+          <p:cNvPr id="9" name="TextBox 8"/>
+          <p:cNvSpPr txBox="1"/>
+          <p:nvPr/>
+        </p:nvSpPr>
+        <p:spPr>
+          <a:xfrm>
+            <a:off x="731520" y="5806440"/>
+            <a:ext cx="10789920" cy="457200"/>
+          </a:xfrm>
+          <a:prstGeom prst="rect">
+            <a:avLst/>
+          </a:prstGeom>
+          <a:noFill/>
+        </p:spPr>
+        <p:txBody>
+          <a:bodyPr wrap="square" lIns="36576" rIns="36576" tIns="18288" bIns="18288" anchor="ctr">
+            <a:spAutoFit/>
+          </a:bodyPr>
+          <a:lstStyle/>
+          <a:p>
+            <a:r>
+              <a:rPr b="1" sz="1300">
+                <a:solidFill>
+                  <a:srgbClr val="3B34B8"/>
+                </a:solidFill>
+                <a:latin typeface="Segoe UI"/>
+              </a:rPr>
+              <a:t>Takeaway   </a:t>
+            </a:r>
+            <a:r>
+              <a:rPr sz="1300">
+                <a:solidFill>
+                  <a:srgbClr val="1B1B33"/>
+                </a:solidFill>
+                <a:latin typeface="Segoe UI"/>
+              </a:rPr>
+              <a:t>The pipeline is the control plane: reviewed, idempotent, secret-safe, and standards-enforcing, provisioning you can trust.</a:t>
+            </a:r>
+          </a:p>
+        </p:txBody>
+      </p:sp>
+      <p:sp>
+        <p:nvSpPr>
+          <p:cNvPr id="10" name="TextBox 9"/>
+          <p:cNvSpPr txBox="1"/>
+          <p:nvPr/>
+        </p:nvSpPr>
+        <p:spPr>
+          <a:xfrm>
+            <a:off x="502920" y="6455664"/>
+            <a:ext cx="7315200" cy="320040"/>
+          </a:xfrm>
+          <a:prstGeom prst="rect">
+            <a:avLst/>
+          </a:prstGeom>
+          <a:noFill/>
+        </p:spPr>
+        <p:txBody>
+          <a:bodyPr wrap="square" lIns="36576" rIns="36576" tIns="18288" bIns="18288">
+            <a:spAutoFit/>
+          </a:bodyPr>
+          <a:lstStyle/>
+          <a:p>
+            <a:r>
+              <a:rPr sz="900">
+                <a:solidFill>
+                  <a:srgbClr val="5C5B77"/>
+                </a:solidFill>
+                <a:latin typeface="Segoe UI"/>
+              </a:rPr>
+              <a:t>OpenGov Data Platform  ·  Case Study  ·  Akash Pahilwan</a:t>
+            </a:r>
+          </a:p>
+        </p:txBody>
+      </p:sp>
+      <p:sp>
+        <p:nvSpPr>
+          <p:cNvPr id="11" name="TextBox 10"/>
+          <p:cNvSpPr txBox="1"/>
+          <p:nvPr/>
+        </p:nvSpPr>
+        <p:spPr>
+          <a:xfrm>
+            <a:off x="10911535" y="6455664"/>
+            <a:ext cx="822960" cy="320040"/>
+          </a:xfrm>
+          <a:prstGeom prst="rect">
+            <a:avLst/>
+          </a:prstGeom>
+          <a:noFill/>
+        </p:spPr>
+        <p:txBody>
+          <a:bodyPr wrap="square" lIns="36576" rIns="36576" tIns="18288" bIns="18288">
+            <a:spAutoFit/>
+          </a:bodyPr>
+          <a:lstStyle/>
+          <a:p>
+            <a:pPr algn="r"/>
+            <a:r>
+              <a:rPr sz="900">
+                <a:solidFill>
+                  <a:srgbClr val="5C5B77"/>
+                </a:solidFill>
+                <a:latin typeface="Segoe UI"/>
+              </a:rPr>
+              <a:t>25</a:t>
+            </a:r>
+          </a:p>
+        </p:txBody>
+      </p:sp>
+    </p:spTree>
+  </p:cSld>
+  <p:clrMapOvr>
+    <a:masterClrMapping/>
+  </p:clrMapOvr>
+</p:sld>
+</file>
+
+<file path=ppt/slides/slide29.xml><?xml version="1.0" encoding="utf-8"?>
+<p:sld xmlns:a="http://schemas.openxmlformats.org/drawingml/2006/main" xmlns:p="http://schemas.openxmlformats.org/presentationml/2006/main" xmlns:r="http://schemas.openxmlformats.org/officeDocument/2006/relationships">
+  <p:cSld>
+    <p:bg>
+      <p:bgPr>
+        <a:solidFill>
+          <a:srgbClr val="FFFFFF"/>
+        </a:solidFill>
+        <a:effectLst/>
+      </p:bgPr>
+    </p:bg>
+    <p:spTree>
+      <p:nvGrpSpPr>
+        <p:cNvPr id="1" name=""/>
+        <p:cNvGrpSpPr/>
+        <p:nvPr/>
+      </p:nvGrpSpPr>
+      <p:grpSpPr/>
+      <p:sp>
+        <p:nvSpPr>
+          <p:cNvPr id="2" name="Rectangle 1"/>
+          <p:cNvSpPr/>
+          <p:nvPr/>
+        </p:nvSpPr>
+        <p:spPr>
+          <a:xfrm>
+            <a:off x="0" y="0"/>
+            <a:ext cx="12191695" cy="1024128"/>
+          </a:xfrm>
+          <a:prstGeom prst="rect">
             <a:avLst/>
           </a:prstGeom>
           <a:solidFill>
@@ -19214,6 +18523,376 @@
       </p:sp>
       <p:sp>
         <p:nvSpPr>
+          <p:cNvPr id="3" name="Rectangle 2"/>
+          <p:cNvSpPr/>
+          <p:nvPr/>
+        </p:nvSpPr>
+        <p:spPr>
+          <a:xfrm>
+            <a:off x="0" y="1024128"/>
+            <a:ext cx="12191695" cy="50292"/>
+          </a:xfrm>
+          <a:prstGeom prst="rect">
+            <a:avLst/>
+          </a:prstGeom>
+          <a:solidFill>
+            <a:srgbClr val="4A3FFF"/>
+          </a:solidFill>
+          <a:ln>
+            <a:noFill/>
+          </a:ln>
+          <a:effectLst/>
+        </p:spPr>
+        <p:style>
+          <a:lnRef idx="1">
+            <a:schemeClr val="accent1"/>
+          </a:lnRef>
+          <a:fillRef idx="3">
+            <a:schemeClr val="accent1"/>
+          </a:fillRef>
+          <a:effectRef idx="2">
+            <a:schemeClr val="accent1"/>
+          </a:effectRef>
+          <a:fontRef idx="minor">
+            <a:schemeClr val="lt1"/>
+          </a:fontRef>
+        </p:style>
+        <p:txBody>
+          <a:bodyPr rtlCol="0" anchor="ctr"/>
+          <a:lstStyle/>
+          <a:p>
+            <a:pPr algn="ctr"/>
+          </a:p>
+        </p:txBody>
+      </p:sp>
+      <p:sp>
+        <p:nvSpPr>
+          <p:cNvPr id="4" name="TextBox 3"/>
+          <p:cNvSpPr txBox="1"/>
+          <p:nvPr/>
+        </p:nvSpPr>
+        <p:spPr>
+          <a:xfrm>
+            <a:off x="502920" y="109728"/>
+            <a:ext cx="9875520" cy="841248"/>
+          </a:xfrm>
+          <a:prstGeom prst="rect">
+            <a:avLst/>
+          </a:prstGeom>
+          <a:noFill/>
+        </p:spPr>
+        <p:txBody>
+          <a:bodyPr wrap="square" lIns="36576" rIns="36576" tIns="18288" bIns="18288" anchor="ctr">
+            <a:spAutoFit/>
+          </a:bodyPr>
+          <a:lstStyle/>
+          <a:p>
+            <a:pPr>
+              <a:spcAft>
+                <a:spcPts val="100"/>
+              </a:spcAft>
+            </a:pPr>
+            <a:r>
+              <a:rPr sz="1100" b="1">
+                <a:solidFill>
+                  <a:srgbClr val="A79FFF"/>
+                </a:solidFill>
+                <a:latin typeface="Segoe UI"/>
+              </a:rPr>
+              <a:t>APPENDIX · INTERNALS</a:t>
+            </a:r>
+          </a:p>
+          <a:p>
+            <a:r>
+              <a:rPr sz="2600" b="1">
+                <a:solidFill>
+                  <a:srgbClr val="FFFFFF"/>
+                </a:solidFill>
+                <a:latin typeface="Segoe UI"/>
+              </a:rPr>
+              <a:t>Why VARIANT stays fast at scale</a:t>
+            </a:r>
+          </a:p>
+        </p:txBody>
+      </p:sp>
+      <p:pic>
+        <p:nvPicPr>
+          <p:cNvPr id="5" name="Picture 4" descr="image.png"/>
+          <p:cNvPicPr>
+            <a:picLocks noChangeAspect="1"/>
+          </p:cNvPicPr>
+          <p:nvPr/>
+        </p:nvPicPr>
+        <p:blipFill>
+          <a:blip r:embed="rId2"/>
+          <a:stretch>
+            <a:fillRect/>
+          </a:stretch>
+        </p:blipFill>
+        <p:spPr>
+          <a:xfrm>
+            <a:off x="11259006" y="237744"/>
+            <a:ext cx="548640" cy="548640"/>
+          </a:xfrm>
+          <a:prstGeom prst="ellipse">
+            <a:avLst/>
+          </a:prstGeom>
+        </p:spPr>
+      </p:pic>
+      <p:sp>
+        <p:nvSpPr>
+          <p:cNvPr id="6" name="TextBox 5"/>
+          <p:cNvSpPr txBox="1"/>
+          <p:nvPr/>
+        </p:nvSpPr>
+        <p:spPr>
+          <a:xfrm>
+            <a:off x="594360" y="1371600"/>
+            <a:ext cx="6446520" cy="4297680"/>
+          </a:xfrm>
+          <a:prstGeom prst="rect">
+            <a:avLst/>
+          </a:prstGeom>
+          <a:noFill/>
+        </p:spPr>
+        <p:txBody>
+          <a:bodyPr wrap="square" lIns="36576" rIns="36576" tIns="18288" bIns="18288">
+            <a:spAutoFit/>
+          </a:bodyPr>
+          <a:lstStyle/>
+          <a:p>
+            <a:pPr>
+              <a:lnSpc>
+                <a:spcPct val="107000"/>
+              </a:lnSpc>
+              <a:spcAft>
+                <a:spcPts val="800"/>
+              </a:spcAft>
+            </a:pPr>
+            <a:r>
+              <a:rPr sz="1650">
+                <a:solidFill>
+                  <a:srgbClr val="4A3FFF"/>
+                </a:solidFill>
+                <a:latin typeface="Segoe UI"/>
+              </a:rPr>
+              <a:t>▸  </a:t>
+            </a:r>
+            <a:r>
+              <a:rPr b="1" sz="1650">
+                <a:solidFill>
+                  <a:srgbClr val="1B1B33"/>
+                </a:solidFill>
+                <a:latin typeface="Segoe UI"/>
+              </a:rPr>
+              <a:t>Not a text blob:   </a:t>
+            </a:r>
+            <a:r>
+              <a:rPr sz="1650">
+                <a:solidFill>
+                  <a:srgbClr val="1B1B33"/>
+                </a:solidFill>
+                <a:latin typeface="Segoe UI"/>
+              </a:rPr>
+              <a:t>Each micro-partition shreds consistent JSON paths into typed, compressed sub-columns with min/max stats, native-column treatment.</a:t>
+            </a:r>
+          </a:p>
+          <a:p>
+            <a:pPr>
+              <a:lnSpc>
+                <a:spcPct val="107000"/>
+              </a:lnSpc>
+              <a:spcAft>
+                <a:spcPts val="800"/>
+              </a:spcAft>
+            </a:pPr>
+            <a:r>
+              <a:rPr sz="1650">
+                <a:solidFill>
+                  <a:srgbClr val="4A3FFF"/>
+                </a:solidFill>
+                <a:latin typeface="Segoe UI"/>
+              </a:rPr>
+              <a:t>▸  </a:t>
+            </a:r>
+            <a:r>
+              <a:rPr b="1" sz="1650">
+                <a:solidFill>
+                  <a:srgbClr val="1B1B33"/>
+                </a:solidFill>
+                <a:latin typeface="Segoe UI"/>
+              </a:rPr>
+              <a:t>Projection works:   </a:t>
+            </a:r>
+            <a:r>
+              <a:rPr sz="1650">
+                <a:solidFill>
+                  <a:srgbClr val="1B1B33"/>
+                </a:solidFill>
+                <a:latin typeface="Segoe UI"/>
+              </a:rPr>
+              <a:t>Selecting payload:properties.duration_ms reads only that sub-column off disk, never the whole document.</a:t>
+            </a:r>
+          </a:p>
+          <a:p>
+            <a:pPr>
+              <a:lnSpc>
+                <a:spcPct val="107000"/>
+              </a:lnSpc>
+              <a:spcAft>
+                <a:spcPts val="800"/>
+              </a:spcAft>
+            </a:pPr>
+            <a:r>
+              <a:rPr sz="1650">
+                <a:solidFill>
+                  <a:srgbClr val="4A3FFF"/>
+                </a:solidFill>
+                <a:latin typeface="Segoe UI"/>
+              </a:rPr>
+              <a:t>▸  </a:t>
+            </a:r>
+            <a:r>
+              <a:rPr b="1" sz="1650">
+                <a:solidFill>
+                  <a:srgbClr val="1B1B33"/>
+                </a:solidFill>
+                <a:latin typeface="Segoe UI"/>
+              </a:rPr>
+              <a:t>Pruning works:   </a:t>
+            </a:r>
+            <a:r>
+              <a:rPr sz="1650">
+                <a:solidFill>
+                  <a:srgbClr val="1B1B33"/>
+                </a:solidFill>
+                <a:latin typeface="Segoe UI"/>
+              </a:rPr>
+              <a:t>Filters on extracted paths skip whole micro-partitions via metadata, scan cost tracks the answer, not the table.</a:t>
+            </a:r>
+          </a:p>
+          <a:p>
+            <a:pPr>
+              <a:lnSpc>
+                <a:spcPct val="107000"/>
+              </a:lnSpc>
+              <a:spcAft>
+                <a:spcPts val="800"/>
+              </a:spcAft>
+            </a:pPr>
+            <a:r>
+              <a:rPr sz="1650">
+                <a:solidFill>
+                  <a:srgbClr val="4A3FFF"/>
+                </a:solidFill>
+                <a:latin typeface="Segoe UI"/>
+              </a:rPr>
+              <a:t>▸  </a:t>
+            </a:r>
+            <a:r>
+              <a:rPr b="1" sz="1650">
+                <a:solidFill>
+                  <a:srgbClr val="1B1B33"/>
+                </a:solidFill>
+                <a:latin typeface="Segoe UI"/>
+              </a:rPr>
+              <a:t>When it degrades:   </a:t>
+            </a:r>
+            <a:r>
+              <a:rPr sz="1650">
+                <a:solidFill>
+                  <a:srgbClr val="1B1B33"/>
+                </a:solidFill>
+                <a:latin typeface="Segoe UI"/>
+              </a:rPr>
+              <a:t>Wildly heterogeneous keys defeat sub-columnarization, promote hot filter / dedup keys to real columns (event_id).</a:t>
+            </a:r>
+          </a:p>
+          <a:p>
+            <a:pPr>
+              <a:lnSpc>
+                <a:spcPct val="107000"/>
+              </a:lnSpc>
+              <a:spcAft>
+                <a:spcPts val="800"/>
+              </a:spcAft>
+            </a:pPr>
+            <a:r>
+              <a:rPr sz="1650">
+                <a:solidFill>
+                  <a:srgbClr val="4A3FFF"/>
+                </a:solidFill>
+                <a:latin typeface="Segoe UI"/>
+              </a:rPr>
+              <a:t>▸  </a:t>
+            </a:r>
+            <a:r>
+              <a:rPr b="1" sz="1650">
+                <a:solidFill>
+                  <a:srgbClr val="1B1B33"/>
+                </a:solidFill>
+                <a:latin typeface="Segoe UI"/>
+              </a:rPr>
+              <a:t>Discipline &amp; limits:   </a:t>
+            </a:r>
+            <a:r>
+              <a:rPr sz="1650">
+                <a:solidFill>
+                  <a:srgbClr val="1B1B33"/>
+                </a:solidFill>
+                <a:latin typeface="Segoe UI"/>
+              </a:rPr>
+              <a:t>16 MB per value (events are KBs); missing key → NULL, never an error; TRY_CAST + tests absorb type drift; marts never read payload.</a:t>
+            </a:r>
+          </a:p>
+        </p:txBody>
+      </p:sp>
+      <p:sp>
+        <p:nvSpPr>
+          <p:cNvPr id="7" name="Rounded Rectangle 6"/>
+          <p:cNvSpPr/>
+          <p:nvPr/>
+        </p:nvSpPr>
+        <p:spPr>
+          <a:xfrm>
+            <a:off x="7315200" y="1463040"/>
+            <a:ext cx="4370832" cy="4160520"/>
+          </a:xfrm>
+          <a:prstGeom prst="roundRect">
+            <a:avLst/>
+          </a:prstGeom>
+          <a:solidFill>
+            <a:srgbClr val="191552"/>
+          </a:solidFill>
+          <a:ln>
+            <a:noFill/>
+          </a:ln>
+          <a:effectLst/>
+        </p:spPr>
+        <p:style>
+          <a:lnRef idx="1">
+            <a:schemeClr val="accent1"/>
+          </a:lnRef>
+          <a:fillRef idx="3">
+            <a:schemeClr val="accent1"/>
+          </a:fillRef>
+          <a:effectRef idx="2">
+            <a:schemeClr val="accent1"/>
+          </a:effectRef>
+          <a:fontRef idx="minor">
+            <a:schemeClr val="lt1"/>
+          </a:fontRef>
+        </p:style>
+        <p:txBody>
+          <a:bodyPr rtlCol="0" anchor="ctr"/>
+          <a:lstStyle/>
+          <a:p>
+            <a:pPr algn="ctr"/>
+          </a:p>
+        </p:txBody>
+      </p:sp>
+      <p:sp>
+        <p:nvSpPr>
           <p:cNvPr id="8" name="TextBox 7"/>
           <p:cNvSpPr txBox="1"/>
           <p:nvPr/>
@@ -19246,7 +18925,7 @@
                 </a:solidFill>
                 <a:latin typeface="Consolas"/>
               </a:rPr>
-              <a:t>every load is observable</a:t>
+              <a:t>VARIANT internals (sketch)</a:t>
             </a:r>
           </a:p>
           <a:p>
@@ -19265,7 +18944,7 @@
                 </a:solidFill>
                 <a:latin typeface="Consolas"/>
               </a:rPr>
-              <a:t>-- COPY's return: per-file summary</a:t>
+              <a:t>-- inside one micro-partition,</a:t>
             </a:r>
           </a:p>
           <a:p>
@@ -19284,7 +18963,7 @@
                 </a:solidFill>
                 <a:latin typeface="Consolas"/>
               </a:rPr>
-              <a:t>--  file | status | rows_parsed |</a:t>
+              <a:t>-- payload VARIANT is stored as:</a:t>
             </a:r>
           </a:p>
           <a:p>
@@ -19303,7 +18982,7 @@
                 </a:solidFill>
                 <a:latin typeface="Consolas"/>
               </a:rPr>
-              <a:t>--  rows_loaded | first_error ...</a:t>
+              <a:t>--  :event_id            -&gt; sub-col</a:t>
             </a:r>
           </a:p>
           <a:p>
@@ -19322,7 +19001,7 @@
                 </a:solidFill>
                 <a:latin typeface="Consolas"/>
               </a:rPr>
-              <a:t>--  -&gt; Python writes it to _LOAD_LOG</a:t>
+              <a:t>--  :account_id          -&gt; sub-col</a:t>
             </a:r>
           </a:p>
           <a:p>
@@ -19334,6 +19013,15 @@
                 <a:spcPts val="100"/>
               </a:spcAft>
             </a:pPr>
+            <a:r>
+              <a:rPr sz="1000">
+                <a:solidFill>
+                  <a:srgbClr val="8ED6B0"/>
+                </a:solidFill>
+                <a:latin typeface="Consolas"/>
+              </a:rPr>
+              <a:t>--  :properties.duration_ms -&gt; sub-col</a:t>
+            </a:r>
           </a:p>
           <a:p>
             <a:pPr>
@@ -19351,7 +19039,7 @@
                 </a:solidFill>
                 <a:latin typeface="Consolas"/>
               </a:rPr>
-              <a:t>-- audit: last 14 days, this table</a:t>
+              <a:t>--  ...each with min/max stats</a:t>
             </a:r>
           </a:p>
           <a:p>
@@ -19363,15 +19051,6 @@
                 <a:spcPts val="100"/>
               </a:spcAft>
             </a:pPr>
-            <a:r>
-              <a:rPr sz="1000">
-                <a:solidFill>
-                  <a:srgbClr val="E6E9F5"/>
-                </a:solidFill>
-                <a:latin typeface="Consolas"/>
-              </a:rPr>
-              <a:t>SELECT file_name, last_load_time,</a:t>
-            </a:r>
           </a:p>
           <a:p>
             <a:pPr>
@@ -19385,11 +19064,11 @@
             <a:r>
               <a:rPr sz="1000">
                 <a:solidFill>
-                  <a:srgbClr val="E6E9F5"/>
+                  <a:srgbClr val="8ED6B0"/>
                 </a:solidFill>
                 <a:latin typeface="Consolas"/>
               </a:rPr>
-              <a:t>       row_count, error_count</a:t>
+              <a:t>-- projection: reads ONE sub-column</a:t>
             </a:r>
           </a:p>
           <a:p>
@@ -19408,7 +19087,7 @@
                 </a:solidFill>
                 <a:latin typeface="Consolas"/>
               </a:rPr>
-              <a:t>FROM TABLE(information_schema</a:t>
+              <a:t>SELECT payload:properties.duration_ms</a:t>
             </a:r>
           </a:p>
           <a:p>
@@ -19427,7 +19106,7 @@
                 </a:solidFill>
                 <a:latin typeface="Consolas"/>
               </a:rPr>
-              <a:t>  .copy_history(</a:t>
+              <a:t>FROM raw.product_events.page_views</a:t>
             </a:r>
           </a:p>
           <a:p>
@@ -19439,15 +19118,6 @@
                 <a:spcPts val="100"/>
               </a:spcAft>
             </a:pPr>
-            <a:r>
-              <a:rPr sz="1000">
-                <a:solidFill>
-                  <a:srgbClr val="E6E9F5"/>
-                </a:solidFill>
-                <a:latin typeface="Consolas"/>
-              </a:rPr>
-              <a:t>   table_name =&gt; 'PAGE_VIEWS',</a:t>
-            </a:r>
           </a:p>
           <a:p>
             <a:pPr>
@@ -19461,11 +19131,11 @@
             <a:r>
               <a:rPr sz="1000">
                 <a:solidFill>
-                  <a:srgbClr val="E6E9F5"/>
+                  <a:srgbClr val="8ED6B0"/>
                 </a:solidFill>
                 <a:latin typeface="Consolas"/>
               </a:rPr>
-              <a:t>   start_time =&gt; dateadd(day, -14,</a:t>
+              <a:t>-- pruning: skips micro-partitions</a:t>
             </a:r>
           </a:p>
           <a:p>
@@ -19484,7 +19154,7 @@
                 </a:solidFill>
                 <a:latin typeface="Consolas"/>
               </a:rPr>
-              <a:t>     current_timestamp())));</a:t>
+              <a:t>WHERE payload:event_timestamp</a:t>
             </a:r>
           </a:p>
           <a:p>
@@ -19496,6 +19166,15 @@
                 <a:spcPts val="100"/>
               </a:spcAft>
             </a:pPr>
+            <a:r>
+              <a:rPr sz="1000">
+                <a:solidFill>
+                  <a:srgbClr val="E6E9F5"/>
+                </a:solidFill>
+                <a:latin typeface="Consolas"/>
+              </a:rPr>
+              <a:t>      ::timestamp_ntz &gt;= '2026-07-01'</a:t>
+            </a:r>
           </a:p>
           <a:p>
             <a:pPr>
@@ -19506,15 +19185,6 @@
                 <a:spcPts val="100"/>
               </a:spcAft>
             </a:pPr>
-            <a:r>
-              <a:rPr sz="1000">
-                <a:solidFill>
-                  <a:srgbClr val="8ED6B0"/>
-                </a:solidFill>
-                <a:latin typeface="Consolas"/>
-              </a:rPr>
-              <a:t>-- audit: 365 days, account-wide</a:t>
-            </a:r>
           </a:p>
           <a:p>
             <a:pPr>
@@ -19528,11 +19198,11 @@
             <a:r>
               <a:rPr sz="1000">
                 <a:solidFill>
-                  <a:srgbClr val="E6E9F5"/>
+                  <a:srgbClr val="8ED6B0"/>
                 </a:solidFill>
                 <a:latin typeface="Consolas"/>
               </a:rPr>
-              <a:t>SELECT * FROM snowflake</a:t>
+              <a:t>-- drift-safe typing in staging</a:t>
             </a:r>
           </a:p>
           <a:p>
@@ -19551,7 +19221,7 @@
                 </a:solidFill>
                 <a:latin typeface="Consolas"/>
               </a:rPr>
-              <a:t>  .account_usage.copy_history;</a:t>
+              <a:t>TRY_CAST(payload:properties.duration_ms</a:t>
             </a:r>
           </a:p>
           <a:p>
@@ -19563,62 +19233,23 @@
                 <a:spcPts val="100"/>
               </a:spcAft>
             </a:pPr>
-          </a:p>
-          <a:p>
-            <a:pPr>
-              <a:lnSpc>
-                <a:spcPct val="100000"/>
-              </a:lnSpc>
-              <a:spcAft>
-                <a:spcPts val="100"/>
-              </a:spcAft>
-            </a:pPr>
             <a:r>
               <a:rPr sz="1000">
                 <a:solidFill>
+                  <a:srgbClr val="E6E9F5"/>
+                </a:solidFill>
+                <a:latin typeface="Consolas"/>
+              </a:rPr>
+              <a:t>         AS INT)  </a:t>
+            </a:r>
+            <a:r>
+              <a:rPr sz="1000">
+                <a:solidFill>
                   <a:srgbClr val="8ED6B0"/>
                 </a:solidFill>
                 <a:latin typeface="Consolas"/>
               </a:rPr>
-              <a:t>-- backfill older than 64 days</a:t>
-            </a:r>
-          </a:p>
-          <a:p>
-            <a:pPr>
-              <a:lnSpc>
-                <a:spcPct val="100000"/>
-              </a:lnSpc>
-              <a:spcAft>
-                <a:spcPts val="100"/>
-              </a:spcAft>
-            </a:pPr>
-            <a:r>
-              <a:rPr sz="1000">
-                <a:solidFill>
-                  <a:srgbClr val="E6E9F5"/>
-                </a:solidFill>
-                <a:latin typeface="Consolas"/>
-              </a:rPr>
-              <a:t>COPY INTO ...</a:t>
-            </a:r>
-          </a:p>
-          <a:p>
-            <a:pPr>
-              <a:lnSpc>
-                <a:spcPct val="100000"/>
-              </a:lnSpc>
-              <a:spcAft>
-                <a:spcPts val="100"/>
-              </a:spcAft>
-            </a:pPr>
-            <a:r>
-              <a:rPr sz="1000">
-                <a:solidFill>
-                  <a:srgbClr val="E6E9F5"/>
-                </a:solidFill>
-                <a:latin typeface="Consolas"/>
-              </a:rPr>
-              <a:t>  LOAD_UNCERTAIN_FILES = TRUE;</a:t>
+              <a:t>-- bad value -&gt; NULL</a:t>
             </a:r>
           </a:p>
         </p:txBody>
@@ -19749,7 +19380,7 @@
                 </a:solidFill>
                 <a:latin typeface="Segoe UI"/>
               </a:rPr>
-              <a:t>Snowflake logs every COPY (14-day / 365-day views) and returns a per-file summary, persisting it in _LOAD_LOG gives an audit trail that outlives every retention window.</a:t>
+              <a:t>Schema-on-read is nearly free at query time, consistent paths are columnarized on write; type once in staging, downstream never parses JSON.</a:t>
             </a:r>
           </a:p>
         </p:txBody>
@@ -21227,6 +20858,2022 @@
                 <a:latin typeface="Segoe UI"/>
               </a:rPr>
               <a:t>3</a:t>
+            </a:r>
+          </a:p>
+        </p:txBody>
+      </p:sp>
+    </p:spTree>
+  </p:cSld>
+  <p:clrMapOvr>
+    <a:masterClrMapping/>
+  </p:clrMapOvr>
+</p:sld>
+</file>
+
+<file path=ppt/slides/slide30.xml><?xml version="1.0" encoding="utf-8"?>
+<p:sld xmlns:a="http://schemas.openxmlformats.org/drawingml/2006/main" xmlns:p="http://schemas.openxmlformats.org/presentationml/2006/main" xmlns:r="http://schemas.openxmlformats.org/officeDocument/2006/relationships">
+  <p:cSld>
+    <p:bg>
+      <p:bgPr>
+        <a:solidFill>
+          <a:srgbClr val="FFFFFF"/>
+        </a:solidFill>
+        <a:effectLst/>
+      </p:bgPr>
+    </p:bg>
+    <p:spTree>
+      <p:nvGrpSpPr>
+        <p:cNvPr id="1" name=""/>
+        <p:cNvGrpSpPr/>
+        <p:nvPr/>
+      </p:nvGrpSpPr>
+      <p:grpSpPr/>
+      <p:sp>
+        <p:nvSpPr>
+          <p:cNvPr id="2" name="Rectangle 1"/>
+          <p:cNvSpPr/>
+          <p:nvPr/>
+        </p:nvSpPr>
+        <p:spPr>
+          <a:xfrm>
+            <a:off x="0" y="0"/>
+            <a:ext cx="12191695" cy="1024128"/>
+          </a:xfrm>
+          <a:prstGeom prst="rect">
+            <a:avLst/>
+          </a:prstGeom>
+          <a:solidFill>
+            <a:srgbClr val="191552"/>
+          </a:solidFill>
+          <a:ln>
+            <a:noFill/>
+          </a:ln>
+          <a:effectLst/>
+        </p:spPr>
+        <p:style>
+          <a:lnRef idx="1">
+            <a:schemeClr val="accent1"/>
+          </a:lnRef>
+          <a:fillRef idx="3">
+            <a:schemeClr val="accent1"/>
+          </a:fillRef>
+          <a:effectRef idx="2">
+            <a:schemeClr val="accent1"/>
+          </a:effectRef>
+          <a:fontRef idx="minor">
+            <a:schemeClr val="lt1"/>
+          </a:fontRef>
+        </p:style>
+        <p:txBody>
+          <a:bodyPr rtlCol="0" anchor="ctr"/>
+          <a:lstStyle/>
+          <a:p>
+            <a:pPr algn="ctr"/>
+          </a:p>
+        </p:txBody>
+      </p:sp>
+      <p:sp>
+        <p:nvSpPr>
+          <p:cNvPr id="3" name="Rectangle 2"/>
+          <p:cNvSpPr/>
+          <p:nvPr/>
+        </p:nvSpPr>
+        <p:spPr>
+          <a:xfrm>
+            <a:off x="0" y="1024128"/>
+            <a:ext cx="12191695" cy="50292"/>
+          </a:xfrm>
+          <a:prstGeom prst="rect">
+            <a:avLst/>
+          </a:prstGeom>
+          <a:solidFill>
+            <a:srgbClr val="4A3FFF"/>
+          </a:solidFill>
+          <a:ln>
+            <a:noFill/>
+          </a:ln>
+          <a:effectLst/>
+        </p:spPr>
+        <p:style>
+          <a:lnRef idx="1">
+            <a:schemeClr val="accent1"/>
+          </a:lnRef>
+          <a:fillRef idx="3">
+            <a:schemeClr val="accent1"/>
+          </a:fillRef>
+          <a:effectRef idx="2">
+            <a:schemeClr val="accent1"/>
+          </a:effectRef>
+          <a:fontRef idx="minor">
+            <a:schemeClr val="lt1"/>
+          </a:fontRef>
+        </p:style>
+        <p:txBody>
+          <a:bodyPr rtlCol="0" anchor="ctr"/>
+          <a:lstStyle/>
+          <a:p>
+            <a:pPr algn="ctr"/>
+          </a:p>
+        </p:txBody>
+      </p:sp>
+      <p:sp>
+        <p:nvSpPr>
+          <p:cNvPr id="4" name="TextBox 3"/>
+          <p:cNvSpPr txBox="1"/>
+          <p:nvPr/>
+        </p:nvSpPr>
+        <p:spPr>
+          <a:xfrm>
+            <a:off x="502920" y="109728"/>
+            <a:ext cx="9875520" cy="841248"/>
+          </a:xfrm>
+          <a:prstGeom prst="rect">
+            <a:avLst/>
+          </a:prstGeom>
+          <a:noFill/>
+        </p:spPr>
+        <p:txBody>
+          <a:bodyPr wrap="square" lIns="36576" rIns="36576" tIns="18288" bIns="18288" anchor="ctr">
+            <a:spAutoFit/>
+          </a:bodyPr>
+          <a:lstStyle/>
+          <a:p>
+            <a:pPr>
+              <a:spcAft>
+                <a:spcPts val="100"/>
+              </a:spcAft>
+            </a:pPr>
+            <a:r>
+              <a:rPr sz="1100" b="1">
+                <a:solidFill>
+                  <a:srgbClr val="A79FFF"/>
+                </a:solidFill>
+                <a:latin typeface="Segoe UI"/>
+              </a:rPr>
+              <a:t>APPENDIX · INTERNALS</a:t>
+            </a:r>
+          </a:p>
+          <a:p>
+            <a:r>
+              <a:rPr sz="2600" b="1">
+                <a:solidFill>
+                  <a:srgbClr val="FFFFFF"/>
+                </a:solidFill>
+                <a:latin typeface="Segoe UI"/>
+              </a:rPr>
+              <a:t>ADLS layout &amp; hourly loads, append-only RAW</a:t>
+            </a:r>
+          </a:p>
+        </p:txBody>
+      </p:sp>
+      <p:pic>
+        <p:nvPicPr>
+          <p:cNvPr id="5" name="Picture 4" descr="image.png"/>
+          <p:cNvPicPr>
+            <a:picLocks noChangeAspect="1"/>
+          </p:cNvPicPr>
+          <p:nvPr/>
+        </p:nvPicPr>
+        <p:blipFill>
+          <a:blip r:embed="rId2"/>
+          <a:stretch>
+            <a:fillRect/>
+          </a:stretch>
+        </p:blipFill>
+        <p:spPr>
+          <a:xfrm>
+            <a:off x="11259006" y="237744"/>
+            <a:ext cx="548640" cy="548640"/>
+          </a:xfrm>
+          <a:prstGeom prst="ellipse">
+            <a:avLst/>
+          </a:prstGeom>
+        </p:spPr>
+      </p:pic>
+      <p:sp>
+        <p:nvSpPr>
+          <p:cNvPr id="6" name="TextBox 5"/>
+          <p:cNvSpPr txBox="1"/>
+          <p:nvPr/>
+        </p:nvSpPr>
+        <p:spPr>
+          <a:xfrm>
+            <a:off x="594360" y="1371600"/>
+            <a:ext cx="6446520" cy="4297680"/>
+          </a:xfrm>
+          <a:prstGeom prst="rect">
+            <a:avLst/>
+          </a:prstGeom>
+          <a:noFill/>
+        </p:spPr>
+        <p:txBody>
+          <a:bodyPr wrap="square" lIns="36576" rIns="36576" tIns="18288" bIns="18288">
+            <a:spAutoFit/>
+          </a:bodyPr>
+          <a:lstStyle/>
+          <a:p>
+            <a:pPr>
+              <a:lnSpc>
+                <a:spcPct val="107000"/>
+              </a:lnSpc>
+              <a:spcAft>
+                <a:spcPts val="800"/>
+              </a:spcAft>
+            </a:pPr>
+            <a:r>
+              <a:rPr sz="1650">
+                <a:solidFill>
+                  <a:srgbClr val="4A3FFF"/>
+                </a:solidFill>
+                <a:latin typeface="Segoe UI"/>
+              </a:rPr>
+              <a:t>▸  </a:t>
+            </a:r>
+            <a:r>
+              <a:rPr b="1" sz="1650">
+                <a:solidFill>
+                  <a:srgbClr val="1B1B33"/>
+                </a:solidFill>
+                <a:latin typeface="Segoe UI"/>
+              </a:rPr>
+              <a:t>One prefix per source object:   </a:t>
+            </a:r>
+            <a:r>
+              <a:rPr sz="1650">
+                <a:solidFill>
+                  <a:srgbClr val="1B1B33"/>
+                </a:solidFill>
+                <a:latin typeface="Segoe UI"/>
+              </a:rPr>
+              <a:t>Source/object/dt=YYYY-MM-DD/hr=HH/, hourly runs list one narrow prefix; backfill = re-point at a date range; lifecycle rules attach per prefix.</a:t>
+            </a:r>
+          </a:p>
+          <a:p>
+            <a:pPr>
+              <a:lnSpc>
+                <a:spcPct val="107000"/>
+              </a:lnSpc>
+              <a:spcAft>
+                <a:spcPts val="800"/>
+              </a:spcAft>
+            </a:pPr>
+            <a:r>
+              <a:rPr sz="1650">
+                <a:solidFill>
+                  <a:srgbClr val="4A3FFF"/>
+                </a:solidFill>
+                <a:latin typeface="Segoe UI"/>
+              </a:rPr>
+              <a:t>▸  </a:t>
+            </a:r>
+            <a:r>
+              <a:rPr b="1" sz="1650">
+                <a:solidFill>
+                  <a:srgbClr val="1B1B33"/>
+                </a:solidFill>
+                <a:latin typeface="Segoe UI"/>
+              </a:rPr>
+              <a:t>Append new files, never replace:   </a:t>
+            </a:r>
+            <a:r>
+              <a:rPr sz="1650">
+                <a:solidFill>
+                  <a:srgbClr val="1B1B33"/>
+                </a:solidFill>
+                <a:latin typeface="Segoe UI"/>
+              </a:rPr>
+              <a:t>RAW is an immutable log, not a mirror, 'latest' applies to which files we read this run, not to what we keep.</a:t>
+            </a:r>
+          </a:p>
+          <a:p>
+            <a:pPr>
+              <a:lnSpc>
+                <a:spcPct val="107000"/>
+              </a:lnSpc>
+              <a:spcAft>
+                <a:spcPts val="800"/>
+              </a:spcAft>
+            </a:pPr>
+            <a:r>
+              <a:rPr sz="1650">
+                <a:solidFill>
+                  <a:srgbClr val="4A3FFF"/>
+                </a:solidFill>
+                <a:latin typeface="Segoe UI"/>
+              </a:rPr>
+              <a:t>▸  </a:t>
+            </a:r>
+            <a:r>
+              <a:rPr b="1" sz="1650">
+                <a:solidFill>
+                  <a:srgbClr val="1B1B33"/>
+                </a:solidFill>
+                <a:latin typeface="Segoe UI"/>
+              </a:rPr>
+              <a:t>Idempotent in three layers:   </a:t>
+            </a:r>
+            <a:r>
+              <a:rPr sz="1650">
+                <a:solidFill>
+                  <a:srgbClr val="1B1B33"/>
+                </a:solidFill>
+                <a:latin typeface="Segoe UI"/>
+              </a:rPr>
+              <a:t>COPY's 64-day file-load history (re-run loads zero) · _LOAD_LOG watermark + trailing-window rescan for late files · event_id dedup in staging.</a:t>
+            </a:r>
+          </a:p>
+          <a:p>
+            <a:pPr>
+              <a:lnSpc>
+                <a:spcPct val="107000"/>
+              </a:lnSpc>
+              <a:spcAft>
+                <a:spcPts val="800"/>
+              </a:spcAft>
+            </a:pPr>
+            <a:r>
+              <a:rPr sz="1650">
+                <a:solidFill>
+                  <a:srgbClr val="4A3FFF"/>
+                </a:solidFill>
+                <a:latin typeface="Segoe UI"/>
+              </a:rPr>
+              <a:t>▸  </a:t>
+            </a:r>
+            <a:r>
+              <a:rPr b="1" sz="1650">
+                <a:solidFill>
+                  <a:srgbClr val="1B1B33"/>
+                </a:solidFill>
+                <a:latin typeface="Segoe UI"/>
+              </a:rPr>
+              <a:t>Full refresh without mutation:   </a:t>
+            </a:r>
+            <a:r>
+              <a:rPr sz="1650">
+                <a:solidFill>
+                  <a:srgbClr val="1B1B33"/>
+                </a:solidFill>
+                <a:latin typeface="Segoe UI"/>
+              </a:rPr>
+              <a:t>COPY FORCE=TRUE into a fresh table, then ALTER TABLE SWAP, rebuild history, never edit it.</a:t>
+            </a:r>
+          </a:p>
+          <a:p>
+            <a:pPr>
+              <a:lnSpc>
+                <a:spcPct val="107000"/>
+              </a:lnSpc>
+              <a:spcAft>
+                <a:spcPts val="800"/>
+              </a:spcAft>
+            </a:pPr>
+            <a:r>
+              <a:rPr sz="1650">
+                <a:solidFill>
+                  <a:srgbClr val="4A3FFF"/>
+                </a:solidFill>
+                <a:latin typeface="Segoe UI"/>
+              </a:rPr>
+              <a:t>▸  </a:t>
+            </a:r>
+            <a:r>
+              <a:rPr b="1" sz="1650">
+                <a:solidFill>
+                  <a:srgbClr val="1B1B33"/>
+                </a:solidFill>
+                <a:latin typeface="Segoe UI"/>
+              </a:rPr>
+              <a:t>COPY now, Snowpipe next:   </a:t>
+            </a:r>
+            <a:r>
+              <a:rPr sz="1650">
+                <a:solidFill>
+                  <a:srgbClr val="1B1B33"/>
+                </a:solidFill>
+                <a:latin typeface="Segoe UI"/>
+              </a:rPr>
+              <a:t>Scheduled Python + COPY keeps validation / quarantine / _LOAD_LOG in code; production evolution: Snowpipe auto-ingest per S3 event, no scheduler.</a:t>
+            </a:r>
+          </a:p>
+        </p:txBody>
+      </p:sp>
+      <p:sp>
+        <p:nvSpPr>
+          <p:cNvPr id="7" name="Rounded Rectangle 6"/>
+          <p:cNvSpPr/>
+          <p:nvPr/>
+        </p:nvSpPr>
+        <p:spPr>
+          <a:xfrm>
+            <a:off x="7315200" y="1463040"/>
+            <a:ext cx="4370832" cy="4160520"/>
+          </a:xfrm>
+          <a:prstGeom prst="roundRect">
+            <a:avLst/>
+          </a:prstGeom>
+          <a:solidFill>
+            <a:srgbClr val="191552"/>
+          </a:solidFill>
+          <a:ln>
+            <a:noFill/>
+          </a:ln>
+          <a:effectLst/>
+        </p:spPr>
+        <p:style>
+          <a:lnRef idx="1">
+            <a:schemeClr val="accent1"/>
+          </a:lnRef>
+          <a:fillRef idx="3">
+            <a:schemeClr val="accent1"/>
+          </a:fillRef>
+          <a:effectRef idx="2">
+            <a:schemeClr val="accent1"/>
+          </a:effectRef>
+          <a:fontRef idx="minor">
+            <a:schemeClr val="lt1"/>
+          </a:fontRef>
+        </p:style>
+        <p:txBody>
+          <a:bodyPr rtlCol="0" anchor="ctr"/>
+          <a:lstStyle/>
+          <a:p>
+            <a:pPr algn="ctr"/>
+          </a:p>
+        </p:txBody>
+      </p:sp>
+      <p:sp>
+        <p:nvSpPr>
+          <p:cNvPr id="8" name="TextBox 7"/>
+          <p:cNvSpPr txBox="1"/>
+          <p:nvPr/>
+        </p:nvSpPr>
+        <p:spPr>
+          <a:xfrm>
+            <a:off x="7461504" y="1572768"/>
+            <a:ext cx="4078224" cy="3941063"/>
+          </a:xfrm>
+          <a:prstGeom prst="rect">
+            <a:avLst/>
+          </a:prstGeom>
+          <a:noFill/>
+        </p:spPr>
+        <p:txBody>
+          <a:bodyPr wrap="none" lIns="36576" rIns="36576" tIns="18288" bIns="18288" anchor="t">
+            <a:spAutoFit/>
+          </a:bodyPr>
+          <a:lstStyle/>
+          <a:p>
+            <a:pPr>
+              <a:spcAft>
+                <a:spcPts val="600"/>
+              </a:spcAft>
+            </a:pPr>
+            <a:r>
+              <a:rPr sz="1000" b="1">
+                <a:solidFill>
+                  <a:srgbClr val="A79FFF"/>
+                </a:solidFill>
+                <a:latin typeface="Consolas"/>
+              </a:rPr>
+              <a:t>land hourly, append-only</a:t>
+            </a:r>
+          </a:p>
+          <a:p>
+            <a:pPr>
+              <a:lnSpc>
+                <a:spcPct val="100000"/>
+              </a:lnSpc>
+              <a:spcAft>
+                <a:spcPts val="100"/>
+              </a:spcAft>
+            </a:pPr>
+            <a:r>
+              <a:rPr sz="1000">
+                <a:solidFill>
+                  <a:srgbClr val="E6E9F5"/>
+                </a:solidFill>
+                <a:latin typeface="Consolas"/>
+              </a:rPr>
+              <a:t>azure://snowopssa.blob.core.windows.net/</a:t>
+            </a:r>
+          </a:p>
+          <a:p>
+            <a:pPr>
+              <a:lnSpc>
+                <a:spcPct val="100000"/>
+              </a:lnSpc>
+              <a:spcAft>
+                <a:spcPts val="100"/>
+              </a:spcAft>
+            </a:pPr>
+            <a:r>
+              <a:rPr sz="1000">
+                <a:solidFill>
+                  <a:srgbClr val="E6E9F5"/>
+                </a:solidFill>
+                <a:latin typeface="Consolas"/>
+              </a:rPr>
+              <a:t>  og-telemetry/prod/product_events/</a:t>
+            </a:r>
+          </a:p>
+          <a:p>
+            <a:pPr>
+              <a:lnSpc>
+                <a:spcPct val="100000"/>
+              </a:lnSpc>
+              <a:spcAft>
+                <a:spcPts val="100"/>
+              </a:spcAft>
+            </a:pPr>
+            <a:r>
+              <a:rPr sz="1000">
+                <a:solidFill>
+                  <a:srgbClr val="E6E9F5"/>
+                </a:solidFill>
+                <a:latin typeface="Consolas"/>
+              </a:rPr>
+              <a:t>    page_views/dt=2026-07-12/hr=14/</a:t>
+            </a:r>
+          </a:p>
+          <a:p>
+            <a:pPr>
+              <a:lnSpc>
+                <a:spcPct val="100000"/>
+              </a:lnSpc>
+              <a:spcAft>
+                <a:spcPts val="100"/>
+              </a:spcAft>
+            </a:pPr>
+            <a:r>
+              <a:rPr sz="1000">
+                <a:solidFill>
+                  <a:srgbClr val="E6E9F5"/>
+                </a:solidFill>
+                <a:latin typeface="Consolas"/>
+              </a:rPr>
+              <a:t>      page_views_2026-07-12_14.json</a:t>
+            </a:r>
+          </a:p>
+          <a:p>
+            <a:pPr>
+              <a:lnSpc>
+                <a:spcPct val="100000"/>
+              </a:lnSpc>
+              <a:spcAft>
+                <a:spcPts val="100"/>
+              </a:spcAft>
+            </a:pPr>
+            <a:r>
+              <a:rPr sz="1000">
+                <a:solidFill>
+                  <a:srgbClr val="E6E9F5"/>
+                </a:solidFill>
+                <a:latin typeface="Consolas"/>
+              </a:rPr>
+              <a:t>    .../hr=15/ ...</a:t>
+            </a:r>
+          </a:p>
+          <a:p>
+            <a:pPr>
+              <a:lnSpc>
+                <a:spcPct val="100000"/>
+              </a:lnSpc>
+              <a:spcAft>
+                <a:spcPts val="100"/>
+              </a:spcAft>
+            </a:pPr>
+          </a:p>
+          <a:p>
+            <a:pPr>
+              <a:lnSpc>
+                <a:spcPct val="100000"/>
+              </a:lnSpc>
+              <a:spcAft>
+                <a:spcPts val="100"/>
+              </a:spcAft>
+            </a:pPr>
+            <a:r>
+              <a:rPr sz="1000">
+                <a:solidFill>
+                  <a:srgbClr val="8ED6B0"/>
+                </a:solidFill>
+                <a:latin typeface="Consolas"/>
+              </a:rPr>
+              <a:t>-- hourly job: append new files only</a:t>
+            </a:r>
+          </a:p>
+          <a:p>
+            <a:pPr>
+              <a:lnSpc>
+                <a:spcPct val="100000"/>
+              </a:lnSpc>
+              <a:spcAft>
+                <a:spcPts val="100"/>
+              </a:spcAft>
+            </a:pPr>
+            <a:r>
+              <a:rPr sz="1000">
+                <a:solidFill>
+                  <a:srgbClr val="E6E9F5"/>
+                </a:solidFill>
+                <a:latin typeface="Consolas"/>
+              </a:rPr>
+              <a:t>COPY INTO product_events_raw_adls.page_views</a:t>
+            </a:r>
+          </a:p>
+          <a:p>
+            <a:pPr>
+              <a:lnSpc>
+                <a:spcPct val="100000"/>
+              </a:lnSpc>
+              <a:spcAft>
+                <a:spcPts val="100"/>
+              </a:spcAft>
+            </a:pPr>
+            <a:r>
+              <a:rPr sz="1000">
+                <a:solidFill>
+                  <a:srgbClr val="E6E9F5"/>
+                </a:solidFill>
+                <a:latin typeface="Consolas"/>
+              </a:rPr>
+              <a:t>FROM @page_views_stage/dt=2026-07-12/</a:t>
+            </a:r>
+          </a:p>
+          <a:p>
+            <a:pPr>
+              <a:lnSpc>
+                <a:spcPct val="100000"/>
+              </a:lnSpc>
+              <a:spcAft>
+                <a:spcPts val="100"/>
+              </a:spcAft>
+            </a:pPr>
+            <a:r>
+              <a:rPr sz="1000">
+                <a:solidFill>
+                  <a:srgbClr val="E6E9F5"/>
+                </a:solidFill>
+                <a:latin typeface="Consolas"/>
+              </a:rPr>
+              <a:t>FILE_FORMAT = ff_json;</a:t>
+            </a:r>
+          </a:p>
+          <a:p>
+            <a:pPr>
+              <a:lnSpc>
+                <a:spcPct val="100000"/>
+              </a:lnSpc>
+              <a:spcAft>
+                <a:spcPts val="100"/>
+              </a:spcAft>
+            </a:pPr>
+            <a:r>
+              <a:rPr sz="1000">
+                <a:solidFill>
+                  <a:srgbClr val="8ED6B0"/>
+                </a:solidFill>
+                <a:latin typeface="Consolas"/>
+              </a:rPr>
+              <a:t>-- 64-day file history: re-run = 0 rows</a:t>
+            </a:r>
+          </a:p>
+          <a:p>
+            <a:pPr>
+              <a:lnSpc>
+                <a:spcPct val="100000"/>
+              </a:lnSpc>
+              <a:spcAft>
+                <a:spcPts val="100"/>
+              </a:spcAft>
+            </a:pPr>
+          </a:p>
+          <a:p>
+            <a:pPr>
+              <a:lnSpc>
+                <a:spcPct val="100000"/>
+              </a:lnSpc>
+              <a:spcAft>
+                <a:spcPts val="100"/>
+              </a:spcAft>
+            </a:pPr>
+            <a:r>
+              <a:rPr sz="1000">
+                <a:solidFill>
+                  <a:srgbClr val="8ED6B0"/>
+                </a:solidFill>
+                <a:latin typeface="Consolas"/>
+              </a:rPr>
+              <a:t>-- staging: producer resends -&gt; 1 row</a:t>
+            </a:r>
+          </a:p>
+          <a:p>
+            <a:pPr>
+              <a:lnSpc>
+                <a:spcPct val="100000"/>
+              </a:lnSpc>
+              <a:spcAft>
+                <a:spcPts val="100"/>
+              </a:spcAft>
+            </a:pPr>
+            <a:r>
+              <a:rPr sz="1000">
+                <a:solidFill>
+                  <a:srgbClr val="E6E9F5"/>
+                </a:solidFill>
+                <a:latin typeface="Consolas"/>
+              </a:rPr>
+              <a:t>QUALIFY ROW_NUMBER() OVER (</a:t>
+            </a:r>
+          </a:p>
+          <a:p>
+            <a:pPr>
+              <a:lnSpc>
+                <a:spcPct val="100000"/>
+              </a:lnSpc>
+              <a:spcAft>
+                <a:spcPts val="100"/>
+              </a:spcAft>
+            </a:pPr>
+            <a:r>
+              <a:rPr sz="1000">
+                <a:solidFill>
+                  <a:srgbClr val="E6E9F5"/>
+                </a:solidFill>
+                <a:latin typeface="Consolas"/>
+              </a:rPr>
+              <a:t>  PARTITION BY event_id</a:t>
+            </a:r>
+          </a:p>
+          <a:p>
+            <a:pPr>
+              <a:lnSpc>
+                <a:spcPct val="100000"/>
+              </a:lnSpc>
+              <a:spcAft>
+                <a:spcPts val="100"/>
+              </a:spcAft>
+            </a:pPr>
+            <a:r>
+              <a:rPr sz="1000">
+                <a:solidFill>
+                  <a:srgbClr val="E6E9F5"/>
+                </a:solidFill>
+                <a:latin typeface="Consolas"/>
+              </a:rPr>
+              <a:t>  ORDER BY loaded_at DESC) = 1</a:t>
+            </a:r>
+          </a:p>
+        </p:txBody>
+      </p:sp>
+      <p:sp>
+        <p:nvSpPr>
+          <p:cNvPr id="9" name="Rounded Rectangle 8"/>
+          <p:cNvSpPr/>
+          <p:nvPr/>
+        </p:nvSpPr>
+        <p:spPr>
+          <a:xfrm>
+            <a:off x="502920" y="5806440"/>
+            <a:ext cx="11183112" cy="457200"/>
+          </a:xfrm>
+          <a:prstGeom prst="roundRect">
+            <a:avLst/>
+          </a:prstGeom>
+          <a:solidFill>
+            <a:srgbClr val="ECEBFB"/>
+          </a:solidFill>
+          <a:ln>
+            <a:noFill/>
+          </a:ln>
+          <a:effectLst/>
+        </p:spPr>
+        <p:style>
+          <a:lnRef idx="1">
+            <a:schemeClr val="accent1"/>
+          </a:lnRef>
+          <a:fillRef idx="3">
+            <a:schemeClr val="accent1"/>
+          </a:fillRef>
+          <a:effectRef idx="2">
+            <a:schemeClr val="accent1"/>
+          </a:effectRef>
+          <a:fontRef idx="minor">
+            <a:schemeClr val="lt1"/>
+          </a:fontRef>
+        </p:style>
+        <p:txBody>
+          <a:bodyPr rtlCol="0" anchor="ctr"/>
+          <a:lstStyle/>
+          <a:p>
+            <a:pPr algn="ctr"/>
+          </a:p>
+        </p:txBody>
+      </p:sp>
+      <p:sp>
+        <p:nvSpPr>
+          <p:cNvPr id="10" name="Rectangle 9"/>
+          <p:cNvSpPr/>
+          <p:nvPr/>
+        </p:nvSpPr>
+        <p:spPr>
+          <a:xfrm>
+            <a:off x="502920" y="5806440"/>
+            <a:ext cx="82296" cy="457200"/>
+          </a:xfrm>
+          <a:prstGeom prst="rect">
+            <a:avLst/>
+          </a:prstGeom>
+          <a:solidFill>
+            <a:srgbClr val="4A3FFF"/>
+          </a:solidFill>
+          <a:ln>
+            <a:noFill/>
+          </a:ln>
+          <a:effectLst/>
+        </p:spPr>
+        <p:style>
+          <a:lnRef idx="1">
+            <a:schemeClr val="accent1"/>
+          </a:lnRef>
+          <a:fillRef idx="3">
+            <a:schemeClr val="accent1"/>
+          </a:fillRef>
+          <a:effectRef idx="2">
+            <a:schemeClr val="accent1"/>
+          </a:effectRef>
+          <a:fontRef idx="minor">
+            <a:schemeClr val="lt1"/>
+          </a:fontRef>
+        </p:style>
+        <p:txBody>
+          <a:bodyPr rtlCol="0" anchor="ctr"/>
+          <a:lstStyle/>
+          <a:p>
+            <a:pPr algn="ctr"/>
+          </a:p>
+        </p:txBody>
+      </p:sp>
+      <p:sp>
+        <p:nvSpPr>
+          <p:cNvPr id="11" name="TextBox 10"/>
+          <p:cNvSpPr txBox="1"/>
+          <p:nvPr/>
+        </p:nvSpPr>
+        <p:spPr>
+          <a:xfrm>
+            <a:off x="731520" y="5806440"/>
+            <a:ext cx="10789920" cy="457200"/>
+          </a:xfrm>
+          <a:prstGeom prst="rect">
+            <a:avLst/>
+          </a:prstGeom>
+          <a:noFill/>
+        </p:spPr>
+        <p:txBody>
+          <a:bodyPr wrap="square" lIns="36576" rIns="36576" tIns="18288" bIns="18288" anchor="ctr">
+            <a:spAutoFit/>
+          </a:bodyPr>
+          <a:lstStyle/>
+          <a:p>
+            <a:r>
+              <a:rPr b="1" sz="1300">
+                <a:solidFill>
+                  <a:srgbClr val="3B34B8"/>
+                </a:solidFill>
+                <a:latin typeface="Segoe UI"/>
+              </a:rPr>
+              <a:t>Takeaway   </a:t>
+            </a:r>
+            <a:r>
+              <a:rPr sz="1300">
+                <a:solidFill>
+                  <a:srgbClr val="1B1B33"/>
+                </a:solidFill>
+                <a:latin typeface="Segoe UI"/>
+              </a:rPr>
+              <a:t>Copy only the latest files, keep every row, append-only RAW plus three idempotency layers makes any re-run or backfill safe.</a:t>
+            </a:r>
+          </a:p>
+        </p:txBody>
+      </p:sp>
+      <p:sp>
+        <p:nvSpPr>
+          <p:cNvPr id="12" name="TextBox 11"/>
+          <p:cNvSpPr txBox="1"/>
+          <p:nvPr/>
+        </p:nvSpPr>
+        <p:spPr>
+          <a:xfrm>
+            <a:off x="502920" y="6455664"/>
+            <a:ext cx="7315200" cy="320040"/>
+          </a:xfrm>
+          <a:prstGeom prst="rect">
+            <a:avLst/>
+          </a:prstGeom>
+          <a:noFill/>
+        </p:spPr>
+        <p:txBody>
+          <a:bodyPr wrap="square" lIns="36576" rIns="36576" tIns="18288" bIns="18288">
+            <a:spAutoFit/>
+          </a:bodyPr>
+          <a:lstStyle/>
+          <a:p>
+            <a:r>
+              <a:rPr sz="900">
+                <a:solidFill>
+                  <a:srgbClr val="5C5B77"/>
+                </a:solidFill>
+                <a:latin typeface="Segoe UI"/>
+              </a:rPr>
+              <a:t>OpenGov Data Platform  ·  Case Study  ·  Akash Pahilwan</a:t>
+            </a:r>
+          </a:p>
+        </p:txBody>
+      </p:sp>
+      <p:sp>
+        <p:nvSpPr>
+          <p:cNvPr id="13" name="TextBox 12"/>
+          <p:cNvSpPr txBox="1"/>
+          <p:nvPr/>
+        </p:nvSpPr>
+        <p:spPr>
+          <a:xfrm>
+            <a:off x="10911535" y="6455664"/>
+            <a:ext cx="822960" cy="320040"/>
+          </a:xfrm>
+          <a:prstGeom prst="rect">
+            <a:avLst/>
+          </a:prstGeom>
+          <a:noFill/>
+        </p:spPr>
+        <p:txBody>
+          <a:bodyPr wrap="square" lIns="36576" rIns="36576" tIns="18288" bIns="18288">
+            <a:spAutoFit/>
+          </a:bodyPr>
+          <a:lstStyle/>
+          <a:p>
+            <a:pPr algn="r"/>
+            <a:r>
+              <a:rPr sz="900">
+                <a:solidFill>
+                  <a:srgbClr val="5C5B77"/>
+                </a:solidFill>
+                <a:latin typeface="Segoe UI"/>
+              </a:rPr>
+              <a:t>27</a:t>
+            </a:r>
+          </a:p>
+        </p:txBody>
+      </p:sp>
+    </p:spTree>
+  </p:cSld>
+  <p:clrMapOvr>
+    <a:masterClrMapping/>
+  </p:clrMapOvr>
+</p:sld>
+</file>
+
+<file path=ppt/slides/slide31.xml><?xml version="1.0" encoding="utf-8"?>
+<p:sld xmlns:a="http://schemas.openxmlformats.org/drawingml/2006/main" xmlns:p="http://schemas.openxmlformats.org/presentationml/2006/main" xmlns:r="http://schemas.openxmlformats.org/officeDocument/2006/relationships">
+  <p:cSld>
+    <p:bg>
+      <p:bgPr>
+        <a:solidFill>
+          <a:srgbClr val="FFFFFF"/>
+        </a:solidFill>
+        <a:effectLst/>
+      </p:bgPr>
+    </p:bg>
+    <p:spTree>
+      <p:nvGrpSpPr>
+        <p:cNvPr id="1" name=""/>
+        <p:cNvGrpSpPr/>
+        <p:nvPr/>
+      </p:nvGrpSpPr>
+      <p:grpSpPr/>
+      <p:sp>
+        <p:nvSpPr>
+          <p:cNvPr id="2" name="Rectangle 1"/>
+          <p:cNvSpPr/>
+          <p:nvPr/>
+        </p:nvSpPr>
+        <p:spPr>
+          <a:xfrm>
+            <a:off x="0" y="0"/>
+            <a:ext cx="12191695" cy="1024128"/>
+          </a:xfrm>
+          <a:prstGeom prst="rect">
+            <a:avLst/>
+          </a:prstGeom>
+          <a:solidFill>
+            <a:srgbClr val="191552"/>
+          </a:solidFill>
+          <a:ln>
+            <a:noFill/>
+          </a:ln>
+          <a:effectLst/>
+        </p:spPr>
+        <p:style>
+          <a:lnRef idx="1">
+            <a:schemeClr val="accent1"/>
+          </a:lnRef>
+          <a:fillRef idx="3">
+            <a:schemeClr val="accent1"/>
+          </a:fillRef>
+          <a:effectRef idx="2">
+            <a:schemeClr val="accent1"/>
+          </a:effectRef>
+          <a:fontRef idx="minor">
+            <a:schemeClr val="lt1"/>
+          </a:fontRef>
+        </p:style>
+        <p:txBody>
+          <a:bodyPr rtlCol="0" anchor="ctr"/>
+          <a:lstStyle/>
+          <a:p>
+            <a:pPr algn="ctr"/>
+          </a:p>
+        </p:txBody>
+      </p:sp>
+      <p:sp>
+        <p:nvSpPr>
+          <p:cNvPr id="3" name="Rectangle 2"/>
+          <p:cNvSpPr/>
+          <p:nvPr/>
+        </p:nvSpPr>
+        <p:spPr>
+          <a:xfrm>
+            <a:off x="0" y="1024128"/>
+            <a:ext cx="12191695" cy="50292"/>
+          </a:xfrm>
+          <a:prstGeom prst="rect">
+            <a:avLst/>
+          </a:prstGeom>
+          <a:solidFill>
+            <a:srgbClr val="4A3FFF"/>
+          </a:solidFill>
+          <a:ln>
+            <a:noFill/>
+          </a:ln>
+          <a:effectLst/>
+        </p:spPr>
+        <p:style>
+          <a:lnRef idx="1">
+            <a:schemeClr val="accent1"/>
+          </a:lnRef>
+          <a:fillRef idx="3">
+            <a:schemeClr val="accent1"/>
+          </a:fillRef>
+          <a:effectRef idx="2">
+            <a:schemeClr val="accent1"/>
+          </a:effectRef>
+          <a:fontRef idx="minor">
+            <a:schemeClr val="lt1"/>
+          </a:fontRef>
+        </p:style>
+        <p:txBody>
+          <a:bodyPr rtlCol="0" anchor="ctr"/>
+          <a:lstStyle/>
+          <a:p>
+            <a:pPr algn="ctr"/>
+          </a:p>
+        </p:txBody>
+      </p:sp>
+      <p:sp>
+        <p:nvSpPr>
+          <p:cNvPr id="4" name="TextBox 3"/>
+          <p:cNvSpPr txBox="1"/>
+          <p:nvPr/>
+        </p:nvSpPr>
+        <p:spPr>
+          <a:xfrm>
+            <a:off x="502920" y="109728"/>
+            <a:ext cx="9875520" cy="841248"/>
+          </a:xfrm>
+          <a:prstGeom prst="rect">
+            <a:avLst/>
+          </a:prstGeom>
+          <a:noFill/>
+        </p:spPr>
+        <p:txBody>
+          <a:bodyPr wrap="square" lIns="36576" rIns="36576" tIns="18288" bIns="18288" anchor="ctr">
+            <a:spAutoFit/>
+          </a:bodyPr>
+          <a:lstStyle/>
+          <a:p>
+            <a:pPr>
+              <a:spcAft>
+                <a:spcPts val="100"/>
+              </a:spcAft>
+            </a:pPr>
+            <a:r>
+              <a:rPr sz="1100" b="1">
+                <a:solidFill>
+                  <a:srgbClr val="A79FFF"/>
+                </a:solidFill>
+                <a:latin typeface="Segoe UI"/>
+              </a:rPr>
+              <a:t>APPENDIX · INTERNALS</a:t>
+            </a:r>
+          </a:p>
+          <a:p>
+            <a:r>
+              <a:rPr sz="2600" b="1">
+                <a:solidFill>
+                  <a:srgbClr val="FFFFFF"/>
+                </a:solidFill>
+                <a:latin typeface="Segoe UI"/>
+              </a:rPr>
+              <a:t>COPY INTO, load logs &amp; the 64-day horizon</a:t>
+            </a:r>
+          </a:p>
+        </p:txBody>
+      </p:sp>
+      <p:pic>
+        <p:nvPicPr>
+          <p:cNvPr id="5" name="Picture 4" descr="image.png"/>
+          <p:cNvPicPr>
+            <a:picLocks noChangeAspect="1"/>
+          </p:cNvPicPr>
+          <p:nvPr/>
+        </p:nvPicPr>
+        <p:blipFill>
+          <a:blip r:embed="rId2"/>
+          <a:stretch>
+            <a:fillRect/>
+          </a:stretch>
+        </p:blipFill>
+        <p:spPr>
+          <a:xfrm>
+            <a:off x="11259006" y="237744"/>
+            <a:ext cx="548640" cy="548640"/>
+          </a:xfrm>
+          <a:prstGeom prst="ellipse">
+            <a:avLst/>
+          </a:prstGeom>
+        </p:spPr>
+      </p:pic>
+      <p:sp>
+        <p:nvSpPr>
+          <p:cNvPr id="6" name="TextBox 5"/>
+          <p:cNvSpPr txBox="1"/>
+          <p:nvPr/>
+        </p:nvSpPr>
+        <p:spPr>
+          <a:xfrm>
+            <a:off x="594360" y="1371600"/>
+            <a:ext cx="6446520" cy="4297680"/>
+          </a:xfrm>
+          <a:prstGeom prst="rect">
+            <a:avLst/>
+          </a:prstGeom>
+          <a:noFill/>
+        </p:spPr>
+        <p:txBody>
+          <a:bodyPr wrap="square" lIns="36576" rIns="36576" tIns="18288" bIns="18288">
+            <a:spAutoFit/>
+          </a:bodyPr>
+          <a:lstStyle/>
+          <a:p>
+            <a:pPr>
+              <a:lnSpc>
+                <a:spcPct val="107000"/>
+              </a:lnSpc>
+              <a:spcAft>
+                <a:spcPts val="800"/>
+              </a:spcAft>
+            </a:pPr>
+            <a:r>
+              <a:rPr sz="1650">
+                <a:solidFill>
+                  <a:srgbClr val="4A3FFF"/>
+                </a:solidFill>
+                <a:latin typeface="Segoe UI"/>
+              </a:rPr>
+              <a:t>▸  </a:t>
+            </a:r>
+            <a:r>
+              <a:rPr b="1" sz="1650">
+                <a:solidFill>
+                  <a:srgbClr val="1B1B33"/>
+                </a:solidFill>
+                <a:latin typeface="Segoe UI"/>
+              </a:rPr>
+              <a:t>COPY returns a per-file result set:   </a:t>
+            </a:r>
+            <a:r>
+              <a:rPr sz="1650">
+                <a:solidFill>
+                  <a:srgbClr val="1B1B33"/>
+                </a:solidFill>
+                <a:latin typeface="Segoe UI"/>
+              </a:rPr>
+              <a:t>rows_parsed / rows_loaded / errors per file, the Python job persists it to _LOAD_LOG; ours never expires.</a:t>
+            </a:r>
+          </a:p>
+          <a:p>
+            <a:pPr>
+              <a:lnSpc>
+                <a:spcPct val="107000"/>
+              </a:lnSpc>
+              <a:spcAft>
+                <a:spcPts val="800"/>
+              </a:spcAft>
+            </a:pPr>
+            <a:r>
+              <a:rPr sz="1650">
+                <a:solidFill>
+                  <a:srgbClr val="4A3FFF"/>
+                </a:solidFill>
+                <a:latin typeface="Segoe UI"/>
+              </a:rPr>
+              <a:t>▸  </a:t>
+            </a:r>
+            <a:r>
+              <a:rPr b="1" sz="1650">
+                <a:solidFill>
+                  <a:srgbClr val="1B1B33"/>
+                </a:solidFill>
+                <a:latin typeface="Segoe UI"/>
+              </a:rPr>
+              <a:t>Built-in audit views:   </a:t>
+            </a:r>
+            <a:r>
+              <a:rPr sz="1650">
+                <a:solidFill>
+                  <a:srgbClr val="1B1B33"/>
+                </a:solidFill>
+                <a:latin typeface="Segoe UI"/>
+              </a:rPr>
+              <a:t>COPY_HISTORY table function = 14 days, per table; ACCOUNT_USAGE = 365 days, account-wide (~90 min lag).</a:t>
+            </a:r>
+          </a:p>
+          <a:p>
+            <a:pPr>
+              <a:lnSpc>
+                <a:spcPct val="107000"/>
+              </a:lnSpc>
+              <a:spcAft>
+                <a:spcPts val="800"/>
+              </a:spcAft>
+            </a:pPr>
+            <a:r>
+              <a:rPr sz="1650">
+                <a:solidFill>
+                  <a:srgbClr val="4A3FFF"/>
+                </a:solidFill>
+                <a:latin typeface="Segoe UI"/>
+              </a:rPr>
+              <a:t>▸  </a:t>
+            </a:r>
+            <a:r>
+              <a:rPr b="1" sz="1650">
+                <a:solidFill>
+                  <a:srgbClr val="1B1B33"/>
+                </a:solidFill>
+                <a:latin typeface="Segoe UI"/>
+              </a:rPr>
+              <a:t>The 64-day dedup horizon:   </a:t>
+            </a:r>
+            <a:r>
+              <a:rPr sz="1650">
+                <a:solidFill>
+                  <a:srgbClr val="1B1B33"/>
+                </a:solidFill>
+                <a:latin typeface="Segoe UI"/>
+              </a:rPr>
+              <a:t>The internal metadata COPY uses to skip already-loaded files expires after 64 days, separate from the audit views.</a:t>
+            </a:r>
+          </a:p>
+          <a:p>
+            <a:pPr>
+              <a:lnSpc>
+                <a:spcPct val="107000"/>
+              </a:lnSpc>
+              <a:spcAft>
+                <a:spcPts val="800"/>
+              </a:spcAft>
+            </a:pPr>
+            <a:r>
+              <a:rPr sz="1650">
+                <a:solidFill>
+                  <a:srgbClr val="4A3FFF"/>
+                </a:solidFill>
+                <a:latin typeface="Segoe UI"/>
+              </a:rPr>
+              <a:t>▸  </a:t>
+            </a:r>
+            <a:r>
+              <a:rPr b="1" sz="1650">
+                <a:solidFill>
+                  <a:srgbClr val="1B1B33"/>
+                </a:solidFill>
+                <a:latin typeface="Segoe UI"/>
+              </a:rPr>
+              <a:t>Beyond 64 days = silent skip:   </a:t>
+            </a:r>
+            <a:r>
+              <a:rPr sz="1650">
+                <a:solidFill>
+                  <a:srgbClr val="1B1B33"/>
+                </a:solidFill>
+                <a:latin typeface="Segoe UI"/>
+              </a:rPr>
+              <a:t>Unknown-status files are skipped, a silent gap, not duplicates; backfill via LOAD_UNCERTAIN_FILES=TRUE or FORCE + SWAP.</a:t>
+            </a:r>
+          </a:p>
+          <a:p>
+            <a:pPr>
+              <a:lnSpc>
+                <a:spcPct val="107000"/>
+              </a:lnSpc>
+              <a:spcAft>
+                <a:spcPts val="800"/>
+              </a:spcAft>
+            </a:pPr>
+            <a:r>
+              <a:rPr sz="1650">
+                <a:solidFill>
+                  <a:srgbClr val="4A3FFF"/>
+                </a:solidFill>
+                <a:latin typeface="Segoe UI"/>
+              </a:rPr>
+              <a:t>▸  </a:t>
+            </a:r>
+            <a:r>
+              <a:rPr b="1" sz="1650">
+                <a:solidFill>
+                  <a:srgbClr val="1B1B33"/>
+                </a:solidFill>
+                <a:latin typeface="Segoe UI"/>
+              </a:rPr>
+              <a:t>Why three layers:   </a:t>
+            </a:r>
+            <a:r>
+              <a:rPr sz="1650">
+                <a:solidFill>
+                  <a:srgbClr val="1B1B33"/>
+                </a:solidFill>
+                <a:latin typeface="Segoe UI"/>
+              </a:rPr>
+              <a:t>COPY history expires · watermarks miss late files · event_id dedup in staging never expires.</a:t>
+            </a:r>
+          </a:p>
+        </p:txBody>
+      </p:sp>
+      <p:sp>
+        <p:nvSpPr>
+          <p:cNvPr id="7" name="Rounded Rectangle 6"/>
+          <p:cNvSpPr/>
+          <p:nvPr/>
+        </p:nvSpPr>
+        <p:spPr>
+          <a:xfrm>
+            <a:off x="7315200" y="1463040"/>
+            <a:ext cx="4370832" cy="4160520"/>
+          </a:xfrm>
+          <a:prstGeom prst="roundRect">
+            <a:avLst/>
+          </a:prstGeom>
+          <a:solidFill>
+            <a:srgbClr val="191552"/>
+          </a:solidFill>
+          <a:ln>
+            <a:noFill/>
+          </a:ln>
+          <a:effectLst/>
+        </p:spPr>
+        <p:style>
+          <a:lnRef idx="1">
+            <a:schemeClr val="accent1"/>
+          </a:lnRef>
+          <a:fillRef idx="3">
+            <a:schemeClr val="accent1"/>
+          </a:fillRef>
+          <a:effectRef idx="2">
+            <a:schemeClr val="accent1"/>
+          </a:effectRef>
+          <a:fontRef idx="minor">
+            <a:schemeClr val="lt1"/>
+          </a:fontRef>
+        </p:style>
+        <p:txBody>
+          <a:bodyPr rtlCol="0" anchor="ctr"/>
+          <a:lstStyle/>
+          <a:p>
+            <a:pPr algn="ctr"/>
+          </a:p>
+        </p:txBody>
+      </p:sp>
+      <p:sp>
+        <p:nvSpPr>
+          <p:cNvPr id="8" name="TextBox 7"/>
+          <p:cNvSpPr txBox="1"/>
+          <p:nvPr/>
+        </p:nvSpPr>
+        <p:spPr>
+          <a:xfrm>
+            <a:off x="7461504" y="1572768"/>
+            <a:ext cx="4078224" cy="3941063"/>
+          </a:xfrm>
+          <a:prstGeom prst="rect">
+            <a:avLst/>
+          </a:prstGeom>
+          <a:noFill/>
+        </p:spPr>
+        <p:txBody>
+          <a:bodyPr wrap="none" lIns="36576" rIns="36576" tIns="18288" bIns="18288" anchor="t">
+            <a:spAutoFit/>
+          </a:bodyPr>
+          <a:lstStyle/>
+          <a:p>
+            <a:pPr>
+              <a:spcAft>
+                <a:spcPts val="600"/>
+              </a:spcAft>
+            </a:pPr>
+            <a:r>
+              <a:rPr sz="1000" b="1">
+                <a:solidFill>
+                  <a:srgbClr val="A79FFF"/>
+                </a:solidFill>
+                <a:latin typeface="Consolas"/>
+              </a:rPr>
+              <a:t>every load is observable</a:t>
+            </a:r>
+          </a:p>
+          <a:p>
+            <a:pPr>
+              <a:lnSpc>
+                <a:spcPct val="100000"/>
+              </a:lnSpc>
+              <a:spcAft>
+                <a:spcPts val="100"/>
+              </a:spcAft>
+            </a:pPr>
+            <a:r>
+              <a:rPr sz="1000">
+                <a:solidFill>
+                  <a:srgbClr val="8ED6B0"/>
+                </a:solidFill>
+                <a:latin typeface="Consolas"/>
+              </a:rPr>
+              <a:t>-- COPY's return: per-file summary</a:t>
+            </a:r>
+          </a:p>
+          <a:p>
+            <a:pPr>
+              <a:lnSpc>
+                <a:spcPct val="100000"/>
+              </a:lnSpc>
+              <a:spcAft>
+                <a:spcPts val="100"/>
+              </a:spcAft>
+            </a:pPr>
+            <a:r>
+              <a:rPr sz="1000">
+                <a:solidFill>
+                  <a:srgbClr val="8ED6B0"/>
+                </a:solidFill>
+                <a:latin typeface="Consolas"/>
+              </a:rPr>
+              <a:t>--  file | status | rows_parsed |</a:t>
+            </a:r>
+          </a:p>
+          <a:p>
+            <a:pPr>
+              <a:lnSpc>
+                <a:spcPct val="100000"/>
+              </a:lnSpc>
+              <a:spcAft>
+                <a:spcPts val="100"/>
+              </a:spcAft>
+            </a:pPr>
+            <a:r>
+              <a:rPr sz="1000">
+                <a:solidFill>
+                  <a:srgbClr val="8ED6B0"/>
+                </a:solidFill>
+                <a:latin typeface="Consolas"/>
+              </a:rPr>
+              <a:t>--  rows_loaded | first_error ...</a:t>
+            </a:r>
+          </a:p>
+          <a:p>
+            <a:pPr>
+              <a:lnSpc>
+                <a:spcPct val="100000"/>
+              </a:lnSpc>
+              <a:spcAft>
+                <a:spcPts val="100"/>
+              </a:spcAft>
+            </a:pPr>
+            <a:r>
+              <a:rPr sz="1000">
+                <a:solidFill>
+                  <a:srgbClr val="8ED6B0"/>
+                </a:solidFill>
+                <a:latin typeface="Consolas"/>
+              </a:rPr>
+              <a:t>--  -&gt; Python writes it to _LOAD_LOG</a:t>
+            </a:r>
+          </a:p>
+          <a:p>
+            <a:pPr>
+              <a:lnSpc>
+                <a:spcPct val="100000"/>
+              </a:lnSpc>
+              <a:spcAft>
+                <a:spcPts val="100"/>
+              </a:spcAft>
+            </a:pPr>
+          </a:p>
+          <a:p>
+            <a:pPr>
+              <a:lnSpc>
+                <a:spcPct val="100000"/>
+              </a:lnSpc>
+              <a:spcAft>
+                <a:spcPts val="100"/>
+              </a:spcAft>
+            </a:pPr>
+            <a:r>
+              <a:rPr sz="1000">
+                <a:solidFill>
+                  <a:srgbClr val="8ED6B0"/>
+                </a:solidFill>
+                <a:latin typeface="Consolas"/>
+              </a:rPr>
+              <a:t>-- audit: last 14 days, this table</a:t>
+            </a:r>
+          </a:p>
+          <a:p>
+            <a:pPr>
+              <a:lnSpc>
+                <a:spcPct val="100000"/>
+              </a:lnSpc>
+              <a:spcAft>
+                <a:spcPts val="100"/>
+              </a:spcAft>
+            </a:pPr>
+            <a:r>
+              <a:rPr sz="1000">
+                <a:solidFill>
+                  <a:srgbClr val="E6E9F5"/>
+                </a:solidFill>
+                <a:latin typeface="Consolas"/>
+              </a:rPr>
+              <a:t>SELECT file_name, last_load_time,</a:t>
+            </a:r>
+          </a:p>
+          <a:p>
+            <a:pPr>
+              <a:lnSpc>
+                <a:spcPct val="100000"/>
+              </a:lnSpc>
+              <a:spcAft>
+                <a:spcPts val="100"/>
+              </a:spcAft>
+            </a:pPr>
+            <a:r>
+              <a:rPr sz="1000">
+                <a:solidFill>
+                  <a:srgbClr val="E6E9F5"/>
+                </a:solidFill>
+                <a:latin typeface="Consolas"/>
+              </a:rPr>
+              <a:t>       row_count, error_count</a:t>
+            </a:r>
+          </a:p>
+          <a:p>
+            <a:pPr>
+              <a:lnSpc>
+                <a:spcPct val="100000"/>
+              </a:lnSpc>
+              <a:spcAft>
+                <a:spcPts val="100"/>
+              </a:spcAft>
+            </a:pPr>
+            <a:r>
+              <a:rPr sz="1000">
+                <a:solidFill>
+                  <a:srgbClr val="E6E9F5"/>
+                </a:solidFill>
+                <a:latin typeface="Consolas"/>
+              </a:rPr>
+              <a:t>FROM TABLE(information_schema</a:t>
+            </a:r>
+          </a:p>
+          <a:p>
+            <a:pPr>
+              <a:lnSpc>
+                <a:spcPct val="100000"/>
+              </a:lnSpc>
+              <a:spcAft>
+                <a:spcPts val="100"/>
+              </a:spcAft>
+            </a:pPr>
+            <a:r>
+              <a:rPr sz="1000">
+                <a:solidFill>
+                  <a:srgbClr val="E6E9F5"/>
+                </a:solidFill>
+                <a:latin typeface="Consolas"/>
+              </a:rPr>
+              <a:t>  .copy_history(</a:t>
+            </a:r>
+          </a:p>
+          <a:p>
+            <a:pPr>
+              <a:lnSpc>
+                <a:spcPct val="100000"/>
+              </a:lnSpc>
+              <a:spcAft>
+                <a:spcPts val="100"/>
+              </a:spcAft>
+            </a:pPr>
+            <a:r>
+              <a:rPr sz="1000">
+                <a:solidFill>
+                  <a:srgbClr val="E6E9F5"/>
+                </a:solidFill>
+                <a:latin typeface="Consolas"/>
+              </a:rPr>
+              <a:t>   table_name =&gt; 'PAGE_VIEWS',</a:t>
+            </a:r>
+          </a:p>
+          <a:p>
+            <a:pPr>
+              <a:lnSpc>
+                <a:spcPct val="100000"/>
+              </a:lnSpc>
+              <a:spcAft>
+                <a:spcPts val="100"/>
+              </a:spcAft>
+            </a:pPr>
+            <a:r>
+              <a:rPr sz="1000">
+                <a:solidFill>
+                  <a:srgbClr val="E6E9F5"/>
+                </a:solidFill>
+                <a:latin typeface="Consolas"/>
+              </a:rPr>
+              <a:t>   start_time =&gt; dateadd(day, -14,</a:t>
+            </a:r>
+          </a:p>
+          <a:p>
+            <a:pPr>
+              <a:lnSpc>
+                <a:spcPct val="100000"/>
+              </a:lnSpc>
+              <a:spcAft>
+                <a:spcPts val="100"/>
+              </a:spcAft>
+            </a:pPr>
+            <a:r>
+              <a:rPr sz="1000">
+                <a:solidFill>
+                  <a:srgbClr val="E6E9F5"/>
+                </a:solidFill>
+                <a:latin typeface="Consolas"/>
+              </a:rPr>
+              <a:t>     current_timestamp())));</a:t>
+            </a:r>
+          </a:p>
+          <a:p>
+            <a:pPr>
+              <a:lnSpc>
+                <a:spcPct val="100000"/>
+              </a:lnSpc>
+              <a:spcAft>
+                <a:spcPts val="100"/>
+              </a:spcAft>
+            </a:pPr>
+          </a:p>
+          <a:p>
+            <a:pPr>
+              <a:lnSpc>
+                <a:spcPct val="100000"/>
+              </a:lnSpc>
+              <a:spcAft>
+                <a:spcPts val="100"/>
+              </a:spcAft>
+            </a:pPr>
+            <a:r>
+              <a:rPr sz="1000">
+                <a:solidFill>
+                  <a:srgbClr val="8ED6B0"/>
+                </a:solidFill>
+                <a:latin typeface="Consolas"/>
+              </a:rPr>
+              <a:t>-- audit: 365 days, account-wide</a:t>
+            </a:r>
+          </a:p>
+          <a:p>
+            <a:pPr>
+              <a:lnSpc>
+                <a:spcPct val="100000"/>
+              </a:lnSpc>
+              <a:spcAft>
+                <a:spcPts val="100"/>
+              </a:spcAft>
+            </a:pPr>
+            <a:r>
+              <a:rPr sz="1000">
+                <a:solidFill>
+                  <a:srgbClr val="E6E9F5"/>
+                </a:solidFill>
+                <a:latin typeface="Consolas"/>
+              </a:rPr>
+              <a:t>SELECT * FROM snowflake</a:t>
+            </a:r>
+          </a:p>
+          <a:p>
+            <a:pPr>
+              <a:lnSpc>
+                <a:spcPct val="100000"/>
+              </a:lnSpc>
+              <a:spcAft>
+                <a:spcPts val="100"/>
+              </a:spcAft>
+            </a:pPr>
+            <a:r>
+              <a:rPr sz="1000">
+                <a:solidFill>
+                  <a:srgbClr val="E6E9F5"/>
+                </a:solidFill>
+                <a:latin typeface="Consolas"/>
+              </a:rPr>
+              <a:t>  .account_usage.copy_history;</a:t>
+            </a:r>
+          </a:p>
+          <a:p>
+            <a:pPr>
+              <a:lnSpc>
+                <a:spcPct val="100000"/>
+              </a:lnSpc>
+              <a:spcAft>
+                <a:spcPts val="100"/>
+              </a:spcAft>
+            </a:pPr>
+          </a:p>
+          <a:p>
+            <a:pPr>
+              <a:lnSpc>
+                <a:spcPct val="100000"/>
+              </a:lnSpc>
+              <a:spcAft>
+                <a:spcPts val="100"/>
+              </a:spcAft>
+            </a:pPr>
+            <a:r>
+              <a:rPr sz="1000">
+                <a:solidFill>
+                  <a:srgbClr val="8ED6B0"/>
+                </a:solidFill>
+                <a:latin typeface="Consolas"/>
+              </a:rPr>
+              <a:t>-- backfill older than 64 days</a:t>
+            </a:r>
+          </a:p>
+          <a:p>
+            <a:pPr>
+              <a:lnSpc>
+                <a:spcPct val="100000"/>
+              </a:lnSpc>
+              <a:spcAft>
+                <a:spcPts val="100"/>
+              </a:spcAft>
+            </a:pPr>
+            <a:r>
+              <a:rPr sz="1000">
+                <a:solidFill>
+                  <a:srgbClr val="E6E9F5"/>
+                </a:solidFill>
+                <a:latin typeface="Consolas"/>
+              </a:rPr>
+              <a:t>COPY INTO ...</a:t>
+            </a:r>
+          </a:p>
+          <a:p>
+            <a:pPr>
+              <a:lnSpc>
+                <a:spcPct val="100000"/>
+              </a:lnSpc>
+              <a:spcAft>
+                <a:spcPts val="100"/>
+              </a:spcAft>
+            </a:pPr>
+            <a:r>
+              <a:rPr sz="1000">
+                <a:solidFill>
+                  <a:srgbClr val="E6E9F5"/>
+                </a:solidFill>
+                <a:latin typeface="Consolas"/>
+              </a:rPr>
+              <a:t>  LOAD_UNCERTAIN_FILES = TRUE;</a:t>
+            </a:r>
+          </a:p>
+        </p:txBody>
+      </p:sp>
+      <p:sp>
+        <p:nvSpPr>
+          <p:cNvPr id="9" name="Rounded Rectangle 8"/>
+          <p:cNvSpPr/>
+          <p:nvPr/>
+        </p:nvSpPr>
+        <p:spPr>
+          <a:xfrm>
+            <a:off x="502920" y="5806440"/>
+            <a:ext cx="11183112" cy="457200"/>
+          </a:xfrm>
+          <a:prstGeom prst="roundRect">
+            <a:avLst/>
+          </a:prstGeom>
+          <a:solidFill>
+            <a:srgbClr val="ECEBFB"/>
+          </a:solidFill>
+          <a:ln>
+            <a:noFill/>
+          </a:ln>
+          <a:effectLst/>
+        </p:spPr>
+        <p:style>
+          <a:lnRef idx="1">
+            <a:schemeClr val="accent1"/>
+          </a:lnRef>
+          <a:fillRef idx="3">
+            <a:schemeClr val="accent1"/>
+          </a:fillRef>
+          <a:effectRef idx="2">
+            <a:schemeClr val="accent1"/>
+          </a:effectRef>
+          <a:fontRef idx="minor">
+            <a:schemeClr val="lt1"/>
+          </a:fontRef>
+        </p:style>
+        <p:txBody>
+          <a:bodyPr rtlCol="0" anchor="ctr"/>
+          <a:lstStyle/>
+          <a:p>
+            <a:pPr algn="ctr"/>
+          </a:p>
+        </p:txBody>
+      </p:sp>
+      <p:sp>
+        <p:nvSpPr>
+          <p:cNvPr id="10" name="Rectangle 9"/>
+          <p:cNvSpPr/>
+          <p:nvPr/>
+        </p:nvSpPr>
+        <p:spPr>
+          <a:xfrm>
+            <a:off x="502920" y="5806440"/>
+            <a:ext cx="82296" cy="457200"/>
+          </a:xfrm>
+          <a:prstGeom prst="rect">
+            <a:avLst/>
+          </a:prstGeom>
+          <a:solidFill>
+            <a:srgbClr val="4A3FFF"/>
+          </a:solidFill>
+          <a:ln>
+            <a:noFill/>
+          </a:ln>
+          <a:effectLst/>
+        </p:spPr>
+        <p:style>
+          <a:lnRef idx="1">
+            <a:schemeClr val="accent1"/>
+          </a:lnRef>
+          <a:fillRef idx="3">
+            <a:schemeClr val="accent1"/>
+          </a:fillRef>
+          <a:effectRef idx="2">
+            <a:schemeClr val="accent1"/>
+          </a:effectRef>
+          <a:fontRef idx="minor">
+            <a:schemeClr val="lt1"/>
+          </a:fontRef>
+        </p:style>
+        <p:txBody>
+          <a:bodyPr rtlCol="0" anchor="ctr"/>
+          <a:lstStyle/>
+          <a:p>
+            <a:pPr algn="ctr"/>
+          </a:p>
+        </p:txBody>
+      </p:sp>
+      <p:sp>
+        <p:nvSpPr>
+          <p:cNvPr id="11" name="TextBox 10"/>
+          <p:cNvSpPr txBox="1"/>
+          <p:nvPr/>
+        </p:nvSpPr>
+        <p:spPr>
+          <a:xfrm>
+            <a:off x="731520" y="5806440"/>
+            <a:ext cx="10789920" cy="457200"/>
+          </a:xfrm>
+          <a:prstGeom prst="rect">
+            <a:avLst/>
+          </a:prstGeom>
+          <a:noFill/>
+        </p:spPr>
+        <p:txBody>
+          <a:bodyPr wrap="square" lIns="36576" rIns="36576" tIns="18288" bIns="18288" anchor="ctr">
+            <a:spAutoFit/>
+          </a:bodyPr>
+          <a:lstStyle/>
+          <a:p>
+            <a:r>
+              <a:rPr b="1" sz="1300">
+                <a:solidFill>
+                  <a:srgbClr val="3B34B8"/>
+                </a:solidFill>
+                <a:latin typeface="Segoe UI"/>
+              </a:rPr>
+              <a:t>Takeaway   </a:t>
+            </a:r>
+            <a:r>
+              <a:rPr sz="1300">
+                <a:solidFill>
+                  <a:srgbClr val="1B1B33"/>
+                </a:solidFill>
+                <a:latin typeface="Segoe UI"/>
+              </a:rPr>
+              <a:t>Snowflake logs every COPY (14-day / 365-day views) and returns a per-file summary, persisting it in _LOAD_LOG gives an audit trail that outlives every retention window.</a:t>
+            </a:r>
+          </a:p>
+        </p:txBody>
+      </p:sp>
+      <p:sp>
+        <p:nvSpPr>
+          <p:cNvPr id="12" name="TextBox 11"/>
+          <p:cNvSpPr txBox="1"/>
+          <p:nvPr/>
+        </p:nvSpPr>
+        <p:spPr>
+          <a:xfrm>
+            <a:off x="502920" y="6455664"/>
+            <a:ext cx="7315200" cy="320040"/>
+          </a:xfrm>
+          <a:prstGeom prst="rect">
+            <a:avLst/>
+          </a:prstGeom>
+          <a:noFill/>
+        </p:spPr>
+        <p:txBody>
+          <a:bodyPr wrap="square" lIns="36576" rIns="36576" tIns="18288" bIns="18288">
+            <a:spAutoFit/>
+          </a:bodyPr>
+          <a:lstStyle/>
+          <a:p>
+            <a:r>
+              <a:rPr sz="900">
+                <a:solidFill>
+                  <a:srgbClr val="5C5B77"/>
+                </a:solidFill>
+                <a:latin typeface="Segoe UI"/>
+              </a:rPr>
+              <a:t>OpenGov Data Platform  ·  Case Study  ·  Akash Pahilwan</a:t>
+            </a:r>
+          </a:p>
+        </p:txBody>
+      </p:sp>
+      <p:sp>
+        <p:nvSpPr>
+          <p:cNvPr id="13" name="TextBox 12"/>
+          <p:cNvSpPr txBox="1"/>
+          <p:nvPr/>
+        </p:nvSpPr>
+        <p:spPr>
+          <a:xfrm>
+            <a:off x="10911535" y="6455664"/>
+            <a:ext cx="822960" cy="320040"/>
+          </a:xfrm>
+          <a:prstGeom prst="rect">
+            <a:avLst/>
+          </a:prstGeom>
+          <a:noFill/>
+        </p:spPr>
+        <p:txBody>
+          <a:bodyPr wrap="square" lIns="36576" rIns="36576" tIns="18288" bIns="18288">
+            <a:spAutoFit/>
+          </a:bodyPr>
+          <a:lstStyle/>
+          <a:p>
+            <a:pPr algn="r"/>
+            <a:r>
+              <a:rPr sz="900">
+                <a:solidFill>
+                  <a:srgbClr val="5C5B77"/>
+                </a:solidFill>
+                <a:latin typeface="Segoe UI"/>
+              </a:rPr>
+              <a:t>28</a:t>
             </a:r>
           </a:p>
         </p:txBody>
@@ -21681,7 +23328,7 @@
                           </a:solidFill>
                           <a:latin typeface="Segoe UI"/>
                         </a:rPr>
-                        <a:t>Schema-on-write — auto-evolves its tables</a:t>
+                        <a:t>Schema-on-write, auto-evolves its tables</a:t>
                       </a:r>
                     </a:p>
                   </a:txBody>
@@ -21703,7 +23350,7 @@
                           </a:solidFill>
                           <a:latin typeface="Segoe UI"/>
                         </a:rPr>
-                        <a:t>Schema-on-read — VARIANT + contracts</a:t>
+                        <a:t>Schema-on-read, VARIANT + contracts</a:t>
                       </a:r>
                     </a:p>
                   </a:txBody>
@@ -21771,7 +23418,7 @@
                           </a:solidFill>
                           <a:latin typeface="Segoe UI"/>
                         </a:rPr>
-                        <a:t>Near-real-time — S3 event → Lambda</a:t>
+                        <a:t>Near-real-time, S3 event → Lambda</a:t>
                       </a:r>
                     </a:p>
                   </a:txBody>
@@ -21839,7 +23486,7 @@
                           </a:solidFill>
                           <a:latin typeface="Segoe UI"/>
                         </a:rPr>
-                        <a:t>Full — custom logic &amp; cost tuning</a:t>
+                        <a:t>Full, custom logic &amp; cost tuning</a:t>
                       </a:r>
                     </a:p>
                   </a:txBody>
@@ -21907,7 +23554,7 @@
                           </a:solidFill>
                           <a:latin typeface="Segoe UI"/>
                         </a:rPr>
-                        <a:t>Compute — S3 / Lambda / warehouse</a:t>
+                        <a:t>Compute, S3 / Lambda / warehouse</a:t>
                       </a:r>
                     </a:p>
                   </a:txBody>
@@ -24864,7 +26511,7 @@
                 </a:solidFill>
                 <a:latin typeface="Segoe UI"/>
               </a:rPr>
-              <a:t>Fast CI:   </a:t>
+              <a:t>Fast CI(Ideal):   </a:t>
             </a:r>
             <a:r>
               <a:rPr sz="1800">

--- a/presentation/OpenGov_Data_Platform_CaseStudy.pptx
+++ b/presentation/OpenGov_Data_Platform_CaseStudy.pptx
@@ -7371,7 +7371,7 @@
                 </a:solidFill>
                 <a:latin typeface="Segoe UI"/>
               </a:rPr>
-              <a:t>COPY_HISTORY (14d) for loads, ACCESS_HISTORY (365d) for 'who read ACCOUNT.ARR, when', POLICY_REFERENCES to prove the mask was attached.</a:t>
+              <a:t>COPY_HISTORY (14d) for loads, ACCESS_HISTORY (365d) for 'who read ACCOUNT.ARR, when'.</a:t>
             </a:r>
           </a:p>
           <a:p>
@@ -24160,7 +24160,7 @@
                 </a:solidFill>
                 <a:latin typeface="Segoe UI"/>
               </a:rPr>
-              <a:t>It types columns and ALTERs its own RAW tables on drift; the dbt source contract + tests are our CI tripwire one layer down.</a:t>
+              <a:t>It types columns and ALTERs its own RAW tables on drift; the dbt source contract + tests are our CI tripwire one layer down(If needed).</a:t>
             </a:r>
           </a:p>
         </p:txBody>
@@ -25665,7 +25665,7 @@
                 </a:solidFill>
                 <a:latin typeface="Segoe UI"/>
               </a:rPr>
-              <a:t>RAW → STAGING → MARTS → SANDBOX; clear ownership and blast-radius per layer.</a:t>
+              <a:t>RAW → STAGING → MARTS → SANDBOX(Ideal); clear ownership and blast-radius per layer.</a:t>
             </a:r>
           </a:p>
           <a:p>
@@ -25813,7 +25813,7 @@
                 </a:solidFill>
                 <a:latin typeface="Segoe UI"/>
               </a:rPr>
-              <a:t>Analyst scratch; safe to break, no downstream dependencies.</a:t>
+              <a:t>Analyst-writable scratch; readers &amp; developers read-only, admin full; safe to break, no downstream deps.</a:t>
             </a:r>
           </a:p>
           <a:p>
@@ -26446,7 +26446,7 @@
                 </a:solidFill>
                 <a:latin typeface="Segoe UI"/>
               </a:rPr>
-              <a:t>Generic + singular tests, model contracts, source freshness, exposures for BI/AI lineage.</a:t>
+              <a:t>Generic + singular tests, model contracts, source freshness(ideal), exposures for BI/AI lineage.</a:t>
             </a:r>
           </a:p>
           <a:p>
@@ -27042,7 +27042,7 @@
                 </a:solidFill>
                 <a:latin typeface="Segoe UI"/>
               </a:rPr>
-              <a:t>Default grants, PII tags, cost limits, and naming standards automatically.</a:t>
+              <a:t>Default grants, PII tags, and naming standards automatically.</a:t>
             </a:r>
           </a:p>
           <a:p>

--- a/presentation/OpenGov_Data_Platform_CaseStudy.pptx
+++ b/presentation/OpenGov_Data_Platform_CaseStudy.pptx
@@ -14759,8 +14759,8 @@
         </p:nvSpPr>
         <p:spPr>
           <a:xfrm>
-            <a:off x="640080" y="1325880"/>
-            <a:ext cx="10972800" cy="4434840"/>
+            <a:off x="640080" y="1280160"/>
+            <a:ext cx="10972800" cy="4526280"/>
           </a:xfrm>
           <a:prstGeom prst="rect">
             <a:avLst/>
@@ -14782,7 +14782,7 @@
               </a:spcAft>
             </a:pPr>
             <a:r>
-              <a:rPr sz="1550">
+              <a:rPr sz="1500">
                 <a:solidFill>
                   <a:srgbClr val="4A3FFF"/>
                 </a:solidFill>
@@ -14791,7 +14791,7 @@
               <a:t>▸  </a:t>
             </a:r>
             <a:r>
-              <a:rPr b="1" sz="1550">
+              <a:rPr b="1" sz="1500">
                 <a:solidFill>
                   <a:srgbClr val="1B1B33"/>
                 </a:solidFill>
@@ -14810,7 +14810,7 @@
               </a:spcAft>
             </a:pPr>
             <a:r>
-              <a:rPr sz="1250">
+              <a:rPr sz="1200">
                 <a:solidFill>
                   <a:srgbClr val="5C5B77"/>
                 </a:solidFill>
@@ -14819,7 +14819,7 @@
               <a:t>        ·  </a:t>
             </a:r>
             <a:r>
-              <a:rPr b="1" sz="1250">
+              <a:rPr b="1" sz="1200">
                 <a:solidFill>
                   <a:srgbClr val="1B1B33"/>
                 </a:solidFill>
@@ -14828,7 +14828,7 @@
               <a:t>Snowpipe auto-ingest   </a:t>
             </a:r>
             <a:r>
-              <a:rPr sz="1250">
+              <a:rPr sz="1200">
                 <a:solidFill>
                   <a:srgbClr val="3E3D5C"/>
                 </a:solidFill>
@@ -14847,7 +14847,7 @@
               </a:spcAft>
             </a:pPr>
             <a:r>
-              <a:rPr sz="1250">
+              <a:rPr sz="1200">
                 <a:solidFill>
                   <a:srgbClr val="5C5B77"/>
                 </a:solidFill>
@@ -14856,7 +14856,7 @@
               <a:t>        ·  </a:t>
             </a:r>
             <a:r>
-              <a:rPr b="1" sz="1250">
+              <a:rPr b="1" sz="1200">
                 <a:solidFill>
                   <a:srgbClr val="1B1B33"/>
                 </a:solidFill>
@@ -14865,7 +14865,7 @@
               <a:t>Config-driven multi-event framework   </a:t>
             </a:r>
             <a:r>
-              <a:rPr sz="1250">
+              <a:rPr sz="1200">
                 <a:solidFill>
                   <a:srgbClr val="3E3D5C"/>
                 </a:solidFill>
@@ -14884,7 +14884,7 @@
               </a:spcAft>
             </a:pPr>
             <a:r>
-              <a:rPr sz="1550">
+              <a:rPr sz="1500">
                 <a:solidFill>
                   <a:srgbClr val="4A3FFF"/>
                 </a:solidFill>
@@ -14893,7 +14893,7 @@
               <a:t>▸  </a:t>
             </a:r>
             <a:r>
-              <a:rPr b="1" sz="1550">
+              <a:rPr b="1" sz="1500">
                 <a:solidFill>
                   <a:srgbClr val="1B1B33"/>
                 </a:solidFill>
@@ -14912,7 +14912,7 @@
               </a:spcAft>
             </a:pPr>
             <a:r>
-              <a:rPr sz="1250">
+              <a:rPr sz="1200">
                 <a:solidFill>
                   <a:srgbClr val="5C5B77"/>
                 </a:solidFill>
@@ -14921,7 +14921,7 @@
               <a:t>        ·  </a:t>
             </a:r>
             <a:r>
-              <a:rPr b="1" sz="1250">
+              <a:rPr b="1" sz="1200">
                 <a:solidFill>
                   <a:srgbClr val="1B1B33"/>
                 </a:solidFill>
@@ -14930,7 +14930,7 @@
               <a:t>Slim CI (state:modified)   </a:t>
             </a:r>
             <a:r>
-              <a:rPr sz="1250">
+              <a:rPr sz="1200">
                 <a:solidFill>
                   <a:srgbClr val="3E3D5C"/>
                 </a:solidFill>
@@ -14949,7 +14949,7 @@
               </a:spcAft>
             </a:pPr>
             <a:r>
-              <a:rPr sz="1250">
+              <a:rPr sz="1200">
                 <a:solidFill>
                   <a:srgbClr val="5C5B77"/>
                 </a:solidFill>
@@ -14958,7 +14958,7 @@
               <a:t>        ·  </a:t>
             </a:r>
             <a:r>
-              <a:rPr b="1" sz="1250">
+              <a:rPr b="1" sz="1200">
                 <a:solidFill>
                   <a:srgbClr val="1B1B33"/>
                 </a:solidFill>
@@ -14967,7 +14967,7 @@
               <a:t>Domain spoke repos   </a:t>
             </a:r>
             <a:r>
-              <a:rPr sz="1250">
+              <a:rPr sz="1200">
                 <a:solidFill>
                   <a:srgbClr val="3E3D5C"/>
                 </a:solidFill>
@@ -14986,7 +14986,7 @@
               </a:spcAft>
             </a:pPr>
             <a:r>
-              <a:rPr sz="1550">
+              <a:rPr sz="1500">
                 <a:solidFill>
                   <a:srgbClr val="4A3FFF"/>
                 </a:solidFill>
@@ -14995,7 +14995,7 @@
               <a:t>▸  </a:t>
             </a:r>
             <a:r>
-              <a:rPr b="1" sz="1550">
+              <a:rPr b="1" sz="1500">
                 <a:solidFill>
                   <a:srgbClr val="1B1B33"/>
                 </a:solidFill>
@@ -15014,7 +15014,7 @@
               </a:spcAft>
             </a:pPr>
             <a:r>
-              <a:rPr sz="1250">
+              <a:rPr sz="1200">
                 <a:solidFill>
                   <a:srgbClr val="5C5B77"/>
                 </a:solidFill>
@@ -15023,7 +15023,7 @@
               <a:t>        ·  </a:t>
             </a:r>
             <a:r>
-              <a:rPr b="1" sz="1250">
+              <a:rPr b="1" sz="1200">
                 <a:solidFill>
                   <a:srgbClr val="1B1B33"/>
                 </a:solidFill>
@@ -15032,7 +15032,7 @@
               <a:t>Row-access policies   </a:t>
             </a:r>
             <a:r>
-              <a:rPr sz="1250">
+              <a:rPr sz="1200">
                 <a:solidFill>
                   <a:srgbClr val="3E3D5C"/>
                 </a:solidFill>
@@ -15051,7 +15051,7 @@
               </a:spcAft>
             </a:pPr>
             <a:r>
-              <a:rPr sz="1250">
+              <a:rPr sz="1200">
                 <a:solidFill>
                   <a:srgbClr val="5C5B77"/>
                 </a:solidFill>
@@ -15060,7 +15060,7 @@
               <a:t>        ·  </a:t>
             </a:r>
             <a:r>
-              <a:rPr b="1" sz="1250">
+              <a:rPr b="1" sz="1200">
                 <a:solidFill>
                   <a:srgbClr val="1B1B33"/>
                 </a:solidFill>
@@ -15069,13 +15069,50 @@
               <a:t>OIDC federated CI auth   </a:t>
             </a:r>
             <a:r>
-              <a:rPr sz="1250">
+              <a:rPr sz="1200">
                 <a:solidFill>
                   <a:srgbClr val="3E3D5C"/>
                 </a:solidFill>
                 <a:latin typeface="Segoe UI"/>
               </a:rPr>
               <a:t>Retire long-lived key-pairs; env-specific DEV_* / PROD_* role split for per-env isolation.</a:t>
+            </a:r>
+          </a:p>
+          <a:p>
+            <a:pPr>
+              <a:lnSpc>
+                <a:spcPct val="107000"/>
+              </a:lnSpc>
+              <a:spcAft>
+                <a:spcPts val="300"/>
+              </a:spcAft>
+            </a:pPr>
+            <a:r>
+              <a:rPr sz="1200">
+                <a:solidFill>
+                  <a:srgbClr val="5C5B77"/>
+                </a:solidFill>
+                <a:latin typeface="Segoe UI"/>
+              </a:rPr>
+              <a:t>        ·  </a:t>
+            </a:r>
+            <a:r>
+              <a:rPr b="1" sz="1200">
+                <a:solidFill>
+                  <a:srgbClr val="1B1B33"/>
+                </a:solidFill>
+                <a:latin typeface="Segoe UI"/>
+              </a:rPr>
+              <a:t>Database-per-layer + dedicated SANDBOX   </a:t>
+            </a:r>
+            <a:r>
+              <a:rPr sz="1200">
+                <a:solidFill>
+                  <a:srgbClr val="3E3D5C"/>
+                </a:solidFill>
+                <a:latin typeface="Segoe UI"/>
+              </a:rPr>
+              <a:t>RAW / STAGING / MARTS / SANDBOX as separate databases (today: schema-per-layer, one DB per env).</a:t>
             </a:r>
           </a:p>
         </p:txBody>

--- a/presentation/OpenGov_Data_Platform_CaseStudy.pptx
+++ b/presentation/OpenGov_Data_Platform_CaseStudy.pptx
@@ -672,7 +672,7 @@
           <a:lstStyle/>
           <a:p>
             <a:r>
-              <a:t>REWRITTEN to what we actually built, not generic SLA talk. Concrete artifacts: the PAGE_VIEWS_LOAD_LOG row-per-run + quarantine table give load observability and a reject rate; dbt tests gate every CI build; COPY_HISTORY / ACCESS_HISTORY / POLICY_REFERENCES are the native audit surfaces (ACCESS_HISTORY answers the ARR probe); per-role warehouses make cost attributable. Full published SLAs (freshness targets, alerting to Slack/on-call) are the honest next step on top of these.</a:t>
+              <a:t>REWRITTEN to what we actually built, not generic SLA talk. Concrete artifacts: the PAGE_VIEWS_LOAD_LOG row-per-run + quarantine table give load observability and a reject rate; dbt tests gate every CI build; QUERY_HISTORY / ACCESS_HISTORY / POLICY_REFERENCES are the native audit surfaces (ACCESS_HISTORY answers the ARR probe); per-role warehouses make cost attributable. Full published SLAs (freshness targets, alerting to Slack/on-call) are the honest next step on top of these.</a:t>
             </a:r>
           </a:p>
         </p:txBody>
@@ -1862,7 +1862,7 @@
           <a:lstStyle/>
           <a:p>
             <a:r>
-              <a:t>BONUS / HIDDEN, pull up if asked about bucket layout, hourly cadence, or 'why not Snowpipe'. Hive-style dt=/hr= prefixes sort lexicographically by time, so the watermark is just the last processed prefix; re-scan a trailing 24-48h window so late-arriving files in an old hour still load (COPY's file history dedups the overlap for free). Append-only stance: never 'replace with latest', RAW keeps every loaded row; dedup and current-state are computed in staging (QUALIFY on event_id). Snowpipe question: for the case-study deliverable I keep a scheduled Python job + COPY, because the assessed logic, schema validation, quarantine, _LOAD_LOG summary, lives in that code, and hourly batch on an XS warehouse is cheap. In production, with files landing continuously, I'd flip to Snowpipe: S3 event notification -&gt; per-file auto-ingest, exactly-once per file, ~1-minute latency, no scheduler or watermark logic at all; validation then moves to a post-load stream/task. Same table, same append-only contract, only the trigger changes. 64-day detail: COPY's per-file load history EXPIRES after 64 days. A backfill touching older files is silently SKIPPED by default (status unknown -&gt; skip, no error, a silent gap, not duplicates). Deliberate old backfill: set LOAD_UNCERTAIN_FILES=TRUE (staging's event_id dedup absorbs any repeats) or FORCE=TRUE into a fresh table + SWAP. This expiry is exactly why the design has three layers, COPY history expires, a watermark can miss late files, so event_id dedup in staging is the backstop that never expires.</a:t>
+              <a:t>BONUS / HIDDEN, pull up if asked about bucket layout, hourly cadence, or 'why not COPY / Snowpipe'. The loader does NOT use COPY INTO: it SELECTs records through the external stage (one VARIANT per event via FF_JSON), validates each in Python, then INSERTs the full set append-only, that read -&gt; branch -&gt; write is exactly what lets bad rows go to _QUARANTINE with a reason while the good rows still land, which a single COPY cannot do. Hive-style dt=/hr= prefixes sort by time, so the window scan reads only the relevant day-folders and re-scans a trailing 48h so late files in an old hour still load; --prefill catches older stragglers, --backfill re-reads all, --path one folder. Append-only stance: never 'replace with latest', RAW keeps every landed row; dedup and current-state are computed in staging (QUALIFY on event_id, newest _loaded_at). Idempotency is two honest layers: file-level, the loader skips any file already in _LOAD_LOG (re-run = 0 rows); row-level, event_id dedup in staging, which also catches a producer resend in a DIFFERENT file. Reprocess on purpose with --force-insert (append dups; staging collapses them), there is no COPY FORCE / SWAP in this path. Snowpipe question: for the deliverable I keep a scheduled Python job because the assessed logic, validation, quarantine, _LOAD_LOG, lives in that code, and hourly batch on an XS warehouse is cheap. In production, with files landing continuously, I'd flip to Event Grid -&gt; Snowpipe auto-ingest per file (~1-minute latency, no scheduler), moving validation to a post-load stream/task. Same table, same append-only contract, only the trigger changes.</a:t>
             </a:r>
           </a:p>
         </p:txBody>
@@ -1932,7 +1932,7 @@
           <a:lstStyle/>
           <a:p>
             <a:r>
-              <a:t>BONUS / HIDDEN, pull up for 'can we see what COPY loaded?' or the 64-day follow-up. Three observable layers: (1) COPY INTO itself returns a result set, one row per file with status, rows_parsed, rows_loaded, errors_seen, first_error, and the Part 2 Python job captures exactly this into _LOAD_LOG, which is the brief's load-summary requirement and lives forever. (2) COPY_HISTORY / LOAD_HISTORY: INFORMATION_SCHEMA table functions keep 14 days per table; SNOWFLAKE.ACCOUNT_USAGE views keep 365 days account-wide with up to ~90 min latency, these are audit/observability surfaces. (3) Distinct from both: the internal per-file dedup metadata COPY consults to skip already-loaded files, 64-day lifetime, not directly queryable. Beyond 64 days the load status is 'unknown' and COPY silently SKIPS the file by default (gap, not duplicates); deliberate backfills set LOAD_UNCERTAIN_FILES=TRUE and let staging's event_id dedup absorb repeats, or rebuild with FORCE=TRUE + SWAP. Close with the three-layer line: history expires, watermarks miss late files, staging dedup never expires.</a:t>
+              <a:t>BONUS / HIDDEN, pull up for 'can we see what loaded?' or the idempotency / 64-day follow-up. This loader logs itself: every file writes one _LOAD_LOG row (file_name, records_processed, records_quarantined, timestamp) in the SAME transaction as the RAW + quarantine inserts, so the load summary is atomic and lives forever in a queryable table, that's the brief's load-summary requirement. Idempotency is explicit, not implicit: each run reads SELECT DISTINCT file_name FROM _LOAD_LOG and skips anything already there, so a re-run loads zero and the authority is our own log, not engine-internal metadata. Contrast with COPY INTO (why the appendix still mentions it): COPY maintains its OWN per-file load history to skip already-loaded files, but that metadata EXPIRES after 64 days, beyond it a file's status is 'unknown' and COPY silently skips it by default (a gap, not dups), which is why COPY-based designs need LOAD_UNCERTAIN_FILES=TRUE or FORCE + SWAP for old backfills. By owning _LOAD_LOG we sidestep that horizon entirely. Native audit still applies to our INSERT path: QUERY_HISTORY + ACCESS_HISTORY (ACCOUNT_USAGE, 365 days, ~90-min lag) answer 'who loaded' and 'who read ACCOUNT.ARR, when'; COPY_HISTORY only records actual COPY loads, so it is not the surface here. One-breath close: 'we track filenames ourselves, so idempotency is a query and the load log never expires.'</a:t>
             </a:r>
           </a:p>
         </p:txBody>
@@ -7260,7 +7260,7 @@
                 </a:solidFill>
                 <a:latin typeface="Segoe UI"/>
               </a:rPr>
-              <a:t>One row per ingestion run (file, records loaded, quarantined, timestamp), an audit trail that outlives COPY's 64-day history.</a:t>
+              <a:t>One row per ingestion run (file, records loaded, quarantined, timestamp), a permanent, queryable load audit (unlike COPY's 64-day history, ours never expires).</a:t>
             </a:r>
           </a:p>
           <a:p>
@@ -7371,7 +7371,7 @@
                 </a:solidFill>
                 <a:latin typeface="Segoe UI"/>
               </a:rPr>
-              <a:t>COPY_HISTORY (14d) for loads, ACCESS_HISTORY (365d) for 'who read ACCOUNT.ARR, when'.</a:t>
+              <a:t>QUERY_HISTORY for the loader's INSERTs, ACCESS_HISTORY (365d) for 'who read ACCOUNT.ARR, when'.</a:t>
             </a:r>
           </a:p>
           <a:p>
@@ -11215,7 +11215,7 @@
                 </a:solidFill>
                 <a:latin typeface="Segoe UI"/>
               </a:rPr>
-              <a:t>One PAGE_VIEWS_LOAD_LOG row per file, file, records loaded, quarantined, timestamp, an audit trail that outlives COPY history.</a:t>
+              <a:t>One PAGE_VIEWS_LOAD_LOG row per file, file, records loaded, quarantined, timestamp, a permanent load audit (no COPY-history expiry to manage).</a:t>
             </a:r>
           </a:p>
           <a:p>
@@ -11253,43 +11253,6 @@
                 <a:latin typeface="Segoe UI"/>
               </a:rPr>
               <a:t>Per-file dedup on re-run; --path/--backfill for a folder or the full set; event_id dedup deferred to dbt staging.</a:t>
-            </a:r>
-          </a:p>
-          <a:p>
-            <a:pPr>
-              <a:lnSpc>
-                <a:spcPct val="107000"/>
-              </a:lnSpc>
-              <a:spcAft>
-                <a:spcPts val="800"/>
-              </a:spcAft>
-            </a:pPr>
-            <a:r>
-              <a:rPr sz="1650">
-                <a:solidFill>
-                  <a:srgbClr val="4A3FFF"/>
-                </a:solidFill>
-                <a:latin typeface="Segoe UI"/>
-              </a:rPr>
-              <a:t>▸  </a:t>
-            </a:r>
-            <a:r>
-              <a:rPr b="1" sz="1650">
-                <a:solidFill>
-                  <a:srgbClr val="1B1B33"/>
-                </a:solidFill>
-                <a:latin typeface="Segoe UI"/>
-              </a:rPr>
-              <a:t>As run:   </a:t>
-            </a:r>
-            <a:r>
-              <a:rPr sz="1650">
-                <a:solidFill>
-                  <a:srgbClr val="1B1B33"/>
-                </a:solidFill>
-                <a:latin typeface="Segoe UI"/>
-              </a:rPr>
-              <a:t>PROD load = 9 rows loaded, 5 quarantined; staging dedup collapsed to 5 unique events.</a:t>
             </a:r>
           </a:p>
         </p:txBody>
@@ -15066,43 +15029,6 @@
                 </a:solidFill>
                 <a:latin typeface="Segoe UI"/>
               </a:rPr>
-              <a:t>OIDC federated CI auth   </a:t>
-            </a:r>
-            <a:r>
-              <a:rPr sz="1200">
-                <a:solidFill>
-                  <a:srgbClr val="3E3D5C"/>
-                </a:solidFill>
-                <a:latin typeface="Segoe UI"/>
-              </a:rPr>
-              <a:t>Retire long-lived key-pairs; env-specific DEV_* / PROD_* role split for per-env isolation.</a:t>
-            </a:r>
-          </a:p>
-          <a:p>
-            <a:pPr>
-              <a:lnSpc>
-                <a:spcPct val="107000"/>
-              </a:lnSpc>
-              <a:spcAft>
-                <a:spcPts val="300"/>
-              </a:spcAft>
-            </a:pPr>
-            <a:r>
-              <a:rPr sz="1200">
-                <a:solidFill>
-                  <a:srgbClr val="5C5B77"/>
-                </a:solidFill>
-                <a:latin typeface="Segoe UI"/>
-              </a:rPr>
-              <a:t>        ·  </a:t>
-            </a:r>
-            <a:r>
-              <a:rPr b="1" sz="1200">
-                <a:solidFill>
-                  <a:srgbClr val="1B1B33"/>
-                </a:solidFill>
-                <a:latin typeface="Segoe UI"/>
-              </a:rPr>
               <a:t>Database-per-layer + dedicated SANDBOX   </a:t>
             </a:r>
             <a:r>
@@ -21118,7 +21044,7 @@
               </a:spcAft>
             </a:pPr>
             <a:r>
-              <a:rPr sz="1650">
+              <a:rPr sz="1600">
                 <a:solidFill>
                   <a:srgbClr val="4A3FFF"/>
                 </a:solidFill>
@@ -21127,22 +21053,22 @@
               <a:t>▸  </a:t>
             </a:r>
             <a:r>
-              <a:rPr b="1" sz="1650">
+              <a:rPr b="1" sz="1600">
                 <a:solidFill>
                   <a:srgbClr val="1B1B33"/>
                 </a:solidFill>
                 <a:latin typeface="Segoe UI"/>
               </a:rPr>
-              <a:t>One prefix per source object:   </a:t>
-            </a:r>
-            <a:r>
-              <a:rPr sz="1650">
+              <a:t>Read the stage, INSERT to RAW:   </a:t>
+            </a:r>
+            <a:r>
+              <a:rPr sz="1600">
                 <a:solidFill>
                   <a:srgbClr val="1B1B33"/>
                 </a:solidFill>
                 <a:latin typeface="Segoe UI"/>
               </a:rPr>
-              <a:t>Source/object/dt=YYYY-MM-DD/hr=HH/, hourly runs list one narrow prefix; backfill = re-point at a date range; lifecycle rules attach per prefix.</a:t>
+              <a:t>SELECT $1 through the keyless external stage → validate each row in Python → append-only INSERT, not COPY INTO, because the per-row branch to _QUARANTINE needs code between read and write.</a:t>
             </a:r>
           </a:p>
           <a:p>
@@ -21155,7 +21081,7 @@
               </a:spcAft>
             </a:pPr>
             <a:r>
-              <a:rPr sz="1650">
+              <a:rPr sz="1600">
                 <a:solidFill>
                   <a:srgbClr val="4A3FFF"/>
                 </a:solidFill>
@@ -21164,22 +21090,22 @@
               <a:t>▸  </a:t>
             </a:r>
             <a:r>
-              <a:rPr b="1" sz="1650">
+              <a:rPr b="1" sz="1600">
                 <a:solidFill>
                   <a:srgbClr val="1B1B33"/>
                 </a:solidFill>
                 <a:latin typeface="Segoe UI"/>
               </a:rPr>
-              <a:t>Append new files, never replace:   </a:t>
-            </a:r>
-            <a:r>
-              <a:rPr sz="1650">
+              <a:t>One prefix per source object:   </a:t>
+            </a:r>
+            <a:r>
+              <a:rPr sz="1600">
                 <a:solidFill>
                   <a:srgbClr val="1B1B33"/>
                 </a:solidFill>
                 <a:latin typeface="Segoe UI"/>
               </a:rPr>
-              <a:t>RAW is an immutable log, not a mirror, 'latest' applies to which files we read this run, not to what we keep.</a:t>
+              <a:t>Source/object/dt=YYYY-MM-DD/hr=HH/, the window scan lists only its day-folders and re-scans a trailing 48h for late files; --prefill for older, --backfill for all, --path for one folder.</a:t>
             </a:r>
           </a:p>
           <a:p>
@@ -21192,7 +21118,7 @@
               </a:spcAft>
             </a:pPr>
             <a:r>
-              <a:rPr sz="1650">
+              <a:rPr sz="1600">
                 <a:solidFill>
                   <a:srgbClr val="4A3FFF"/>
                 </a:solidFill>
@@ -21201,22 +21127,22 @@
               <a:t>▸  </a:t>
             </a:r>
             <a:r>
-              <a:rPr b="1" sz="1650">
+              <a:rPr b="1" sz="1600">
                 <a:solidFill>
                   <a:srgbClr val="1B1B33"/>
                 </a:solidFill>
                 <a:latin typeface="Segoe UI"/>
               </a:rPr>
-              <a:t>Idempotent in three layers:   </a:t>
-            </a:r>
-            <a:r>
-              <a:rPr sz="1650">
+              <a:t>Append new files, never replace:   </a:t>
+            </a:r>
+            <a:r>
+              <a:rPr sz="1600">
                 <a:solidFill>
                   <a:srgbClr val="1B1B33"/>
                 </a:solidFill>
                 <a:latin typeface="Segoe UI"/>
               </a:rPr>
-              <a:t>COPY's 64-day file-load history (re-run loads zero) · _LOAD_LOG watermark + trailing-window rescan for late files · event_id dedup in staging.</a:t>
+              <a:t>RAW is an immutable log, not a mirror, 'latest' is which files we read this run, not what we keep.</a:t>
             </a:r>
           </a:p>
           <a:p>
@@ -21229,7 +21155,7 @@
               </a:spcAft>
             </a:pPr>
             <a:r>
-              <a:rPr sz="1650">
+              <a:rPr sz="1600">
                 <a:solidFill>
                   <a:srgbClr val="4A3FFF"/>
                 </a:solidFill>
@@ -21238,22 +21164,22 @@
               <a:t>▸  </a:t>
             </a:r>
             <a:r>
-              <a:rPr b="1" sz="1650">
+              <a:rPr b="1" sz="1600">
                 <a:solidFill>
                   <a:srgbClr val="1B1B33"/>
                 </a:solidFill>
                 <a:latin typeface="Segoe UI"/>
               </a:rPr>
-              <a:t>Full refresh without mutation:   </a:t>
-            </a:r>
-            <a:r>
-              <a:rPr sz="1650">
+              <a:t>Idempotent in two layers:   </a:t>
+            </a:r>
+            <a:r>
+              <a:rPr sz="1600">
                 <a:solidFill>
                   <a:srgbClr val="1B1B33"/>
                 </a:solidFill>
                 <a:latin typeface="Segoe UI"/>
               </a:rPr>
-              <a:t>COPY FORCE=TRUE into a fresh table, then ALTER TABLE SWAP, rebuild history, never edit it.</a:t>
+              <a:t>File-level, the loader skips any file already in _LOAD_LOG (re-run loads zero); row-level, event_id dedup in dbt staging, which also catches a producer resend in a different file.</a:t>
             </a:r>
           </a:p>
           <a:p>
@@ -21266,7 +21192,7 @@
               </a:spcAft>
             </a:pPr>
             <a:r>
-              <a:rPr sz="1650">
+              <a:rPr sz="1600">
                 <a:solidFill>
                   <a:srgbClr val="4A3FFF"/>
                 </a:solidFill>
@@ -21275,22 +21201,22 @@
               <a:t>▸  </a:t>
             </a:r>
             <a:r>
-              <a:rPr b="1" sz="1650">
+              <a:rPr b="1" sz="1600">
                 <a:solidFill>
                   <a:srgbClr val="1B1B33"/>
                 </a:solidFill>
                 <a:latin typeface="Segoe UI"/>
               </a:rPr>
-              <a:t>COPY now, Snowpipe next:   </a:t>
-            </a:r>
-            <a:r>
-              <a:rPr sz="1650">
+              <a:t>Reprocess &amp; what's next:   </a:t>
+            </a:r>
+            <a:r>
+              <a:rPr sz="1600">
                 <a:solidFill>
                   <a:srgbClr val="1B1B33"/>
                 </a:solidFill>
                 <a:latin typeface="Segoe UI"/>
               </a:rPr>
-              <a:t>Scheduled Python + COPY keeps validation / quarantine / _LOAD_LOG in code; production evolution: Snowpipe auto-ingest per S3 event, no scheduler.</a:t>
+              <a:t>Reprocess on purpose with --force-insert (dups collapse in staging); production evolution is Event Grid → Snowpipe auto-ingest per file, no scheduler.</a:t>
             </a:r>
           </a:p>
         </p:txBody>
@@ -21373,7 +21299,7 @@
                 </a:solidFill>
                 <a:latin typeface="Consolas"/>
               </a:rPr>
-              <a:t>land hourly, append-only</a:t>
+              <a:t>stage-read → validate → append</a:t>
             </a:r>
           </a:p>
           <a:p>
@@ -21461,15 +21387,6 @@
                 <a:spcPts val="100"/>
               </a:spcAft>
             </a:pPr>
-            <a:r>
-              <a:rPr sz="1000">
-                <a:solidFill>
-                  <a:srgbClr val="E6E9F5"/>
-                </a:solidFill>
-                <a:latin typeface="Consolas"/>
-              </a:rPr>
-              <a:t>    .../hr=15/ ...</a:t>
-            </a:r>
           </a:p>
           <a:p>
             <a:pPr>
@@ -21480,6 +21397,15 @@
                 <a:spcPts val="100"/>
               </a:spcAft>
             </a:pPr>
+            <a:r>
+              <a:rPr sz="1000">
+                <a:solidFill>
+                  <a:srgbClr val="8ED6B0"/>
+                </a:solidFill>
+                <a:latin typeface="Consolas"/>
+              </a:rPr>
+              <a:t>-- 1) read THROUGH the stage (not COPY)</a:t>
+            </a:r>
           </a:p>
           <a:p>
             <a:pPr>
@@ -21493,11 +21419,11 @@
             <a:r>
               <a:rPr sz="1000">
                 <a:solidFill>
-                  <a:srgbClr val="8ED6B0"/>
+                  <a:srgbClr val="E6E9F5"/>
                 </a:solidFill>
                 <a:latin typeface="Consolas"/>
               </a:rPr>
-              <a:t>-- hourly job: append new files only</a:t>
+              <a:t>SELECT $1, METADATA$FILENAME</a:t>
             </a:r>
           </a:p>
           <a:p>
@@ -21516,7 +21442,7 @@
                 </a:solidFill>
                 <a:latin typeface="Consolas"/>
               </a:rPr>
-              <a:t>COPY INTO product_events_raw_adls.page_views</a:t>
+              <a:t>FROM @page_views_stage/dt=2026-07-12/</a:t>
             </a:r>
           </a:p>
           <a:p>
@@ -21535,7 +21461,7 @@
                 </a:solidFill>
                 <a:latin typeface="Consolas"/>
               </a:rPr>
-              <a:t>FROM @page_views_stage/dt=2026-07-12/</a:t>
+              <a:t>  (FILE_FORMAT =&gt; 'ff_json');</a:t>
             </a:r>
           </a:p>
           <a:p>
@@ -21550,11 +21476,11 @@
             <a:r>
               <a:rPr sz="1000">
                 <a:solidFill>
-                  <a:srgbClr val="E6E9F5"/>
+                  <a:srgbClr val="8ED6B0"/>
                 </a:solidFill>
                 <a:latin typeface="Consolas"/>
               </a:rPr>
-              <a:t>FILE_FORMAT = ff_json;</a:t>
+              <a:t>-- validate each row in Python, then:</a:t>
             </a:r>
           </a:p>
           <a:p>
@@ -21573,7 +21499,7 @@
                 </a:solidFill>
                 <a:latin typeface="Consolas"/>
               </a:rPr>
-              <a:t>-- 64-day file history: re-run = 0 rows</a:t>
+              <a:t>-- 2) append-only INSERT to RAW</a:t>
             </a:r>
           </a:p>
           <a:p>
@@ -21585,6 +21511,15 @@
                 <a:spcPts val="100"/>
               </a:spcAft>
             </a:pPr>
+            <a:r>
+              <a:rPr sz="1000">
+                <a:solidFill>
+                  <a:srgbClr val="E6E9F5"/>
+                </a:solidFill>
+                <a:latin typeface="Consolas"/>
+              </a:rPr>
+              <a:t>INSERT INTO ...page_views</a:t>
+            </a:r>
           </a:p>
           <a:p>
             <a:pPr>
@@ -21598,11 +21533,11 @@
             <a:r>
               <a:rPr sz="1000">
                 <a:solidFill>
-                  <a:srgbClr val="8ED6B0"/>
+                  <a:srgbClr val="E6E9F5"/>
                 </a:solidFill>
                 <a:latin typeface="Consolas"/>
               </a:rPr>
-              <a:t>-- staging: producer resends -&gt; 1 row</a:t>
+              <a:t>  SELECT ... FROM VALUES (?, ...);</a:t>
             </a:r>
           </a:p>
           <a:p>
@@ -21617,11 +21552,11 @@
             <a:r>
               <a:rPr sz="1000">
                 <a:solidFill>
-                  <a:srgbClr val="E6E9F5"/>
+                  <a:srgbClr val="8ED6B0"/>
                 </a:solidFill>
                 <a:latin typeface="Consolas"/>
               </a:rPr>
-              <a:t>QUALIFY ROW_NUMBER() OVER (</a:t>
+              <a:t>-- file already in _LOAD_LOG -&gt; skip</a:t>
             </a:r>
           </a:p>
           <a:p>
@@ -21633,15 +21568,6 @@
                 <a:spcPts val="100"/>
               </a:spcAft>
             </a:pPr>
-            <a:r>
-              <a:rPr sz="1000">
-                <a:solidFill>
-                  <a:srgbClr val="E6E9F5"/>
-                </a:solidFill>
-                <a:latin typeface="Consolas"/>
-              </a:rPr>
-              <a:t>  PARTITION BY event_id</a:t>
-            </a:r>
           </a:p>
           <a:p>
             <a:pPr>
@@ -21655,11 +21581,49 @@
             <a:r>
               <a:rPr sz="1000">
                 <a:solidFill>
+                  <a:srgbClr val="8ED6B0"/>
+                </a:solidFill>
+                <a:latin typeface="Consolas"/>
+              </a:rPr>
+              <a:t>-- staging dedup: resend -&gt; 1 row</a:t>
+            </a:r>
+          </a:p>
+          <a:p>
+            <a:pPr>
+              <a:lnSpc>
+                <a:spcPct val="100000"/>
+              </a:lnSpc>
+              <a:spcAft>
+                <a:spcPts val="100"/>
+              </a:spcAft>
+            </a:pPr>
+            <a:r>
+              <a:rPr sz="1000">
+                <a:solidFill>
                   <a:srgbClr val="E6E9F5"/>
                 </a:solidFill>
                 <a:latin typeface="Consolas"/>
               </a:rPr>
-              <a:t>  ORDER BY loaded_at DESC) = 1</a:t>
+              <a:t>QUALIFY ROW_NUMBER() OVER (PARTITION</a:t>
+            </a:r>
+          </a:p>
+          <a:p>
+            <a:pPr>
+              <a:lnSpc>
+                <a:spcPct val="100000"/>
+              </a:lnSpc>
+              <a:spcAft>
+                <a:spcPts val="100"/>
+              </a:spcAft>
+            </a:pPr>
+            <a:r>
+              <a:rPr sz="1000">
+                <a:solidFill>
+                  <a:srgbClr val="E6E9F5"/>
+                </a:solidFill>
+                <a:latin typeface="Consolas"/>
+              </a:rPr>
+              <a:t>  BY event_id ORDER BY _loaded_at) = 1</a:t>
             </a:r>
           </a:p>
         </p:txBody>
@@ -21790,7 +21754,7 @@
                 </a:solidFill>
                 <a:latin typeface="Segoe UI"/>
               </a:rPr>
-              <a:t>Copy only the latest files, keep every row, append-only RAW plus three idempotency layers makes any re-run or backfill safe.</a:t>
+              <a:t>Read only the latest files, keep every row, append-only RAW plus an explicit _LOAD_LOG skip and event_id dedup make any re-run or backfill safe.</a:t>
             </a:r>
           </a:p>
         </p:txBody>
@@ -22023,7 +21987,7 @@
                 </a:solidFill>
                 <a:latin typeface="Segoe UI"/>
               </a:rPr>
-              <a:t>COPY INTO, load logs &amp; the 64-day horizon</a:t>
+              <a:t>Load logging &amp; idempotency, our _LOAD_LOG, not COPY history</a:t>
             </a:r>
           </a:p>
         </p:txBody>
@@ -22083,7 +22047,7 @@
               </a:spcAft>
             </a:pPr>
             <a:r>
-              <a:rPr sz="1650">
+              <a:rPr sz="1600">
                 <a:solidFill>
                   <a:srgbClr val="4A3FFF"/>
                 </a:solidFill>
@@ -22092,22 +22056,22 @@
               <a:t>▸  </a:t>
             </a:r>
             <a:r>
-              <a:rPr b="1" sz="1650">
+              <a:rPr b="1" sz="1600">
                 <a:solidFill>
                   <a:srgbClr val="1B1B33"/>
                 </a:solidFill>
                 <a:latin typeface="Segoe UI"/>
               </a:rPr>
-              <a:t>COPY returns a per-file result set:   </a:t>
-            </a:r>
-            <a:r>
-              <a:rPr sz="1650">
+              <a:t>One _LOAD_LOG row per file:   </a:t>
+            </a:r>
+            <a:r>
+              <a:rPr sz="1600">
                 <a:solidFill>
                   <a:srgbClr val="1B1B33"/>
                 </a:solidFill>
                 <a:latin typeface="Segoe UI"/>
               </a:rPr>
-              <a:t>rows_parsed / rows_loaded / errors per file, the Python job persists it to _LOAD_LOG; ours never expires.</a:t>
+              <a:t>The loader writes file_name, records_processed, records_quarantined, load timestamp in the SAME transaction as the RAW + quarantine inserts, the load history lives in a queryable table that never expires.</a:t>
             </a:r>
           </a:p>
           <a:p>
@@ -22120,7 +22084,7 @@
               </a:spcAft>
             </a:pPr>
             <a:r>
-              <a:rPr sz="1650">
+              <a:rPr sz="1600">
                 <a:solidFill>
                   <a:srgbClr val="4A3FFF"/>
                 </a:solidFill>
@@ -22129,22 +22093,22 @@
               <a:t>▸  </a:t>
             </a:r>
             <a:r>
-              <a:rPr b="1" sz="1650">
+              <a:rPr b="1" sz="1600">
                 <a:solidFill>
                   <a:srgbClr val="1B1B33"/>
                 </a:solidFill>
                 <a:latin typeface="Segoe UI"/>
               </a:rPr>
-              <a:t>Built-in audit views:   </a:t>
-            </a:r>
-            <a:r>
-              <a:rPr sz="1650">
+              <a:t>Idempotency is explicit, not implicit:   </a:t>
+            </a:r>
+            <a:r>
+              <a:rPr sz="1600">
                 <a:solidFill>
                   <a:srgbClr val="1B1B33"/>
                 </a:solidFill>
                 <a:latin typeface="Segoe UI"/>
               </a:rPr>
-              <a:t>COPY_HISTORY table function = 14 days, per table; ACCOUNT_USAGE = 365 days, account-wide (~90 min lag).</a:t>
+              <a:t>Each run does SELECT DISTINCT file_name FROM _LOAD_LOG and skips anything already there, re-run loads zero, and the authority is our own log, not opaque engine metadata.</a:t>
             </a:r>
           </a:p>
           <a:p>
@@ -22157,7 +22121,7 @@
               </a:spcAft>
             </a:pPr>
             <a:r>
-              <a:rPr sz="1650">
+              <a:rPr sz="1600">
                 <a:solidFill>
                   <a:srgbClr val="4A3FFF"/>
                 </a:solidFill>
@@ -22166,22 +22130,22 @@
               <a:t>▸  </a:t>
             </a:r>
             <a:r>
-              <a:rPr b="1" sz="1650">
+              <a:rPr b="1" sz="1600">
                 <a:solidFill>
                   <a:srgbClr val="1B1B33"/>
                 </a:solidFill>
                 <a:latin typeface="Segoe UI"/>
               </a:rPr>
-              <a:t>The 64-day dedup horizon:   </a:t>
-            </a:r>
-            <a:r>
-              <a:rPr sz="1650">
+              <a:t>Why not COPY INTO:   </a:t>
+            </a:r>
+            <a:r>
+              <a:rPr sz="1600">
                 <a:solidFill>
                   <a:srgbClr val="1B1B33"/>
                 </a:solidFill>
                 <a:latin typeface="Segoe UI"/>
               </a:rPr>
-              <a:t>The internal metadata COPY uses to skip already-loaded files expires after 64 days, separate from the audit views.</a:t>
+              <a:t>Per-row validation + a quarantine reason need Python between read and write, COPY can't branch per row; reading the stage and INSERTing keeps that logic in code.</a:t>
             </a:r>
           </a:p>
           <a:p>
@@ -22194,7 +22158,7 @@
               </a:spcAft>
             </a:pPr>
             <a:r>
-              <a:rPr sz="1650">
+              <a:rPr sz="1600">
                 <a:solidFill>
                   <a:srgbClr val="4A3FFF"/>
                 </a:solidFill>
@@ -22203,22 +22167,22 @@
               <a:t>▸  </a:t>
             </a:r>
             <a:r>
-              <a:rPr b="1" sz="1650">
+              <a:rPr b="1" sz="1600">
                 <a:solidFill>
                   <a:srgbClr val="1B1B33"/>
                 </a:solidFill>
                 <a:latin typeface="Segoe UI"/>
               </a:rPr>
-              <a:t>Beyond 64 days = silent skip:   </a:t>
-            </a:r>
-            <a:r>
-              <a:rPr sz="1650">
+              <a:t>The COPY contrast:   </a:t>
+            </a:r>
+            <a:r>
+              <a:rPr sz="1600">
                 <a:solidFill>
                   <a:srgbClr val="1B1B33"/>
                 </a:solidFill>
                 <a:latin typeface="Segoe UI"/>
               </a:rPr>
-              <a:t>Unknown-status files are skipped, a silent gap, not duplicates; backfill via LOAD_UNCERTAIN_FILES=TRUE or FORCE + SWAP.</a:t>
+              <a:t>COPY's own file-dedup metadata expires after 64 days (beyond it, files are silently skipped, a gap not dups), owning _LOAD_LOG sidesteps that horizon entirely.</a:t>
             </a:r>
           </a:p>
           <a:p>
@@ -22231,7 +22195,7 @@
               </a:spcAft>
             </a:pPr>
             <a:r>
-              <a:rPr sz="1650">
+              <a:rPr sz="1600">
                 <a:solidFill>
                   <a:srgbClr val="4A3FFF"/>
                 </a:solidFill>
@@ -22240,22 +22204,22 @@
               <a:t>▸  </a:t>
             </a:r>
             <a:r>
-              <a:rPr b="1" sz="1650">
+              <a:rPr b="1" sz="1600">
                 <a:solidFill>
                   <a:srgbClr val="1B1B33"/>
                 </a:solidFill>
                 <a:latin typeface="Segoe UI"/>
               </a:rPr>
-              <a:t>Why three layers:   </a:t>
-            </a:r>
-            <a:r>
-              <a:rPr sz="1650">
+              <a:t>Native audit still applies:   </a:t>
+            </a:r>
+            <a:r>
+              <a:rPr sz="1600">
                 <a:solidFill>
                   <a:srgbClr val="1B1B33"/>
                 </a:solidFill>
                 <a:latin typeface="Segoe UI"/>
               </a:rPr>
-              <a:t>COPY history expires · watermarks miss late files · event_id dedup in staging never expires.</a:t>
+              <a:t>QUERY_HISTORY + ACCESS_HISTORY (365 days) show who loaded and who later read ARR; COPY_HISTORY only records real COPY loads, so it's not the surface for this path.</a:t>
             </a:r>
           </a:p>
         </p:txBody>
@@ -22338,7 +22302,7 @@
                 </a:solidFill>
                 <a:latin typeface="Consolas"/>
               </a:rPr>
-              <a:t>every load is observable</a:t>
+              <a:t>load history that never expires</a:t>
             </a:r>
           </a:p>
           <a:p>
@@ -22357,7 +22321,7 @@
                 </a:solidFill>
                 <a:latin typeface="Consolas"/>
               </a:rPr>
-              <a:t>-- COPY's return: per-file summary</a:t>
+              <a:t>-- one row per file, SAME transaction</a:t>
             </a:r>
           </a:p>
           <a:p>
@@ -22372,11 +22336,11 @@
             <a:r>
               <a:rPr sz="1000">
                 <a:solidFill>
-                  <a:srgbClr val="8ED6B0"/>
+                  <a:srgbClr val="E6E9F5"/>
                 </a:solidFill>
                 <a:latin typeface="Consolas"/>
               </a:rPr>
-              <a:t>--  file | status | rows_parsed |</a:t>
+              <a:t>INSERT INTO ...page_views_load_log</a:t>
             </a:r>
           </a:p>
           <a:p>
@@ -22391,11 +22355,11 @@
             <a:r>
               <a:rPr sz="1000">
                 <a:solidFill>
-                  <a:srgbClr val="8ED6B0"/>
+                  <a:srgbClr val="E6E9F5"/>
                 </a:solidFill>
                 <a:latin typeface="Consolas"/>
               </a:rPr>
-              <a:t>--  rows_loaded | first_error ...</a:t>
+              <a:t>  (file_name, records_processed,</a:t>
             </a:r>
           </a:p>
           <a:p>
@@ -22410,11 +22374,11 @@
             <a:r>
               <a:rPr sz="1000">
                 <a:solidFill>
-                  <a:srgbClr val="8ED6B0"/>
+                  <a:srgbClr val="E6E9F5"/>
                 </a:solidFill>
                 <a:latin typeface="Consolas"/>
               </a:rPr>
-              <a:t>--  -&gt; Python writes it to _LOAD_LOG</a:t>
+              <a:t>   records_quarantined)</a:t>
             </a:r>
           </a:p>
           <a:p>
@@ -22426,6 +22390,15 @@
                 <a:spcPts val="100"/>
               </a:spcAft>
             </a:pPr>
+            <a:r>
+              <a:rPr sz="1000">
+                <a:solidFill>
+                  <a:srgbClr val="E6E9F5"/>
+                </a:solidFill>
+                <a:latin typeface="Consolas"/>
+              </a:rPr>
+              <a:t>VALUES (?, ?, ?);</a:t>
+            </a:r>
           </a:p>
           <a:p>
             <a:pPr>
@@ -22436,15 +22409,6 @@
                 <a:spcPts val="100"/>
               </a:spcAft>
             </a:pPr>
-            <a:r>
-              <a:rPr sz="1000">
-                <a:solidFill>
-                  <a:srgbClr val="8ED6B0"/>
-                </a:solidFill>
-                <a:latin typeface="Consolas"/>
-              </a:rPr>
-              <a:t>-- audit: last 14 days, this table</a:t>
-            </a:r>
           </a:p>
           <a:p>
             <a:pPr>
@@ -22458,11 +22422,11 @@
             <a:r>
               <a:rPr sz="1000">
                 <a:solidFill>
-                  <a:srgbClr val="E6E9F5"/>
+                  <a:srgbClr val="8ED6B0"/>
                 </a:solidFill>
                 <a:latin typeface="Consolas"/>
               </a:rPr>
-              <a:t>SELECT file_name, last_load_time,</a:t>
+              <a:t>-- idempotency: skip already-loaded</a:t>
             </a:r>
           </a:p>
           <a:p>
@@ -22481,7 +22445,7 @@
                 </a:solidFill>
                 <a:latin typeface="Consolas"/>
               </a:rPr>
-              <a:t>       row_count, error_count</a:t>
+              <a:t>SELECT DISTINCT file_name</a:t>
             </a:r>
           </a:p>
           <a:p>
@@ -22500,7 +22464,7 @@
                 </a:solidFill>
                 <a:latin typeface="Consolas"/>
               </a:rPr>
-              <a:t>FROM TABLE(information_schema</a:t>
+              <a:t>FROM ...page_views_load_log;</a:t>
             </a:r>
           </a:p>
           <a:p>
@@ -22515,11 +22479,11 @@
             <a:r>
               <a:rPr sz="1000">
                 <a:solidFill>
-                  <a:srgbClr val="E6E9F5"/>
+                  <a:srgbClr val="8ED6B0"/>
                 </a:solidFill>
                 <a:latin typeface="Consolas"/>
               </a:rPr>
-              <a:t>  .copy_history(</a:t>
+              <a:t>--  -&gt; re-run loads 0 rows</a:t>
             </a:r>
           </a:p>
           <a:p>
@@ -22531,15 +22495,6 @@
                 <a:spcPts val="100"/>
               </a:spcAft>
             </a:pPr>
-            <a:r>
-              <a:rPr sz="1000">
-                <a:solidFill>
-                  <a:srgbClr val="E6E9F5"/>
-                </a:solidFill>
-                <a:latin typeface="Consolas"/>
-              </a:rPr>
-              <a:t>   table_name =&gt; 'PAGE_VIEWS',</a:t>
-            </a:r>
           </a:p>
           <a:p>
             <a:pPr>
@@ -22553,11 +22508,11 @@
             <a:r>
               <a:rPr sz="1000">
                 <a:solidFill>
-                  <a:srgbClr val="E6E9F5"/>
+                  <a:srgbClr val="8ED6B0"/>
                 </a:solidFill>
                 <a:latin typeface="Consolas"/>
               </a:rPr>
-              <a:t>   start_time =&gt; dateadd(day, -14,</a:t>
+              <a:t>-- audit: who read ARR, 365 days</a:t>
             </a:r>
           </a:p>
           <a:p>
@@ -22576,7 +22531,7 @@
                 </a:solidFill>
                 <a:latin typeface="Consolas"/>
               </a:rPr>
-              <a:t>     current_timestamp())));</a:t>
+              <a:t>SELECT user_name, query_start_time</a:t>
             </a:r>
           </a:p>
           <a:p>
@@ -22588,6 +22543,15 @@
                 <a:spcPts val="100"/>
               </a:spcAft>
             </a:pPr>
+            <a:r>
+              <a:rPr sz="1000">
+                <a:solidFill>
+                  <a:srgbClr val="E6E9F5"/>
+                </a:solidFill>
+                <a:latin typeface="Consolas"/>
+              </a:rPr>
+              <a:t>FROM snowflake.account_usage</a:t>
+            </a:r>
           </a:p>
           <a:p>
             <a:pPr>
@@ -22601,11 +22565,11 @@
             <a:r>
               <a:rPr sz="1000">
                 <a:solidFill>
-                  <a:srgbClr val="8ED6B0"/>
+                  <a:srgbClr val="E6E9F5"/>
                 </a:solidFill>
                 <a:latin typeface="Consolas"/>
               </a:rPr>
-              <a:t>-- audit: 365 days, account-wide</a:t>
+              <a:t>  .access_history</a:t>
             </a:r>
           </a:p>
           <a:p>
@@ -22624,7 +22588,7 @@
                 </a:solidFill>
                 <a:latin typeface="Consolas"/>
               </a:rPr>
-              <a:t>SELECT * FROM snowflake</a:t>
+              <a:t>WHERE objectName ILIKE '%ACCOUNT'</a:t>
             </a:r>
           </a:p>
           <a:p>
@@ -22643,74 +22607,7 @@
                 </a:solidFill>
                 <a:latin typeface="Consolas"/>
               </a:rPr>
-              <a:t>  .account_usage.copy_history;</a:t>
-            </a:r>
-          </a:p>
-          <a:p>
-            <a:pPr>
-              <a:lnSpc>
-                <a:spcPct val="100000"/>
-              </a:lnSpc>
-              <a:spcAft>
-                <a:spcPts val="100"/>
-              </a:spcAft>
-            </a:pPr>
-          </a:p>
-          <a:p>
-            <a:pPr>
-              <a:lnSpc>
-                <a:spcPct val="100000"/>
-              </a:lnSpc>
-              <a:spcAft>
-                <a:spcPts val="100"/>
-              </a:spcAft>
-            </a:pPr>
-            <a:r>
-              <a:rPr sz="1000">
-                <a:solidFill>
-                  <a:srgbClr val="8ED6B0"/>
-                </a:solidFill>
-                <a:latin typeface="Consolas"/>
-              </a:rPr>
-              <a:t>-- backfill older than 64 days</a:t>
-            </a:r>
-          </a:p>
-          <a:p>
-            <a:pPr>
-              <a:lnSpc>
-                <a:spcPct val="100000"/>
-              </a:lnSpc>
-              <a:spcAft>
-                <a:spcPts val="100"/>
-              </a:spcAft>
-            </a:pPr>
-            <a:r>
-              <a:rPr sz="1000">
-                <a:solidFill>
-                  <a:srgbClr val="E6E9F5"/>
-                </a:solidFill>
-                <a:latin typeface="Consolas"/>
-              </a:rPr>
-              <a:t>COPY INTO ...</a:t>
-            </a:r>
-          </a:p>
-          <a:p>
-            <a:pPr>
-              <a:lnSpc>
-                <a:spcPct val="100000"/>
-              </a:lnSpc>
-              <a:spcAft>
-                <a:spcPts val="100"/>
-              </a:spcAft>
-            </a:pPr>
-            <a:r>
-              <a:rPr sz="1000">
-                <a:solidFill>
-                  <a:srgbClr val="E6E9F5"/>
-                </a:solidFill>
-                <a:latin typeface="Consolas"/>
-              </a:rPr>
-              <a:t>  LOAD_UNCERTAIN_FILES = TRUE;</a:t>
+              <a:t>  AND column_name = 'ARR';</a:t>
             </a:r>
           </a:p>
         </p:txBody>
@@ -22841,7 +22738,7 @@
                 </a:solidFill>
                 <a:latin typeface="Segoe UI"/>
               </a:rPr>
-              <a:t>Snowflake logs every COPY (14-day / 365-day views) and returns a per-file summary, persisting it in _LOAD_LOG gives an audit trail that outlives every retention window.</a:t>
+              <a:t>Tracking filenames ourselves makes idempotency a queryable fact and the load history permanent, no 64-day COPY horizon, and per-row validation stays in code.</a:t>
             </a:r>
           </a:p>
         </p:txBody>
@@ -25143,7 +25040,7 @@
                 </a:solidFill>
                 <a:latin typeface="Segoe UI"/>
               </a:rPr>
-              <a:t>External stage + COPY INTO, or Snowpipe on arrival; capture METADATA$FILENAME for lineage.</a:t>
+              <a:t>Capture METADATA$FILENAME for lineage.</a:t>
             </a:r>
           </a:p>
           <a:p>
